--- a/test_firmware/single_led/G6_BCM_Summary_v2.pptx
+++ b/test_firmware/single_led/G6_BCM_Summary_v2.pptx
@@ -12,9 +12,10 @@
     <p:sldId id="260" r:id="rId6"/>
     <p:sldId id="261" r:id="rId7"/>
     <p:sldId id="262" r:id="rId8"/>
+    <p:sldId id="263" r:id="rId9"/>
   </p:sldIdLst>
   <p:notesMasterIdLst>
-    <p:notesMasterId r:id="rId9"/>
+    <p:notesMasterId r:id="rId10"/>
   </p:notesMasterIdLst>
   <p:sldSz cx="9144000" cy="5143500"/>
   <p:notesSz cx="5143500" cy="9144000"/>
@@ -1060,6 +1061,94 @@
             <a:fld id="{F7021451-1387-4CA6-816F-3879F97B5CBC}" type="slidenum">
               <a:rPr lang="en-US"/>
               <a:t>7</a:t>
+            </a:fld>
+            <a:endParaRPr lang="en-US"/>
+          </a:p>
+        </p:txBody>
+      </p:sp>
+    </p:spTree>
+    <p:extLst>
+      <p:ext uri="{BB962C8B-B14F-4D97-AF65-F5344CB8AC3E}">
+        <p14:creationId xmlns:p14="http://schemas.microsoft.com/office/powerpoint/2010/main" val="1024086991"/>
+      </p:ext>
+    </p:extLst>
+  </p:cSld>
+  <p:clrMapOvr>
+    <a:masterClrMapping/>
+  </p:clrMapOvr>
+</p:notes>
+</file>
+
+<file path=ppt/notesSlides/notesSlide8.xml><?xml version="1.0" encoding="utf-8"?>
+<p:notes xmlns:a="http://schemas.openxmlformats.org/drawingml/2006/main" xmlns:r="http://schemas.openxmlformats.org/officeDocument/2006/relationships" xmlns:p="http://schemas.openxmlformats.org/presentationml/2006/main">
+  <p:cSld>
+    <p:spTree>
+      <p:nvGrpSpPr>
+        <p:cNvPr id="1" name=""/>
+        <p:cNvGrpSpPr/>
+        <p:nvPr/>
+      </p:nvGrpSpPr>
+      <p:grpSpPr>
+        <a:xfrm>
+          <a:off x="0" y="0"/>
+          <a:ext cx="0" cy="0"/>
+          <a:chOff x="0" y="0"/>
+          <a:chExt cx="0" cy="0"/>
+        </a:xfrm>
+      </p:grpSpPr>
+      <p:sp>
+        <p:nvSpPr>
+          <p:cNvPr id="2" name="Slide Image Placeholder 1"/>
+          <p:cNvSpPr>
+            <a:spLocks noGrp="1" noRot="1" noChangeAspect="1"/>
+          </p:cNvSpPr>
+          <p:nvPr>
+            <p:ph type="sldImg"/>
+          </p:nvPr>
+        </p:nvSpPr>
+        <p:spPr/>
+      </p:sp>
+      <p:sp>
+        <p:nvSpPr>
+          <p:cNvPr id="3" name="Notes Placeholder 2"/>
+          <p:cNvSpPr>
+            <a:spLocks noGrp="1"/>
+          </p:cNvSpPr>
+          <p:nvPr>
+            <p:ph type="body" idx="1"/>
+          </p:nvPr>
+        </p:nvSpPr>
+        <p:spPr/>
+        <p:txBody>
+          <a:bodyPr/>
+          <a:lstStyle/>
+          <a:p>
+            <a:r>
+              <a:rPr lang="en-US" dirty="0"/>
+              <a:t/>
+            </a:r>
+            <a:endParaRPr lang="en-US" dirty="0"/>
+          </a:p>
+        </p:txBody>
+      </p:sp>
+      <p:sp>
+        <p:nvSpPr>
+          <p:cNvPr id="4" name="Slide Number Placeholder 3"/>
+          <p:cNvSpPr>
+            <a:spLocks noGrp="1"/>
+          </p:cNvSpPr>
+          <p:nvPr>
+            <p:ph type="sldNum" sz="quarter" idx="10"/>
+          </p:nvPr>
+        </p:nvSpPr>
+        <p:spPr/>
+        <p:txBody>
+          <a:bodyPr/>
+          <a:lstStyle/>
+          <a:p>
+            <a:fld id="{F7021451-1387-4CA6-816F-3879F97B5CBC}" type="slidenum">
+              <a:rPr lang="en-US"/>
+              <a:t>8</a:t>
             </a:fld>
             <a:endParaRPr lang="en-US"/>
           </a:p>
@@ -3083,6 +3172,394 @@
             <a:avLst/>
           </a:prstGeom>
           <a:solidFill>
+            <a:srgbClr val="58A6FF"/>
+          </a:solidFill>
+          <a:ln/>
+        </p:spPr>
+      </p:sp>
+      <p:sp>
+        <p:nvSpPr>
+          <p:cNvPr id="3" name="Text 1"/>
+          <p:cNvSpPr/>
+          <p:nvPr/>
+        </p:nvSpPr>
+        <p:spPr>
+          <a:xfrm>
+            <a:off x="548640" y="228600"/>
+            <a:ext cx="8229600" cy="457200"/>
+          </a:xfrm>
+          <a:prstGeom prst="rect">
+            <a:avLst/>
+          </a:prstGeom>
+          <a:noFill/>
+          <a:ln/>
+        </p:spPr>
+        <p:txBody>
+          <a:bodyPr wrap="square" lIns="0" tIns="0" rIns="0" bIns="0" rtlCol="0" anchor="ctr"/>
+          <a:lstStyle/>
+          <a:p>
+            <a:pPr indent="0" marL="0">
+              <a:buNone/>
+            </a:pPr>
+            <a:r>
+              <a:rPr lang="en-US" sz="2800" b="1" dirty="0">
+                <a:solidFill>
+                  <a:srgbClr val="FFFFFF"/>
+                </a:solidFill>
+                <a:latin typeface="Arial Black" pitchFamily="34" charset="0"/>
+                <a:ea typeface="Arial Black" pitchFamily="34" charset="-122"/>
+                <a:cs typeface="Arial Black" pitchFamily="34" charset="-120"/>
+              </a:rPr>
+              <a:t>LED Spectra — 16 BCM Intensity Levels</a:t>
+            </a:r>
+            <a:endParaRPr lang="en-US" sz="2800" dirty="0"/>
+          </a:p>
+        </p:txBody>
+      </p:sp>
+      <p:pic>
+        <p:nvPicPr>
+          <p:cNvPr id="4" name="Image 0" descr="slide_plots/spectra_16levels.png">    </p:cNvPr>
+          <p:cNvPicPr>
+            <a:picLocks noChangeAspect="1"/>
+          </p:cNvPicPr>
+          <p:nvPr/>
+        </p:nvPicPr>
+        <p:blipFill>
+          <a:blip r:embed="rId1"/>
+          <a:stretch>
+            <a:fillRect/>
+          </a:stretch>
+        </p:blipFill>
+        <p:spPr>
+          <a:xfrm>
+            <a:off x="274320" y="731520"/>
+            <a:ext cx="5943600" cy="3017520"/>
+          </a:xfrm>
+          <a:prstGeom prst="rect">
+            <a:avLst/>
+          </a:prstGeom>
+        </p:spPr>
+      </p:pic>
+      <p:sp>
+        <p:nvSpPr>
+          <p:cNvPr id="5" name="Shape 2"/>
+          <p:cNvSpPr/>
+          <p:nvPr/>
+        </p:nvSpPr>
+        <p:spPr>
+          <a:xfrm>
+            <a:off x="6400800" y="731520"/>
+            <a:ext cx="2468880" cy="3017520"/>
+          </a:xfrm>
+          <a:prstGeom prst="roundRect">
+            <a:avLst>
+              <a:gd name="adj" fmla="val 3704"/>
+            </a:avLst>
+          </a:prstGeom>
+          <a:solidFill>
+            <a:srgbClr val="161B22"/>
+          </a:solidFill>
+          <a:ln w="12700">
+            <a:solidFill>
+              <a:srgbClr val="30363D"/>
+            </a:solidFill>
+            <a:prstDash val="solid"/>
+          </a:ln>
+        </p:spPr>
+      </p:sp>
+      <p:sp>
+        <p:nvSpPr>
+          <p:cNvPr id="6" name="Text 3"/>
+          <p:cNvSpPr/>
+          <p:nvPr/>
+        </p:nvSpPr>
+        <p:spPr>
+          <a:xfrm>
+            <a:off x="6583680" y="868680"/>
+            <a:ext cx="2194560" cy="2743200"/>
+          </a:xfrm>
+          <a:prstGeom prst="rect">
+            <a:avLst/>
+          </a:prstGeom>
+          <a:noFill/>
+          <a:ln/>
+        </p:spPr>
+        <p:txBody>
+          <a:bodyPr wrap="square" lIns="0" tIns="0" rIns="0" bIns="0" rtlCol="0" anchor="ctr"/>
+          <a:lstStyle/>
+          <a:p>
+            <a:pPr indent="0" marL="0">
+              <a:buNone/>
+            </a:pPr>
+            <a:r>
+              <a:rPr lang="en-US" sz="1200" b="1" dirty="0">
+                <a:solidFill>
+                  <a:srgbClr val="E6EDF3"/>
+                </a:solidFill>
+                <a:latin typeface="Calibri" pitchFamily="34" charset="0"/>
+                <a:ea typeface="Calibri" pitchFamily="34" charset="-122"/>
+                <a:cs typeface="Calibri" pitchFamily="34" charset="-120"/>
+              </a:rPr>
+              <a:t>Ocean Insight Flame X
+</a:t>
+            </a:r>
+            <a:endParaRPr lang="en-US" sz="1200" dirty="0"/>
+          </a:p>
+          <a:p>
+            <a:pPr indent="0" marL="0">
+              <a:buNone/>
+            </a:pPr>
+            <a:r>
+              <a:rPr lang="en-US" sz="1100" dirty="0">
+                <a:solidFill>
+                  <a:srgbClr val="58A6FF"/>
+                </a:solidFill>
+                <a:latin typeface="Calibri" pitchFamily="34" charset="0"/>
+                <a:ea typeface="Calibri" pitchFamily="34" charset="-122"/>
+                <a:cs typeface="Calibri" pitchFamily="34" charset="-120"/>
+              </a:rPr>
+              <a:t>570.8 nm peak
+</a:t>
+            </a:r>
+            <a:endParaRPr lang="en-US" sz="1200" dirty="0"/>
+          </a:p>
+          <a:p>
+            <a:pPr indent="0" marL="0">
+              <a:buNone/>
+            </a:pPr>
+            <a:r>
+              <a:rPr lang="en-US" sz="1000" dirty="0">
+                <a:solidFill>
+                  <a:srgbClr val="E6EDF3"/>
+                </a:solidFill>
+                <a:latin typeface="Calibri" pitchFamily="34" charset="0"/>
+                <a:ea typeface="Calibri" pitchFamily="34" charset="-122"/>
+                <a:cs typeface="Calibri" pitchFamily="34" charset="-120"/>
+              </a:rPr>
+              <a:t>50ms integration
+</a:t>
+            </a:r>
+            <a:endParaRPr lang="en-US" sz="1200" dirty="0"/>
+          </a:p>
+          <a:p>
+            <a:pPr indent="0" marL="0">
+              <a:buNone/>
+            </a:pPr>
+            <a:r>
+              <a:rPr lang="en-US" sz="1000" dirty="0">
+                <a:solidFill>
+                  <a:srgbClr val="E6EDF3"/>
+                </a:solidFill>
+                <a:latin typeface="Calibri" pitchFamily="34" charset="0"/>
+                <a:ea typeface="Calibri" pitchFamily="34" charset="-122"/>
+                <a:cs typeface="Calibri" pitchFamily="34" charset="-120"/>
+              </a:rPr>
+              <a:t>560-580nm window (20nm)
+</a:t>
+            </a:r>
+            <a:endParaRPr lang="en-US" sz="1200" dirty="0"/>
+          </a:p>
+          <a:p>
+            <a:pPr indent="0" marL="0">
+              <a:buNone/>
+            </a:pPr>
+            <a:r>
+              <a:rPr lang="en-US" sz="1100" dirty="0">
+                <a:solidFill>
+                  <a:srgbClr val="E6EDF3"/>
+                </a:solidFill>
+                <a:latin typeface="Consolas" pitchFamily="34" charset="0"/>
+                <a:ea typeface="Consolas" pitchFamily="34" charset="-122"/>
+                <a:cs typeface="Consolas" pitchFamily="34" charset="-120"/>
+              </a:rPr>
+              <a:t>T = 0.7 µs
+</a:t>
+            </a:r>
+            <a:endParaRPr lang="en-US" sz="1200" dirty="0"/>
+          </a:p>
+          <a:p>
+            <a:pPr indent="0" marL="0">
+              <a:buNone/>
+            </a:pPr>
+            <a:r>
+              <a:rPr lang="en-US" sz="1000" dirty="0">
+                <a:solidFill>
+                  <a:srgbClr val="E6EDF3"/>
+                </a:solidFill>
+                <a:latin typeface="Calibri" pitchFamily="34" charset="0"/>
+                <a:ea typeface="Calibri" pitchFamily="34" charset="-122"/>
+                <a:cs typeface="Calibri" pitchFamily="34" charset="-120"/>
+              </a:rPr>
+              <a:t>All 400 LEDs active
+</a:t>
+            </a:r>
+            <a:endParaRPr lang="en-US" sz="1200" dirty="0"/>
+          </a:p>
+          <a:p>
+            <a:pPr indent="0" marL="0">
+              <a:buNone/>
+            </a:pPr>
+            <a:r>
+              <a:rPr lang="en-US" sz="1000" dirty="0">
+                <a:solidFill>
+                  <a:srgbClr val="E6EDF3"/>
+                </a:solidFill>
+                <a:latin typeface="Calibri" pitchFamily="34" charset="0"/>
+                <a:ea typeface="Calibri" pitchFamily="34" charset="-122"/>
+                <a:cs typeface="Calibri" pitchFamily="34" charset="-120"/>
+              </a:rPr>
+              <a:t>Signal grows linearly
+with BCM level (0→15)
+</a:t>
+            </a:r>
+            <a:endParaRPr lang="en-US" sz="1200" dirty="0"/>
+          </a:p>
+          <a:p>
+            <a:pPr indent="0" marL="0">
+              <a:buNone/>
+            </a:pPr>
+            <a:r>
+              <a:rPr lang="en-US" sz="900" dirty="0">
+                <a:solidFill>
+                  <a:srgbClr val="8B949E"/>
+                </a:solidFill>
+                <a:latin typeface="Calibri" pitchFamily="34" charset="0"/>
+                <a:ea typeface="Calibri" pitchFamily="34" charset="-122"/>
+                <a:cs typeface="Calibri" pitchFamily="34" charset="-120"/>
+              </a:rPr>
+              <a:t>Spectra captured at</a:t>
+            </a:r>
+            <a:endParaRPr lang="en-US" sz="1200" dirty="0"/>
+          </a:p>
+          <a:p>
+            <a:pPr indent="0" marL="0">
+              <a:buNone/>
+            </a:pPr>
+            <a:r>
+              <a:rPr lang="en-US" sz="900" dirty="0">
+                <a:solidFill>
+                  <a:srgbClr val="8B949E"/>
+                </a:solidFill>
+                <a:latin typeface="Calibri" pitchFamily="34" charset="0"/>
+                <a:ea typeface="Calibri" pitchFamily="34" charset="-122"/>
+                <a:cs typeface="Calibri" pitchFamily="34" charset="-120"/>
+              </a:rPr>
+              <a:t>middle of each 3s hold</a:t>
+            </a:r>
+            <a:endParaRPr lang="en-US" sz="1200" dirty="0"/>
+          </a:p>
+        </p:txBody>
+      </p:sp>
+      <p:sp>
+        <p:nvSpPr>
+          <p:cNvPr id="7" name="Text 4"/>
+          <p:cNvSpPr/>
+          <p:nvPr/>
+        </p:nvSpPr>
+        <p:spPr>
+          <a:xfrm>
+            <a:off x="274320" y="3840480"/>
+            <a:ext cx="5943600" cy="182880"/>
+          </a:xfrm>
+          <a:prstGeom prst="rect">
+            <a:avLst/>
+          </a:prstGeom>
+          <a:noFill/>
+          <a:ln/>
+        </p:spPr>
+        <p:txBody>
+          <a:bodyPr wrap="square" lIns="0" tIns="0" rIns="0" bIns="0" rtlCol="0" anchor="ctr"/>
+          <a:lstStyle/>
+          <a:p>
+            <a:pPr indent="0" marL="0">
+              <a:buNone/>
+            </a:pPr>
+            <a:r>
+              <a:rPr lang="en-US" sz="900" i="1" dirty="0">
+                <a:solidFill>
+                  <a:srgbClr val="8B949E"/>
+                </a:solidFill>
+                <a:latin typeface="Calibri" pitchFamily="34" charset="0"/>
+                <a:ea typeface="Calibri" pitchFamily="34" charset="-122"/>
+                <a:cs typeface="Calibri" pitchFamily="34" charset="-120"/>
+              </a:rPr>
+              <a:t>Raw time trace (16 levels × 3s + 1s OFF gaps)</a:t>
+            </a:r>
+            <a:endParaRPr lang="en-US" sz="900" dirty="0"/>
+          </a:p>
+        </p:txBody>
+      </p:sp>
+      <p:pic>
+        <p:nvPicPr>
+          <p:cNvPr id="8" name="Image 1" descr="slide_plots/time_trace.png">    </p:cNvPr>
+          <p:cNvPicPr>
+            <a:picLocks noChangeAspect="1"/>
+          </p:cNvPicPr>
+          <p:nvPr/>
+        </p:nvPicPr>
+        <p:blipFill>
+          <a:blip r:embed="rId2"/>
+          <a:stretch>
+            <a:fillRect/>
+          </a:stretch>
+        </p:blipFill>
+        <p:spPr>
+          <a:xfrm>
+            <a:off x="274320" y="3977640"/>
+            <a:ext cx="8595360" cy="960120"/>
+          </a:xfrm>
+          <a:prstGeom prst="rect">
+            <a:avLst/>
+          </a:prstGeom>
+        </p:spPr>
+      </p:pic>
+    </p:spTree>
+  </p:cSld>
+  <p:clrMapOvr>
+    <a:masterClrMapping/>
+  </p:clrMapOvr>
+</p:sld>
+</file>
+
+<file path=ppt/slides/slide5.xml><?xml version="1.0" encoding="utf-8"?>
+<p:sld xmlns:a="http://schemas.openxmlformats.org/drawingml/2006/main" xmlns:r="http://schemas.openxmlformats.org/officeDocument/2006/relationships" xmlns:p="http://schemas.openxmlformats.org/presentationml/2006/main">
+  <p:cSld name="Slide 5">
+    <p:bg>
+      <p:bgPr>
+        <a:solidFill>
+          <a:srgbClr val="0D1117"/>
+        </a:solidFill>
+      </p:bgPr>
+    </p:bg>
+    <p:spTree>
+      <p:nvGrpSpPr>
+        <p:cNvPr id="1" name=""/>
+        <p:cNvGrpSpPr/>
+        <p:nvPr/>
+      </p:nvGrpSpPr>
+      <p:grpSpPr>
+        <a:xfrm>
+          <a:off x="0" y="0"/>
+          <a:ext cx="0" cy="0"/>
+          <a:chOff x="0" y="0"/>
+          <a:chExt cx="0" cy="0"/>
+        </a:xfrm>
+      </p:grpSpPr>
+      <p:sp>
+        <p:nvSpPr>
+          <p:cNvPr id="2" name="Shape 0"/>
+          <p:cNvSpPr/>
+          <p:nvPr/>
+        </p:nvSpPr>
+        <p:spPr>
+          <a:xfrm>
+            <a:off x="0" y="0"/>
+            <a:ext cx="9144000" cy="54864"/>
+          </a:xfrm>
+          <a:prstGeom prst="rect">
+            <a:avLst/>
+          </a:prstGeom>
+          <a:solidFill>
             <a:srgbClr val="F78166"/>
           </a:solidFill>
           <a:ln/>
@@ -3127,43 +3604,64 @@
           </a:p>
         </p:txBody>
       </p:sp>
+      <p:pic>
+        <p:nvPicPr>
+          <p:cNvPr id="4" name="Image 0" descr="slide_plots/linearity_default.png">    </p:cNvPr>
+          <p:cNvPicPr>
+            <a:picLocks noChangeAspect="1"/>
+          </p:cNvPicPr>
+          <p:nvPr/>
+        </p:nvPicPr>
+        <p:blipFill>
+          <a:blip r:embed="rId1"/>
+          <a:stretch>
+            <a:fillRect/>
+          </a:stretch>
+        </p:blipFill>
+        <p:spPr>
+          <a:xfrm>
+            <a:off x="274320" y="731520"/>
+            <a:ext cx="4754880" cy="3566160"/>
+          </a:xfrm>
+          <a:prstGeom prst="rect">
+            <a:avLst/>
+          </a:prstGeom>
+        </p:spPr>
+      </p:pic>
+      <p:pic>
+        <p:nvPicPr>
+          <p:cNvPr id="5" name="Image 1" descr="slide_plots/bitplane_brightness.png">    </p:cNvPr>
+          <p:cNvPicPr>
+            <a:picLocks noChangeAspect="1"/>
+          </p:cNvPicPr>
+          <p:nvPr/>
+        </p:nvPicPr>
+        <p:blipFill>
+          <a:blip r:embed="rId2"/>
+          <a:stretch>
+            <a:fillRect/>
+          </a:stretch>
+        </p:blipFill>
+        <p:spPr>
+          <a:xfrm>
+            <a:off x="5029200" y="731520"/>
+            <a:ext cx="3840480" cy="3017520"/>
+          </a:xfrm>
+          <a:prstGeom prst="rect">
+            <a:avLst/>
+          </a:prstGeom>
+        </p:spPr>
+      </p:pic>
       <p:sp>
         <p:nvSpPr>
-          <p:cNvPr id="4" name="Shape 2"/>
+          <p:cNvPr id="6" name="Text 2"/>
           <p:cNvSpPr/>
           <p:nvPr/>
         </p:nvSpPr>
         <p:spPr>
           <a:xfrm>
-            <a:off x="548640" y="822960"/>
-            <a:ext cx="4114800" cy="3291840"/>
-          </a:xfrm>
-          <a:prstGeom prst="roundRect">
-            <a:avLst>
-              <a:gd name="adj" fmla="val 2778"/>
-            </a:avLst>
-          </a:prstGeom>
-          <a:solidFill>
-            <a:srgbClr val="161B22"/>
-          </a:solidFill>
-          <a:ln w="12700">
-            <a:solidFill>
-              <a:srgbClr val="30363D"/>
-            </a:solidFill>
-            <a:prstDash val="solid"/>
-          </a:ln>
-        </p:spPr>
-      </p:sp>
-      <p:sp>
-        <p:nvSpPr>
-          <p:cNvPr id="5" name="Text 3"/>
-          <p:cNvSpPr/>
-          <p:nvPr/>
-        </p:nvSpPr>
-        <p:spPr>
-          <a:xfrm>
-            <a:off x="731520" y="914400"/>
-            <a:ext cx="3749040" cy="274320"/>
+            <a:off x="5029200" y="3840480"/>
+            <a:ext cx="3840480" cy="548640"/>
           </a:xfrm>
           <a:prstGeom prst="rect">
             <a:avLst/>
@@ -3179,30 +3677,48 @@
               <a:buNone/>
             </a:pPr>
             <a:r>
-              <a:rPr lang="en-US" sz="1400" b="1" dirty="0">
+              <a:rPr lang="en-US" sz="1100" b="1" dirty="0">
                 <a:solidFill>
-                  <a:srgbClr val="58A6FF"/>
+                  <a:srgbClr val="F78166"/>
                 </a:solidFill>
                 <a:latin typeface="Calibri" pitchFamily="34" charset="0"/>
                 <a:ea typeface="Calibri" pitchFamily="34" charset="-122"/>
                 <a:cs typeface="Calibri" pitchFamily="34" charset="-120"/>
               </a:rPr>
-              <a:t>Ocean Insight Flame X Spectrometer</a:t>
+              <a:t>Non-monotonic at bit-plane boundaries:
+</a:t>
             </a:r>
-            <a:endParaRPr lang="en-US" sz="1400" dirty="0"/>
+            <a:endParaRPr lang="en-US" sz="1100" dirty="0"/>
+          </a:p>
+          <a:p>
+            <a:pPr indent="0" marL="0">
+              <a:buNone/>
+            </a:pPr>
+            <a:r>
+              <a:rPr lang="en-US" sz="1000" dirty="0">
+                <a:solidFill>
+                  <a:srgbClr val="E6EDF3"/>
+                </a:solidFill>
+                <a:latin typeface="Calibri" pitchFamily="34" charset="0"/>
+                <a:ea typeface="Calibri" pitchFamily="34" charset="-122"/>
+                <a:cs typeface="Calibri" pitchFamily="34" charset="-120"/>
+              </a:rPr>
+              <a:t>L3 (B0+B1) ≈ L4 (B2)  |  L7 (B0+B1+B2) &gt; L8 (B3)  |  L11 ≈ L12</a:t>
+            </a:r>
+            <a:endParaRPr lang="en-US" sz="1100" dirty="0"/>
           </a:p>
         </p:txBody>
       </p:sp>
       <p:sp>
         <p:nvSpPr>
-          <p:cNvPr id="6" name="Text 4"/>
+          <p:cNvPr id="7" name="Text 3"/>
           <p:cNvSpPr/>
           <p:nvPr/>
         </p:nvSpPr>
         <p:spPr>
           <a:xfrm>
-            <a:off x="731520" y="1234440"/>
-            <a:ext cx="3749040" cy="2743200"/>
+            <a:off x="274320" y="4434840"/>
+            <a:ext cx="8595360" cy="228600"/>
           </a:xfrm>
           <a:prstGeom prst="rect">
             <a:avLst/>
@@ -3218,133 +3734,7 @@
               <a:buNone/>
             </a:pPr>
             <a:r>
-              <a:rPr lang="en-US" sz="1200" b="1" dirty="0">
-                <a:solidFill>
-                  <a:srgbClr val="E6EDF3"/>
-                </a:solidFill>
-                <a:latin typeface="Calibri" pitchFamily="34" charset="0"/>
-                <a:ea typeface="Calibri" pitchFamily="34" charset="-122"/>
-                <a:cs typeface="Calibri" pitchFamily="34" charset="-120"/>
-              </a:rPr>
-              <a:t>LED peak: 570.8 nm
-</a:t>
-            </a:r>
-            <a:endParaRPr lang="en-US" sz="1200" dirty="0"/>
-          </a:p>
-          <a:p>
-            <a:pPr indent="0" marL="0">
-              <a:buNone/>
-            </a:pPr>
-            <a:r>
-              <a:rPr lang="en-US" sz="1000" dirty="0">
-                <a:solidFill>
-                  <a:srgbClr val="E6EDF3"/>
-                </a:solidFill>
-                <a:latin typeface="Calibri" pitchFamily="34" charset="0"/>
-                <a:ea typeface="Calibri" pitchFamily="34" charset="-122"/>
-                <a:cs typeface="Calibri" pitchFamily="34" charset="-120"/>
-              </a:rPr>
-              <a:t>Integration: 50ms | Window: 560-580nm (20nm)
-</a:t>
-            </a:r>
-            <a:endParaRPr lang="en-US" sz="1200" dirty="0"/>
-          </a:p>
-          <a:p>
-            <a:pPr indent="0" marL="0">
-              <a:buNone/>
-            </a:pPr>
-            <a:r>
-              <a:rPr lang="en-US" sz="1000" dirty="0">
-                <a:solidFill>
-                  <a:srgbClr val="E6EDF3"/>
-                </a:solidFill>
-                <a:latin typeface="Calibri" pitchFamily="34" charset="0"/>
-                <a:ea typeface="Calibri" pitchFamily="34" charset="-122"/>
-                <a:cs typeface="Calibri" pitchFamily="34" charset="-120"/>
-              </a:rPr>
-              <a:t>T = 0.7 µs | All 400 LEDs | DWT trigger
-</a:t>
-            </a:r>
-            <a:endParaRPr lang="en-US" sz="1200" dirty="0"/>
-          </a:p>
-          <a:p>
-            <a:pPr indent="0" marL="0">
-              <a:buNone/>
-            </a:pPr>
-            <a:r>
-              <a:rPr lang="en-US" sz="1400" b="1" dirty="0">
-                <a:solidFill>
-                  <a:srgbClr val="F78166"/>
-                </a:solidFill>
-                <a:latin typeface="Calibri" pitchFamily="34" charset="0"/>
-                <a:ea typeface="Calibri" pitchFamily="34" charset="-122"/>
-                <a:cs typeface="Calibri" pitchFamily="34" charset="-120"/>
-              </a:rPr>
-              <a:t>NOT monotonic
-</a:t>
-            </a:r>
-            <a:endParaRPr lang="en-US" sz="1200" dirty="0"/>
-          </a:p>
-          <a:p>
-            <a:pPr indent="0" marL="0">
-              <a:buNone/>
-            </a:pPr>
-            <a:r>
-              <a:rPr lang="en-US" sz="1200" dirty="0">
-                <a:solidFill>
-                  <a:srgbClr val="F78166"/>
-                </a:solidFill>
-                <a:latin typeface="Calibri" pitchFamily="34" charset="0"/>
-                <a:ea typeface="Calibri" pitchFamily="34" charset="-122"/>
-                <a:cs typeface="Calibri" pitchFamily="34" charset="-120"/>
-              </a:rPr>
-              <a:t>Max error: 6.7%
-</a:t>
-            </a:r>
-            <a:endParaRPr lang="en-US" sz="1200" dirty="0"/>
-          </a:p>
-          <a:p>
-            <a:pPr indent="0" marL="0">
-              <a:buNone/>
-            </a:pPr>
-            <a:r>
-              <a:rPr lang="en-US" sz="1100" b="1" dirty="0">
-                <a:solidFill>
-                  <a:srgbClr val="E6EDF3"/>
-                </a:solidFill>
-                <a:latin typeface="Calibri" pitchFamily="34" charset="0"/>
-                <a:ea typeface="Calibri" pitchFamily="34" charset="-122"/>
-                <a:cs typeface="Calibri" pitchFamily="34" charset="-120"/>
-              </a:rPr>
-              <a:t>Problem: L3 ≈ L4, L7 &gt; L8, L11 ≈ L12
-</a:t>
-            </a:r>
-            <a:endParaRPr lang="en-US" sz="1200" dirty="0"/>
-          </a:p>
-          <a:p>
-            <a:pPr indent="0" marL="0">
-              <a:buNone/>
-            </a:pPr>
-            <a:r>
-              <a:rPr lang="en-US" sz="1000" dirty="0">
-                <a:solidFill>
-                  <a:srgbClr val="E6EDF3"/>
-                </a:solidFill>
-                <a:latin typeface="Calibri" pitchFamily="34" charset="0"/>
-                <a:ea typeface="Calibri" pitchFamily="34" charset="-122"/>
-                <a:cs typeface="Calibri" pitchFamily="34" charset="-120"/>
-              </a:rPr>
-              <a:t>Bit-plane boundaries are non-monotonic
-</a:t>
-            </a:r>
-            <a:endParaRPr lang="en-US" sz="1200" dirty="0"/>
-          </a:p>
-          <a:p>
-            <a:pPr indent="0" marL="0">
-              <a:buNone/>
-            </a:pPr>
-            <a:r>
-              <a:rPr lang="en-US" sz="1100" b="1" dirty="0">
+              <a:rPr lang="en-US" sz="1100" i="1" dirty="0">
                 <a:solidFill>
                   <a:srgbClr val="58A6FF"/>
                 </a:solidFill>
@@ -3352,4645 +3742,9 @@
                 <a:ea typeface="Calibri" pitchFamily="34" charset="-122"/>
                 <a:cs typeface="Calibri" pitchFamily="34" charset="-120"/>
               </a:rPr>
-              <a:t>Root cause: brightness per µs decays
-</a:t>
+              <a:t>Longer bit-planes produce less light per µs — 56% drop from B0 to B3</a:t>
             </a:r>
-            <a:endParaRPr lang="en-US" sz="1200" dirty="0"/>
-          </a:p>
-          <a:p>
-            <a:pPr indent="0" marL="0">
-              <a:buNone/>
-            </a:pPr>
-            <a:r>
-              <a:rPr lang="en-US" sz="1000" dirty="0">
-                <a:solidFill>
-                  <a:srgbClr val="E6EDF3"/>
-                </a:solidFill>
-                <a:latin typeface="Consolas" pitchFamily="34" charset="0"/>
-                <a:ea typeface="Consolas" pitchFamily="34" charset="-122"/>
-                <a:cs typeface="Consolas" pitchFamily="34" charset="-120"/>
-              </a:rPr>
-              <a:t>B0: 3163 cts/µs
-</a:t>
-            </a:r>
-            <a:endParaRPr lang="en-US" sz="1200" dirty="0"/>
-          </a:p>
-          <a:p>
-            <a:pPr indent="0" marL="0">
-              <a:buNone/>
-            </a:pPr>
-            <a:r>
-              <a:rPr lang="en-US" sz="1000" dirty="0">
-                <a:solidFill>
-                  <a:srgbClr val="E6EDF3"/>
-                </a:solidFill>
-                <a:latin typeface="Consolas" pitchFamily="34" charset="0"/>
-                <a:ea typeface="Consolas" pitchFamily="34" charset="-122"/>
-                <a:cs typeface="Consolas" pitchFamily="34" charset="-120"/>
-              </a:rPr>
-              <a:t>B1: 2648 cts/µs (−16%)
-</a:t>
-            </a:r>
-            <a:endParaRPr lang="en-US" sz="1200" dirty="0"/>
-          </a:p>
-          <a:p>
-            <a:pPr indent="0" marL="0">
-              <a:buNone/>
-            </a:pPr>
-            <a:r>
-              <a:rPr lang="en-US" sz="1000" dirty="0">
-                <a:solidFill>
-                  <a:srgbClr val="E6EDF3"/>
-                </a:solidFill>
-                <a:latin typeface="Consolas" pitchFamily="34" charset="0"/>
-                <a:ea typeface="Consolas" pitchFamily="34" charset="-122"/>
-                <a:cs typeface="Consolas" pitchFamily="34" charset="-120"/>
-              </a:rPr>
-              <a:t>B2: 2108 cts/µs (−33%)
-</a:t>
-            </a:r>
-            <a:endParaRPr lang="en-US" sz="1200" dirty="0"/>
-          </a:p>
-          <a:p>
-            <a:pPr indent="0" marL="0">
-              <a:buNone/>
-            </a:pPr>
-            <a:r>
-              <a:rPr lang="en-US" sz="1000" dirty="0">
-                <a:solidFill>
-                  <a:srgbClr val="E6EDF3"/>
-                </a:solidFill>
-                <a:latin typeface="Consolas" pitchFamily="34" charset="0"/>
-                <a:ea typeface="Consolas" pitchFamily="34" charset="-122"/>
-                <a:cs typeface="Consolas" pitchFamily="34" charset="-120"/>
-              </a:rPr>
-              <a:t>B3: 2024 cts/µs (−36%)</a:t>
-            </a:r>
-            <a:endParaRPr lang="en-US" sz="1200" dirty="0"/>
-          </a:p>
-        </p:txBody>
-      </p:sp>
-      <p:sp>
-        <p:nvSpPr>
-          <p:cNvPr id="7" name="Text 5"/>
-          <p:cNvSpPr/>
-          <p:nvPr/>
-        </p:nvSpPr>
-        <p:spPr>
-          <a:xfrm>
-            <a:off x="4937760" y="822960"/>
-            <a:ext cx="3840480" cy="274320"/>
-          </a:xfrm>
-          <a:prstGeom prst="rect">
-            <a:avLst/>
-          </a:prstGeom>
-          <a:noFill/>
-          <a:ln/>
-        </p:spPr>
-        <p:txBody>
-          <a:bodyPr wrap="square" lIns="0" tIns="0" rIns="0" bIns="0" rtlCol="0" anchor="ctr"/>
-          <a:lstStyle/>
-          <a:p>
-            <a:pPr indent="0" marL="0">
-              <a:buNone/>
-            </a:pPr>
-            <a:r>
-              <a:rPr lang="en-US" sz="1400" b="1" dirty="0">
-                <a:solidFill>
-                  <a:srgbClr val="58A6FF"/>
-                </a:solidFill>
-                <a:latin typeface="Calibri" pitchFamily="34" charset="0"/>
-                <a:ea typeface="Calibri" pitchFamily="34" charset="-122"/>
-                <a:cs typeface="Calibri" pitchFamily="34" charset="-120"/>
-              </a:rPr>
-              <a:t>Measured vs Ideal</a:t>
-            </a:r>
-            <a:endParaRPr lang="en-US" sz="1400" dirty="0"/>
-          </a:p>
-        </p:txBody>
-      </p:sp>
-      <p:graphicFrame>
-        <p:nvGraphicFramePr>
-          <p:cNvPr id="5" name="Table 0"/>
-          <p:cNvGraphicFramePr>
-            <a:graphicFrameLocks noGrp="1"/>
-          </p:cNvGraphicFramePr>
-          <p:nvPr>
-            <p:extLst>
-              <p:ext uri="{D42A27DB-BD31-4B8C-83A1-F6EECF244321}">
-                <p14:modId xmlns:p14="http://schemas.microsoft.com/office/powerpoint/2010/main" val="1579011935"/>
-              </p:ext>
-            </p:extLst>
-          </p:nvPr>
-        </p:nvGraphicFramePr>
-        <p:xfrm>
-          <a:off x="4937760" y="1143000"/>
-          <a:ext cx="3840480" cy="914400"/>
-        </p:xfrm>
-        <a:graphic>
-          <a:graphicData uri="http://schemas.openxmlformats.org/drawingml/2006/table">
-            <a:tbl>
-              <a:tblPr/>
-              <a:tblGrid>
-                <a:gridCol w="457200"/>
-                <a:gridCol w="1097280"/>
-                <a:gridCol w="914400"/>
-                <a:gridCol w="914400"/>
-              </a:tblGrid>
-              <a:tr h="201168">
-                <a:tc>
-                  <a:txBody>
-                    <a:bodyPr/>
-                    <a:lstStyle/>
-                    <a:p>
-                      <a:pPr indent="0" marL="0">
-                        <a:buNone/>
-                      </a:pPr>
-                      <a:r>
-                        <a:rPr lang="en-US" sz="900" dirty="0">
-                          <a:solidFill>
-                            <a:srgbClr val="E6EDF3"/>
-                          </a:solidFill>
-                          <a:latin typeface="Consolas" pitchFamily="34" charset="0"/>
-                          <a:ea typeface="Consolas" pitchFamily="34" charset="-122"/>
-                          <a:cs typeface="Consolas" pitchFamily="34" charset="-120"/>
-                        </a:rPr>
-                        <a:t>Lv</a:t>
-                      </a:r>
-                      <a:endParaRPr lang="en-US" sz="900" dirty="0">
-                        <a:latin typeface="Consolas" charset="0"/>
-                        <a:ea typeface="Consolas" charset="0"/>
-                        <a:cs typeface="Consolas" charset="0"/>
-                      </a:endParaRPr>
-                    </a:p>
-                  </a:txBody>
-                  <a:tcPr marL="91440" marR="91440" marT="45720" marB="45720">
-                    <a:lnL w="3810" cap="flat" cmpd="sng" algn="ctr">
-                      <a:solidFill>
-                        <a:srgbClr val="30363D"/>
-                      </a:solidFill>
-                      <a:prstDash val="solid"/>
-                      <a:round/>
-                      <a:headEnd type="none" w="med" len="med"/>
-                      <a:tailEnd type="none" w="med" len="med"/>
-                    </a:lnL>
-                    <a:lnR w="3810" cap="flat" cmpd="sng" algn="ctr">
-                      <a:solidFill>
-                        <a:srgbClr val="30363D"/>
-                      </a:solidFill>
-                      <a:prstDash val="solid"/>
-                      <a:round/>
-                      <a:headEnd type="none" w="med" len="med"/>
-                      <a:tailEnd type="none" w="med" len="med"/>
-                    </a:lnR>
-                    <a:lnT w="3810" cap="flat" cmpd="sng" algn="ctr">
-                      <a:solidFill>
-                        <a:srgbClr val="30363D"/>
-                      </a:solidFill>
-                      <a:prstDash val="solid"/>
-                      <a:round/>
-                      <a:headEnd type="none" w="med" len="med"/>
-                      <a:tailEnd type="none" w="med" len="med"/>
-                    </a:lnT>
-                    <a:lnB w="3810" cap="flat" cmpd="sng" algn="ctr">
-                      <a:solidFill>
-                        <a:srgbClr val="30363D"/>
-                      </a:solidFill>
-                      <a:prstDash val="solid"/>
-                      <a:round/>
-                      <a:headEnd type="none" w="med" len="med"/>
-                      <a:tailEnd type="none" w="med" len="med"/>
-                    </a:lnB>
-                  </a:tcPr>
-                </a:tc>
-                <a:tc>
-                  <a:txBody>
-                    <a:bodyPr/>
-                    <a:lstStyle/>
-                    <a:p>
-                      <a:pPr indent="0" marL="0">
-                        <a:buNone/>
-                      </a:pPr>
-                      <a:r>
-                        <a:rPr lang="en-US" sz="900" dirty="0">
-                          <a:solidFill>
-                            <a:srgbClr val="E6EDF3"/>
-                          </a:solidFill>
-                          <a:latin typeface="Consolas" pitchFamily="34" charset="0"/>
-                          <a:ea typeface="Consolas" pitchFamily="34" charset="-122"/>
-                          <a:cs typeface="Consolas" pitchFamily="34" charset="-120"/>
-                        </a:rPr>
-                        <a:t>Measured</a:t>
-                      </a:r>
-                      <a:endParaRPr lang="en-US" sz="900" dirty="0">
-                        <a:latin typeface="Consolas" charset="0"/>
-                        <a:ea typeface="Consolas" charset="0"/>
-                        <a:cs typeface="Consolas" charset="0"/>
-                      </a:endParaRPr>
-                    </a:p>
-                  </a:txBody>
-                  <a:tcPr marL="91440" marR="91440" marT="45720" marB="45720">
-                    <a:lnL w="3810" cap="flat" cmpd="sng" algn="ctr">
-                      <a:solidFill>
-                        <a:srgbClr val="30363D"/>
-                      </a:solidFill>
-                      <a:prstDash val="solid"/>
-                      <a:round/>
-                      <a:headEnd type="none" w="med" len="med"/>
-                      <a:tailEnd type="none" w="med" len="med"/>
-                    </a:lnL>
-                    <a:lnR w="3810" cap="flat" cmpd="sng" algn="ctr">
-                      <a:solidFill>
-                        <a:srgbClr val="30363D"/>
-                      </a:solidFill>
-                      <a:prstDash val="solid"/>
-                      <a:round/>
-                      <a:headEnd type="none" w="med" len="med"/>
-                      <a:tailEnd type="none" w="med" len="med"/>
-                    </a:lnR>
-                    <a:lnT w="3810" cap="flat" cmpd="sng" algn="ctr">
-                      <a:solidFill>
-                        <a:srgbClr val="30363D"/>
-                      </a:solidFill>
-                      <a:prstDash val="solid"/>
-                      <a:round/>
-                      <a:headEnd type="none" w="med" len="med"/>
-                      <a:tailEnd type="none" w="med" len="med"/>
-                    </a:lnT>
-                    <a:lnB w="3810" cap="flat" cmpd="sng" algn="ctr">
-                      <a:solidFill>
-                        <a:srgbClr val="30363D"/>
-                      </a:solidFill>
-                      <a:prstDash val="solid"/>
-                      <a:round/>
-                      <a:headEnd type="none" w="med" len="med"/>
-                      <a:tailEnd type="none" w="med" len="med"/>
-                    </a:lnB>
-                  </a:tcPr>
-                </a:tc>
-                <a:tc>
-                  <a:txBody>
-                    <a:bodyPr/>
-                    <a:lstStyle/>
-                    <a:p>
-                      <a:pPr indent="0" marL="0">
-                        <a:buNone/>
-                      </a:pPr>
-                      <a:r>
-                        <a:rPr lang="en-US" sz="900" dirty="0">
-                          <a:solidFill>
-                            <a:srgbClr val="E6EDF3"/>
-                          </a:solidFill>
-                          <a:latin typeface="Consolas" pitchFamily="34" charset="0"/>
-                          <a:ea typeface="Consolas" pitchFamily="34" charset="-122"/>
-                          <a:cs typeface="Consolas" pitchFamily="34" charset="-120"/>
-                        </a:rPr>
-                        <a:t>Ideal</a:t>
-                      </a:r>
-                      <a:endParaRPr lang="en-US" sz="900" dirty="0">
-                        <a:latin typeface="Consolas" charset="0"/>
-                        <a:ea typeface="Consolas" charset="0"/>
-                        <a:cs typeface="Consolas" charset="0"/>
-                      </a:endParaRPr>
-                    </a:p>
-                  </a:txBody>
-                  <a:tcPr marL="91440" marR="91440" marT="45720" marB="45720">
-                    <a:lnL w="3810" cap="flat" cmpd="sng" algn="ctr">
-                      <a:solidFill>
-                        <a:srgbClr val="30363D"/>
-                      </a:solidFill>
-                      <a:prstDash val="solid"/>
-                      <a:round/>
-                      <a:headEnd type="none" w="med" len="med"/>
-                      <a:tailEnd type="none" w="med" len="med"/>
-                    </a:lnL>
-                    <a:lnR w="3810" cap="flat" cmpd="sng" algn="ctr">
-                      <a:solidFill>
-                        <a:srgbClr val="30363D"/>
-                      </a:solidFill>
-                      <a:prstDash val="solid"/>
-                      <a:round/>
-                      <a:headEnd type="none" w="med" len="med"/>
-                      <a:tailEnd type="none" w="med" len="med"/>
-                    </a:lnR>
-                    <a:lnT w="3810" cap="flat" cmpd="sng" algn="ctr">
-                      <a:solidFill>
-                        <a:srgbClr val="30363D"/>
-                      </a:solidFill>
-                      <a:prstDash val="solid"/>
-                      <a:round/>
-                      <a:headEnd type="none" w="med" len="med"/>
-                      <a:tailEnd type="none" w="med" len="med"/>
-                    </a:lnT>
-                    <a:lnB w="3810" cap="flat" cmpd="sng" algn="ctr">
-                      <a:solidFill>
-                        <a:srgbClr val="30363D"/>
-                      </a:solidFill>
-                      <a:prstDash val="solid"/>
-                      <a:round/>
-                      <a:headEnd type="none" w="med" len="med"/>
-                      <a:tailEnd type="none" w="med" len="med"/>
-                    </a:lnB>
-                  </a:tcPr>
-                </a:tc>
-                <a:tc>
-                  <a:txBody>
-                    <a:bodyPr/>
-                    <a:lstStyle/>
-                    <a:p>
-                      <a:pPr indent="0" marL="0">
-                        <a:buNone/>
-                      </a:pPr>
-                      <a:r>
-                        <a:rPr lang="en-US" sz="900" dirty="0">
-                          <a:solidFill>
-                            <a:srgbClr val="E6EDF3"/>
-                          </a:solidFill>
-                          <a:latin typeface="Consolas" pitchFamily="34" charset="0"/>
-                          <a:ea typeface="Consolas" pitchFamily="34" charset="-122"/>
-                          <a:cs typeface="Consolas" pitchFamily="34" charset="-120"/>
-                        </a:rPr>
-                        <a:t>Err</a:t>
-                      </a:r>
-                      <a:endParaRPr lang="en-US" sz="900" dirty="0">
-                        <a:latin typeface="Consolas" charset="0"/>
-                        <a:ea typeface="Consolas" charset="0"/>
-                        <a:cs typeface="Consolas" charset="0"/>
-                      </a:endParaRPr>
-                    </a:p>
-                  </a:txBody>
-                  <a:tcPr marL="91440" marR="91440" marT="45720" marB="45720">
-                    <a:lnL w="3810" cap="flat" cmpd="sng" algn="ctr">
-                      <a:solidFill>
-                        <a:srgbClr val="30363D"/>
-                      </a:solidFill>
-                      <a:prstDash val="solid"/>
-                      <a:round/>
-                      <a:headEnd type="none" w="med" len="med"/>
-                      <a:tailEnd type="none" w="med" len="med"/>
-                    </a:lnL>
-                    <a:lnR w="3810" cap="flat" cmpd="sng" algn="ctr">
-                      <a:solidFill>
-                        <a:srgbClr val="30363D"/>
-                      </a:solidFill>
-                      <a:prstDash val="solid"/>
-                      <a:round/>
-                      <a:headEnd type="none" w="med" len="med"/>
-                      <a:tailEnd type="none" w="med" len="med"/>
-                    </a:lnR>
-                    <a:lnT w="3810" cap="flat" cmpd="sng" algn="ctr">
-                      <a:solidFill>
-                        <a:srgbClr val="30363D"/>
-                      </a:solidFill>
-                      <a:prstDash val="solid"/>
-                      <a:round/>
-                      <a:headEnd type="none" w="med" len="med"/>
-                      <a:tailEnd type="none" w="med" len="med"/>
-                    </a:lnT>
-                    <a:lnB w="3810" cap="flat" cmpd="sng" algn="ctr">
-                      <a:solidFill>
-                        <a:srgbClr val="30363D"/>
-                      </a:solidFill>
-                      <a:prstDash val="solid"/>
-                      <a:round/>
-                      <a:headEnd type="none" w="med" len="med"/>
-                      <a:tailEnd type="none" w="med" len="med"/>
-                    </a:lnB>
-                  </a:tcPr>
-                </a:tc>
-              </a:tr>
-              <a:tr h="201168">
-                <a:tc>
-                  <a:txBody>
-                    <a:bodyPr/>
-                    <a:lstStyle/>
-                    <a:p>
-                      <a:pPr indent="0" marL="0">
-                        <a:buNone/>
-                      </a:pPr>
-                      <a:r>
-                        <a:rPr lang="en-US" sz="900" dirty="0">
-                          <a:solidFill>
-                            <a:srgbClr val="E6EDF3"/>
-                          </a:solidFill>
-                          <a:latin typeface="Consolas" pitchFamily="34" charset="0"/>
-                          <a:ea typeface="Consolas" pitchFamily="34" charset="-122"/>
-                          <a:cs typeface="Consolas" pitchFamily="34" charset="-120"/>
-                        </a:rPr>
-                        <a:t>0</a:t>
-                      </a:r>
-                      <a:endParaRPr lang="en-US" sz="900" dirty="0">
-                        <a:latin typeface="Consolas" charset="0"/>
-                        <a:ea typeface="Consolas" charset="0"/>
-                        <a:cs typeface="Consolas" charset="0"/>
-                      </a:endParaRPr>
-                    </a:p>
-                  </a:txBody>
-                  <a:tcPr marL="91440" marR="91440" marT="45720" marB="45720">
-                    <a:lnL w="3810" cap="flat" cmpd="sng" algn="ctr">
-                      <a:solidFill>
-                        <a:srgbClr val="30363D"/>
-                      </a:solidFill>
-                      <a:prstDash val="solid"/>
-                      <a:round/>
-                      <a:headEnd type="none" w="med" len="med"/>
-                      <a:tailEnd type="none" w="med" len="med"/>
-                    </a:lnL>
-                    <a:lnR w="3810" cap="flat" cmpd="sng" algn="ctr">
-                      <a:solidFill>
-                        <a:srgbClr val="30363D"/>
-                      </a:solidFill>
-                      <a:prstDash val="solid"/>
-                      <a:round/>
-                      <a:headEnd type="none" w="med" len="med"/>
-                      <a:tailEnd type="none" w="med" len="med"/>
-                    </a:lnR>
-                    <a:lnT w="3810" cap="flat" cmpd="sng" algn="ctr">
-                      <a:solidFill>
-                        <a:srgbClr val="30363D"/>
-                      </a:solidFill>
-                      <a:prstDash val="solid"/>
-                      <a:round/>
-                      <a:headEnd type="none" w="med" len="med"/>
-                      <a:tailEnd type="none" w="med" len="med"/>
-                    </a:lnT>
-                    <a:lnB w="3810" cap="flat" cmpd="sng" algn="ctr">
-                      <a:solidFill>
-                        <a:srgbClr val="30363D"/>
-                      </a:solidFill>
-                      <a:prstDash val="solid"/>
-                      <a:round/>
-                      <a:headEnd type="none" w="med" len="med"/>
-                      <a:tailEnd type="none" w="med" len="med"/>
-                    </a:lnB>
-                  </a:tcPr>
-                </a:tc>
-                <a:tc>
-                  <a:txBody>
-                    <a:bodyPr/>
-                    <a:lstStyle/>
-                    <a:p>
-                      <a:pPr indent="0" marL="0">
-                        <a:buNone/>
-                      </a:pPr>
-                      <a:r>
-                        <a:rPr lang="en-US" sz="900" dirty="0">
-                          <a:solidFill>
-                            <a:srgbClr val="E6EDF3"/>
-                          </a:solidFill>
-                          <a:latin typeface="Consolas" pitchFamily="34" charset="0"/>
-                          <a:ea typeface="Consolas" pitchFamily="34" charset="-122"/>
-                          <a:cs typeface="Consolas" pitchFamily="34" charset="-120"/>
-                        </a:rPr>
-                        <a:t>0.000</a:t>
-                      </a:r>
-                      <a:endParaRPr lang="en-US" sz="900" dirty="0">
-                        <a:latin typeface="Consolas" charset="0"/>
-                        <a:ea typeface="Consolas" charset="0"/>
-                        <a:cs typeface="Consolas" charset="0"/>
-                      </a:endParaRPr>
-                    </a:p>
-                  </a:txBody>
-                  <a:tcPr marL="91440" marR="91440" marT="45720" marB="45720">
-                    <a:lnL w="3810" cap="flat" cmpd="sng" algn="ctr">
-                      <a:solidFill>
-                        <a:srgbClr val="30363D"/>
-                      </a:solidFill>
-                      <a:prstDash val="solid"/>
-                      <a:round/>
-                      <a:headEnd type="none" w="med" len="med"/>
-                      <a:tailEnd type="none" w="med" len="med"/>
-                    </a:lnL>
-                    <a:lnR w="3810" cap="flat" cmpd="sng" algn="ctr">
-                      <a:solidFill>
-                        <a:srgbClr val="30363D"/>
-                      </a:solidFill>
-                      <a:prstDash val="solid"/>
-                      <a:round/>
-                      <a:headEnd type="none" w="med" len="med"/>
-                      <a:tailEnd type="none" w="med" len="med"/>
-                    </a:lnR>
-                    <a:lnT w="3810" cap="flat" cmpd="sng" algn="ctr">
-                      <a:solidFill>
-                        <a:srgbClr val="30363D"/>
-                      </a:solidFill>
-                      <a:prstDash val="solid"/>
-                      <a:round/>
-                      <a:headEnd type="none" w="med" len="med"/>
-                      <a:tailEnd type="none" w="med" len="med"/>
-                    </a:lnT>
-                    <a:lnB w="3810" cap="flat" cmpd="sng" algn="ctr">
-                      <a:solidFill>
-                        <a:srgbClr val="30363D"/>
-                      </a:solidFill>
-                      <a:prstDash val="solid"/>
-                      <a:round/>
-                      <a:headEnd type="none" w="med" len="med"/>
-                      <a:tailEnd type="none" w="med" len="med"/>
-                    </a:lnB>
-                  </a:tcPr>
-                </a:tc>
-                <a:tc>
-                  <a:txBody>
-                    <a:bodyPr/>
-                    <a:lstStyle/>
-                    <a:p>
-                      <a:pPr indent="0" marL="0">
-                        <a:buNone/>
-                      </a:pPr>
-                      <a:r>
-                        <a:rPr lang="en-US" sz="900" dirty="0">
-                          <a:solidFill>
-                            <a:srgbClr val="E6EDF3"/>
-                          </a:solidFill>
-                          <a:latin typeface="Consolas" pitchFamily="34" charset="0"/>
-                          <a:ea typeface="Consolas" pitchFamily="34" charset="-122"/>
-                          <a:cs typeface="Consolas" pitchFamily="34" charset="-120"/>
-                        </a:rPr>
-                        <a:t>0.000</a:t>
-                      </a:r>
-                      <a:endParaRPr lang="en-US" sz="900" dirty="0">
-                        <a:latin typeface="Consolas" charset="0"/>
-                        <a:ea typeface="Consolas" charset="0"/>
-                        <a:cs typeface="Consolas" charset="0"/>
-                      </a:endParaRPr>
-                    </a:p>
-                  </a:txBody>
-                  <a:tcPr marL="91440" marR="91440" marT="45720" marB="45720">
-                    <a:lnL w="3810" cap="flat" cmpd="sng" algn="ctr">
-                      <a:solidFill>
-                        <a:srgbClr val="30363D"/>
-                      </a:solidFill>
-                      <a:prstDash val="solid"/>
-                      <a:round/>
-                      <a:headEnd type="none" w="med" len="med"/>
-                      <a:tailEnd type="none" w="med" len="med"/>
-                    </a:lnL>
-                    <a:lnR w="3810" cap="flat" cmpd="sng" algn="ctr">
-                      <a:solidFill>
-                        <a:srgbClr val="30363D"/>
-                      </a:solidFill>
-                      <a:prstDash val="solid"/>
-                      <a:round/>
-                      <a:headEnd type="none" w="med" len="med"/>
-                      <a:tailEnd type="none" w="med" len="med"/>
-                    </a:lnR>
-                    <a:lnT w="3810" cap="flat" cmpd="sng" algn="ctr">
-                      <a:solidFill>
-                        <a:srgbClr val="30363D"/>
-                      </a:solidFill>
-                      <a:prstDash val="solid"/>
-                      <a:round/>
-                      <a:headEnd type="none" w="med" len="med"/>
-                      <a:tailEnd type="none" w="med" len="med"/>
-                    </a:lnT>
-                    <a:lnB w="3810" cap="flat" cmpd="sng" algn="ctr">
-                      <a:solidFill>
-                        <a:srgbClr val="30363D"/>
-                      </a:solidFill>
-                      <a:prstDash val="solid"/>
-                      <a:round/>
-                      <a:headEnd type="none" w="med" len="med"/>
-                      <a:tailEnd type="none" w="med" len="med"/>
-                    </a:lnB>
-                  </a:tcPr>
-                </a:tc>
-                <a:tc>
-                  <a:txBody>
-                    <a:bodyPr/>
-                    <a:lstStyle/>
-                    <a:p>
-                      <a:pPr indent="0" marL="0">
-                        <a:buNone/>
-                      </a:pPr>
-                      <a:r>
-                        <a:rPr lang="en-US" sz="900" dirty="0">
-                          <a:solidFill>
-                            <a:srgbClr val="E6EDF3"/>
-                          </a:solidFill>
-                          <a:latin typeface="Consolas" pitchFamily="34" charset="0"/>
-                          <a:ea typeface="Consolas" pitchFamily="34" charset="-122"/>
-                          <a:cs typeface="Consolas" pitchFamily="34" charset="-120"/>
-                        </a:rPr>
-                        <a:t>+0.0%</a:t>
-                      </a:r>
-                      <a:endParaRPr lang="en-US" sz="900" dirty="0">
-                        <a:latin typeface="Consolas" charset="0"/>
-                        <a:ea typeface="Consolas" charset="0"/>
-                        <a:cs typeface="Consolas" charset="0"/>
-                      </a:endParaRPr>
-                    </a:p>
-                  </a:txBody>
-                  <a:tcPr marL="91440" marR="91440" marT="45720" marB="45720">
-                    <a:lnL w="3810" cap="flat" cmpd="sng" algn="ctr">
-                      <a:solidFill>
-                        <a:srgbClr val="30363D"/>
-                      </a:solidFill>
-                      <a:prstDash val="solid"/>
-                      <a:round/>
-                      <a:headEnd type="none" w="med" len="med"/>
-                      <a:tailEnd type="none" w="med" len="med"/>
-                    </a:lnL>
-                    <a:lnR w="3810" cap="flat" cmpd="sng" algn="ctr">
-                      <a:solidFill>
-                        <a:srgbClr val="30363D"/>
-                      </a:solidFill>
-                      <a:prstDash val="solid"/>
-                      <a:round/>
-                      <a:headEnd type="none" w="med" len="med"/>
-                      <a:tailEnd type="none" w="med" len="med"/>
-                    </a:lnR>
-                    <a:lnT w="3810" cap="flat" cmpd="sng" algn="ctr">
-                      <a:solidFill>
-                        <a:srgbClr val="30363D"/>
-                      </a:solidFill>
-                      <a:prstDash val="solid"/>
-                      <a:round/>
-                      <a:headEnd type="none" w="med" len="med"/>
-                      <a:tailEnd type="none" w="med" len="med"/>
-                    </a:lnT>
-                    <a:lnB w="3810" cap="flat" cmpd="sng" algn="ctr">
-                      <a:solidFill>
-                        <a:srgbClr val="30363D"/>
-                      </a:solidFill>
-                      <a:prstDash val="solid"/>
-                      <a:round/>
-                      <a:headEnd type="none" w="med" len="med"/>
-                      <a:tailEnd type="none" w="med" len="med"/>
-                    </a:lnB>
-                  </a:tcPr>
-                </a:tc>
-              </a:tr>
-              <a:tr h="201168">
-                <a:tc>
-                  <a:txBody>
-                    <a:bodyPr/>
-                    <a:lstStyle/>
-                    <a:p>
-                      <a:pPr indent="0" marL="0">
-                        <a:buNone/>
-                      </a:pPr>
-                      <a:r>
-                        <a:rPr lang="en-US" sz="900" dirty="0">
-                          <a:solidFill>
-                            <a:srgbClr val="E6EDF3"/>
-                          </a:solidFill>
-                          <a:latin typeface="Consolas" pitchFamily="34" charset="0"/>
-                          <a:ea typeface="Consolas" pitchFamily="34" charset="-122"/>
-                          <a:cs typeface="Consolas" pitchFamily="34" charset="-120"/>
-                        </a:rPr>
-                        <a:t>1</a:t>
-                      </a:r>
-                      <a:endParaRPr lang="en-US" sz="900" dirty="0">
-                        <a:latin typeface="Consolas" charset="0"/>
-                        <a:ea typeface="Consolas" charset="0"/>
-                        <a:cs typeface="Consolas" charset="0"/>
-                      </a:endParaRPr>
-                    </a:p>
-                  </a:txBody>
-                  <a:tcPr marL="91440" marR="91440" marT="45720" marB="45720">
-                    <a:lnL w="3810" cap="flat" cmpd="sng" algn="ctr">
-                      <a:solidFill>
-                        <a:srgbClr val="30363D"/>
-                      </a:solidFill>
-                      <a:prstDash val="solid"/>
-                      <a:round/>
-                      <a:headEnd type="none" w="med" len="med"/>
-                      <a:tailEnd type="none" w="med" len="med"/>
-                    </a:lnL>
-                    <a:lnR w="3810" cap="flat" cmpd="sng" algn="ctr">
-                      <a:solidFill>
-                        <a:srgbClr val="30363D"/>
-                      </a:solidFill>
-                      <a:prstDash val="solid"/>
-                      <a:round/>
-                      <a:headEnd type="none" w="med" len="med"/>
-                      <a:tailEnd type="none" w="med" len="med"/>
-                    </a:lnR>
-                    <a:lnT w="3810" cap="flat" cmpd="sng" algn="ctr">
-                      <a:solidFill>
-                        <a:srgbClr val="30363D"/>
-                      </a:solidFill>
-                      <a:prstDash val="solid"/>
-                      <a:round/>
-                      <a:headEnd type="none" w="med" len="med"/>
-                      <a:tailEnd type="none" w="med" len="med"/>
-                    </a:lnT>
-                    <a:lnB w="3810" cap="flat" cmpd="sng" algn="ctr">
-                      <a:solidFill>
-                        <a:srgbClr val="30363D"/>
-                      </a:solidFill>
-                      <a:prstDash val="solid"/>
-                      <a:round/>
-                      <a:headEnd type="none" w="med" len="med"/>
-                      <a:tailEnd type="none" w="med" len="med"/>
-                    </a:lnB>
-                  </a:tcPr>
-                </a:tc>
-                <a:tc>
-                  <a:txBody>
-                    <a:bodyPr/>
-                    <a:lstStyle/>
-                    <a:p>
-                      <a:pPr indent="0" marL="0">
-                        <a:buNone/>
-                      </a:pPr>
-                      <a:r>
-                        <a:rPr lang="en-US" sz="900" dirty="0">
-                          <a:solidFill>
-                            <a:srgbClr val="E6EDF3"/>
-                          </a:solidFill>
-                          <a:latin typeface="Consolas" pitchFamily="34" charset="0"/>
-                          <a:ea typeface="Consolas" pitchFamily="34" charset="-122"/>
-                          <a:cs typeface="Consolas" pitchFamily="34" charset="-120"/>
-                        </a:rPr>
-                        <a:t>0.100</a:t>
-                      </a:r>
-                      <a:endParaRPr lang="en-US" sz="900" dirty="0">
-                        <a:latin typeface="Consolas" charset="0"/>
-                        <a:ea typeface="Consolas" charset="0"/>
-                        <a:cs typeface="Consolas" charset="0"/>
-                      </a:endParaRPr>
-                    </a:p>
-                  </a:txBody>
-                  <a:tcPr marL="91440" marR="91440" marT="45720" marB="45720">
-                    <a:lnL w="3810" cap="flat" cmpd="sng" algn="ctr">
-                      <a:solidFill>
-                        <a:srgbClr val="30363D"/>
-                      </a:solidFill>
-                      <a:prstDash val="solid"/>
-                      <a:round/>
-                      <a:headEnd type="none" w="med" len="med"/>
-                      <a:tailEnd type="none" w="med" len="med"/>
-                    </a:lnL>
-                    <a:lnR w="3810" cap="flat" cmpd="sng" algn="ctr">
-                      <a:solidFill>
-                        <a:srgbClr val="30363D"/>
-                      </a:solidFill>
-                      <a:prstDash val="solid"/>
-                      <a:round/>
-                      <a:headEnd type="none" w="med" len="med"/>
-                      <a:tailEnd type="none" w="med" len="med"/>
-                    </a:lnR>
-                    <a:lnT w="3810" cap="flat" cmpd="sng" algn="ctr">
-                      <a:solidFill>
-                        <a:srgbClr val="30363D"/>
-                      </a:solidFill>
-                      <a:prstDash val="solid"/>
-                      <a:round/>
-                      <a:headEnd type="none" w="med" len="med"/>
-                      <a:tailEnd type="none" w="med" len="med"/>
-                    </a:lnT>
-                    <a:lnB w="3810" cap="flat" cmpd="sng" algn="ctr">
-                      <a:solidFill>
-                        <a:srgbClr val="30363D"/>
-                      </a:solidFill>
-                      <a:prstDash val="solid"/>
-                      <a:round/>
-                      <a:headEnd type="none" w="med" len="med"/>
-                      <a:tailEnd type="none" w="med" len="med"/>
-                    </a:lnB>
-                  </a:tcPr>
-                </a:tc>
-                <a:tc>
-                  <a:txBody>
-                    <a:bodyPr/>
-                    <a:lstStyle/>
-                    <a:p>
-                      <a:pPr indent="0" marL="0">
-                        <a:buNone/>
-                      </a:pPr>
-                      <a:r>
-                        <a:rPr lang="en-US" sz="900" dirty="0">
-                          <a:solidFill>
-                            <a:srgbClr val="E6EDF3"/>
-                          </a:solidFill>
-                          <a:latin typeface="Consolas" pitchFamily="34" charset="0"/>
-                          <a:ea typeface="Consolas" pitchFamily="34" charset="-122"/>
-                          <a:cs typeface="Consolas" pitchFamily="34" charset="-120"/>
-                        </a:rPr>
-                        <a:t>0.067</a:t>
-                      </a:r>
-                      <a:endParaRPr lang="en-US" sz="900" dirty="0">
-                        <a:latin typeface="Consolas" charset="0"/>
-                        <a:ea typeface="Consolas" charset="0"/>
-                        <a:cs typeface="Consolas" charset="0"/>
-                      </a:endParaRPr>
-                    </a:p>
-                  </a:txBody>
-                  <a:tcPr marL="91440" marR="91440" marT="45720" marB="45720">
-                    <a:lnL w="3810" cap="flat" cmpd="sng" algn="ctr">
-                      <a:solidFill>
-                        <a:srgbClr val="30363D"/>
-                      </a:solidFill>
-                      <a:prstDash val="solid"/>
-                      <a:round/>
-                      <a:headEnd type="none" w="med" len="med"/>
-                      <a:tailEnd type="none" w="med" len="med"/>
-                    </a:lnL>
-                    <a:lnR w="3810" cap="flat" cmpd="sng" algn="ctr">
-                      <a:solidFill>
-                        <a:srgbClr val="30363D"/>
-                      </a:solidFill>
-                      <a:prstDash val="solid"/>
-                      <a:round/>
-                      <a:headEnd type="none" w="med" len="med"/>
-                      <a:tailEnd type="none" w="med" len="med"/>
-                    </a:lnR>
-                    <a:lnT w="3810" cap="flat" cmpd="sng" algn="ctr">
-                      <a:solidFill>
-                        <a:srgbClr val="30363D"/>
-                      </a:solidFill>
-                      <a:prstDash val="solid"/>
-                      <a:round/>
-                      <a:headEnd type="none" w="med" len="med"/>
-                      <a:tailEnd type="none" w="med" len="med"/>
-                    </a:lnT>
-                    <a:lnB w="3810" cap="flat" cmpd="sng" algn="ctr">
-                      <a:solidFill>
-                        <a:srgbClr val="30363D"/>
-                      </a:solidFill>
-                      <a:prstDash val="solid"/>
-                      <a:round/>
-                      <a:headEnd type="none" w="med" len="med"/>
-                      <a:tailEnd type="none" w="med" len="med"/>
-                    </a:lnB>
-                  </a:tcPr>
-                </a:tc>
-                <a:tc>
-                  <a:txBody>
-                    <a:bodyPr/>
-                    <a:lstStyle/>
-                    <a:p>
-                      <a:pPr indent="0" marL="0">
-                        <a:buNone/>
-                      </a:pPr>
-                      <a:r>
-                        <a:rPr lang="en-US" sz="900" dirty="0">
-                          <a:solidFill>
-                            <a:srgbClr val="E6EDF3"/>
-                          </a:solidFill>
-                          <a:latin typeface="Consolas" pitchFamily="34" charset="0"/>
-                          <a:ea typeface="Consolas" pitchFamily="34" charset="-122"/>
-                          <a:cs typeface="Consolas" pitchFamily="34" charset="-120"/>
-                        </a:rPr>
-                        <a:t>+3.4%</a:t>
-                      </a:r>
-                      <a:endParaRPr lang="en-US" sz="900" dirty="0">
-                        <a:latin typeface="Consolas" charset="0"/>
-                        <a:ea typeface="Consolas" charset="0"/>
-                        <a:cs typeface="Consolas" charset="0"/>
-                      </a:endParaRPr>
-                    </a:p>
-                  </a:txBody>
-                  <a:tcPr marL="91440" marR="91440" marT="45720" marB="45720">
-                    <a:lnL w="3810" cap="flat" cmpd="sng" algn="ctr">
-                      <a:solidFill>
-                        <a:srgbClr val="30363D"/>
-                      </a:solidFill>
-                      <a:prstDash val="solid"/>
-                      <a:round/>
-                      <a:headEnd type="none" w="med" len="med"/>
-                      <a:tailEnd type="none" w="med" len="med"/>
-                    </a:lnL>
-                    <a:lnR w="3810" cap="flat" cmpd="sng" algn="ctr">
-                      <a:solidFill>
-                        <a:srgbClr val="30363D"/>
-                      </a:solidFill>
-                      <a:prstDash val="solid"/>
-                      <a:round/>
-                      <a:headEnd type="none" w="med" len="med"/>
-                      <a:tailEnd type="none" w="med" len="med"/>
-                    </a:lnR>
-                    <a:lnT w="3810" cap="flat" cmpd="sng" algn="ctr">
-                      <a:solidFill>
-                        <a:srgbClr val="30363D"/>
-                      </a:solidFill>
-                      <a:prstDash val="solid"/>
-                      <a:round/>
-                      <a:headEnd type="none" w="med" len="med"/>
-                      <a:tailEnd type="none" w="med" len="med"/>
-                    </a:lnT>
-                    <a:lnB w="3810" cap="flat" cmpd="sng" algn="ctr">
-                      <a:solidFill>
-                        <a:srgbClr val="30363D"/>
-                      </a:solidFill>
-                      <a:prstDash val="solid"/>
-                      <a:round/>
-                      <a:headEnd type="none" w="med" len="med"/>
-                      <a:tailEnd type="none" w="med" len="med"/>
-                    </a:lnB>
-                  </a:tcPr>
-                </a:tc>
-              </a:tr>
-              <a:tr h="201168">
-                <a:tc>
-                  <a:txBody>
-                    <a:bodyPr/>
-                    <a:lstStyle/>
-                    <a:p>
-                      <a:pPr indent="0" marL="0">
-                        <a:buNone/>
-                      </a:pPr>
-                      <a:r>
-                        <a:rPr lang="en-US" sz="900" dirty="0">
-                          <a:solidFill>
-                            <a:srgbClr val="E6EDF3"/>
-                          </a:solidFill>
-                          <a:latin typeface="Consolas" pitchFamily="34" charset="0"/>
-                          <a:ea typeface="Consolas" pitchFamily="34" charset="-122"/>
-                          <a:cs typeface="Consolas" pitchFamily="34" charset="-120"/>
-                        </a:rPr>
-                        <a:t>2</a:t>
-                      </a:r>
-                      <a:endParaRPr lang="en-US" sz="900" dirty="0">
-                        <a:latin typeface="Consolas" charset="0"/>
-                        <a:ea typeface="Consolas" charset="0"/>
-                        <a:cs typeface="Consolas" charset="0"/>
-                      </a:endParaRPr>
-                    </a:p>
-                  </a:txBody>
-                  <a:tcPr marL="91440" marR="91440" marT="45720" marB="45720">
-                    <a:lnL w="3810" cap="flat" cmpd="sng" algn="ctr">
-                      <a:solidFill>
-                        <a:srgbClr val="30363D"/>
-                      </a:solidFill>
-                      <a:prstDash val="solid"/>
-                      <a:round/>
-                      <a:headEnd type="none" w="med" len="med"/>
-                      <a:tailEnd type="none" w="med" len="med"/>
-                    </a:lnL>
-                    <a:lnR w="3810" cap="flat" cmpd="sng" algn="ctr">
-                      <a:solidFill>
-                        <a:srgbClr val="30363D"/>
-                      </a:solidFill>
-                      <a:prstDash val="solid"/>
-                      <a:round/>
-                      <a:headEnd type="none" w="med" len="med"/>
-                      <a:tailEnd type="none" w="med" len="med"/>
-                    </a:lnR>
-                    <a:lnT w="3810" cap="flat" cmpd="sng" algn="ctr">
-                      <a:solidFill>
-                        <a:srgbClr val="30363D"/>
-                      </a:solidFill>
-                      <a:prstDash val="solid"/>
-                      <a:round/>
-                      <a:headEnd type="none" w="med" len="med"/>
-                      <a:tailEnd type="none" w="med" len="med"/>
-                    </a:lnT>
-                    <a:lnB w="3810" cap="flat" cmpd="sng" algn="ctr">
-                      <a:solidFill>
-                        <a:srgbClr val="30363D"/>
-                      </a:solidFill>
-                      <a:prstDash val="solid"/>
-                      <a:round/>
-                      <a:headEnd type="none" w="med" len="med"/>
-                      <a:tailEnd type="none" w="med" len="med"/>
-                    </a:lnB>
-                  </a:tcPr>
-                </a:tc>
-                <a:tc>
-                  <a:txBody>
-                    <a:bodyPr/>
-                    <a:lstStyle/>
-                    <a:p>
-                      <a:pPr indent="0" marL="0">
-                        <a:buNone/>
-                      </a:pPr>
-                      <a:r>
-                        <a:rPr lang="en-US" sz="900" dirty="0">
-                          <a:solidFill>
-                            <a:srgbClr val="E6EDF3"/>
-                          </a:solidFill>
-                          <a:latin typeface="Consolas" pitchFamily="34" charset="0"/>
-                          <a:ea typeface="Consolas" pitchFamily="34" charset="-122"/>
-                          <a:cs typeface="Consolas" pitchFamily="34" charset="-120"/>
-                        </a:rPr>
-                        <a:t>0.168</a:t>
-                      </a:r>
-                      <a:endParaRPr lang="en-US" sz="900" dirty="0">
-                        <a:latin typeface="Consolas" charset="0"/>
-                        <a:ea typeface="Consolas" charset="0"/>
-                        <a:cs typeface="Consolas" charset="0"/>
-                      </a:endParaRPr>
-                    </a:p>
-                  </a:txBody>
-                  <a:tcPr marL="91440" marR="91440" marT="45720" marB="45720">
-                    <a:lnL w="3810" cap="flat" cmpd="sng" algn="ctr">
-                      <a:solidFill>
-                        <a:srgbClr val="30363D"/>
-                      </a:solidFill>
-                      <a:prstDash val="solid"/>
-                      <a:round/>
-                      <a:headEnd type="none" w="med" len="med"/>
-                      <a:tailEnd type="none" w="med" len="med"/>
-                    </a:lnL>
-                    <a:lnR w="3810" cap="flat" cmpd="sng" algn="ctr">
-                      <a:solidFill>
-                        <a:srgbClr val="30363D"/>
-                      </a:solidFill>
-                      <a:prstDash val="solid"/>
-                      <a:round/>
-                      <a:headEnd type="none" w="med" len="med"/>
-                      <a:tailEnd type="none" w="med" len="med"/>
-                    </a:lnR>
-                    <a:lnT w="3810" cap="flat" cmpd="sng" algn="ctr">
-                      <a:solidFill>
-                        <a:srgbClr val="30363D"/>
-                      </a:solidFill>
-                      <a:prstDash val="solid"/>
-                      <a:round/>
-                      <a:headEnd type="none" w="med" len="med"/>
-                      <a:tailEnd type="none" w="med" len="med"/>
-                    </a:lnT>
-                    <a:lnB w="3810" cap="flat" cmpd="sng" algn="ctr">
-                      <a:solidFill>
-                        <a:srgbClr val="30363D"/>
-                      </a:solidFill>
-                      <a:prstDash val="solid"/>
-                      <a:round/>
-                      <a:headEnd type="none" w="med" len="med"/>
-                      <a:tailEnd type="none" w="med" len="med"/>
-                    </a:lnB>
-                  </a:tcPr>
-                </a:tc>
-                <a:tc>
-                  <a:txBody>
-                    <a:bodyPr/>
-                    <a:lstStyle/>
-                    <a:p>
-                      <a:pPr indent="0" marL="0">
-                        <a:buNone/>
-                      </a:pPr>
-                      <a:r>
-                        <a:rPr lang="en-US" sz="900" dirty="0">
-                          <a:solidFill>
-                            <a:srgbClr val="E6EDF3"/>
-                          </a:solidFill>
-                          <a:latin typeface="Consolas" pitchFamily="34" charset="0"/>
-                          <a:ea typeface="Consolas" pitchFamily="34" charset="-122"/>
-                          <a:cs typeface="Consolas" pitchFamily="34" charset="-120"/>
-                        </a:rPr>
-                        <a:t>0.133</a:t>
-                      </a:r>
-                      <a:endParaRPr lang="en-US" sz="900" dirty="0">
-                        <a:latin typeface="Consolas" charset="0"/>
-                        <a:ea typeface="Consolas" charset="0"/>
-                        <a:cs typeface="Consolas" charset="0"/>
-                      </a:endParaRPr>
-                    </a:p>
-                  </a:txBody>
-                  <a:tcPr marL="91440" marR="91440" marT="45720" marB="45720">
-                    <a:lnL w="3810" cap="flat" cmpd="sng" algn="ctr">
-                      <a:solidFill>
-                        <a:srgbClr val="30363D"/>
-                      </a:solidFill>
-                      <a:prstDash val="solid"/>
-                      <a:round/>
-                      <a:headEnd type="none" w="med" len="med"/>
-                      <a:tailEnd type="none" w="med" len="med"/>
-                    </a:lnL>
-                    <a:lnR w="3810" cap="flat" cmpd="sng" algn="ctr">
-                      <a:solidFill>
-                        <a:srgbClr val="30363D"/>
-                      </a:solidFill>
-                      <a:prstDash val="solid"/>
-                      <a:round/>
-                      <a:headEnd type="none" w="med" len="med"/>
-                      <a:tailEnd type="none" w="med" len="med"/>
-                    </a:lnR>
-                    <a:lnT w="3810" cap="flat" cmpd="sng" algn="ctr">
-                      <a:solidFill>
-                        <a:srgbClr val="30363D"/>
-                      </a:solidFill>
-                      <a:prstDash val="solid"/>
-                      <a:round/>
-                      <a:headEnd type="none" w="med" len="med"/>
-                      <a:tailEnd type="none" w="med" len="med"/>
-                    </a:lnT>
-                    <a:lnB w="3810" cap="flat" cmpd="sng" algn="ctr">
-                      <a:solidFill>
-                        <a:srgbClr val="30363D"/>
-                      </a:solidFill>
-                      <a:prstDash val="solid"/>
-                      <a:round/>
-                      <a:headEnd type="none" w="med" len="med"/>
-                      <a:tailEnd type="none" w="med" len="med"/>
-                    </a:lnB>
-                  </a:tcPr>
-                </a:tc>
-                <a:tc>
-                  <a:txBody>
-                    <a:bodyPr/>
-                    <a:lstStyle/>
-                    <a:p>
-                      <a:pPr indent="0" marL="0">
-                        <a:buNone/>
-                      </a:pPr>
-                      <a:r>
-                        <a:rPr lang="en-US" sz="900" dirty="0">
-                          <a:solidFill>
-                            <a:srgbClr val="E6EDF3"/>
-                          </a:solidFill>
-                          <a:latin typeface="Consolas" pitchFamily="34" charset="0"/>
-                          <a:ea typeface="Consolas" pitchFamily="34" charset="-122"/>
-                          <a:cs typeface="Consolas" pitchFamily="34" charset="-120"/>
-                        </a:rPr>
-                        <a:t>+3.4%</a:t>
-                      </a:r>
-                      <a:endParaRPr lang="en-US" sz="900" dirty="0">
-                        <a:latin typeface="Consolas" charset="0"/>
-                        <a:ea typeface="Consolas" charset="0"/>
-                        <a:cs typeface="Consolas" charset="0"/>
-                      </a:endParaRPr>
-                    </a:p>
-                  </a:txBody>
-                  <a:tcPr marL="91440" marR="91440" marT="45720" marB="45720">
-                    <a:lnL w="3810" cap="flat" cmpd="sng" algn="ctr">
-                      <a:solidFill>
-                        <a:srgbClr val="30363D"/>
-                      </a:solidFill>
-                      <a:prstDash val="solid"/>
-                      <a:round/>
-                      <a:headEnd type="none" w="med" len="med"/>
-                      <a:tailEnd type="none" w="med" len="med"/>
-                    </a:lnL>
-                    <a:lnR w="3810" cap="flat" cmpd="sng" algn="ctr">
-                      <a:solidFill>
-                        <a:srgbClr val="30363D"/>
-                      </a:solidFill>
-                      <a:prstDash val="solid"/>
-                      <a:round/>
-                      <a:headEnd type="none" w="med" len="med"/>
-                      <a:tailEnd type="none" w="med" len="med"/>
-                    </a:lnR>
-                    <a:lnT w="3810" cap="flat" cmpd="sng" algn="ctr">
-                      <a:solidFill>
-                        <a:srgbClr val="30363D"/>
-                      </a:solidFill>
-                      <a:prstDash val="solid"/>
-                      <a:round/>
-                      <a:headEnd type="none" w="med" len="med"/>
-                      <a:tailEnd type="none" w="med" len="med"/>
-                    </a:lnT>
-                    <a:lnB w="3810" cap="flat" cmpd="sng" algn="ctr">
-                      <a:solidFill>
-                        <a:srgbClr val="30363D"/>
-                      </a:solidFill>
-                      <a:prstDash val="solid"/>
-                      <a:round/>
-                      <a:headEnd type="none" w="med" len="med"/>
-                      <a:tailEnd type="none" w="med" len="med"/>
-                    </a:lnB>
-                  </a:tcPr>
-                </a:tc>
-              </a:tr>
-              <a:tr h="201168">
-                <a:tc>
-                  <a:txBody>
-                    <a:bodyPr/>
-                    <a:lstStyle/>
-                    <a:p>
-                      <a:pPr indent="0" marL="0">
-                        <a:buNone/>
-                      </a:pPr>
-                      <a:r>
-                        <a:rPr lang="en-US" sz="900" dirty="0">
-                          <a:solidFill>
-                            <a:srgbClr val="E6EDF3"/>
-                          </a:solidFill>
-                          <a:latin typeface="Consolas" pitchFamily="34" charset="0"/>
-                          <a:ea typeface="Consolas" pitchFamily="34" charset="-122"/>
-                          <a:cs typeface="Consolas" pitchFamily="34" charset="-120"/>
-                        </a:rPr>
-                        <a:t>3</a:t>
-                      </a:r>
-                      <a:endParaRPr lang="en-US" sz="900" dirty="0">
-                        <a:latin typeface="Consolas" charset="0"/>
-                        <a:ea typeface="Consolas" charset="0"/>
-                        <a:cs typeface="Consolas" charset="0"/>
-                      </a:endParaRPr>
-                    </a:p>
-                  </a:txBody>
-                  <a:tcPr marL="91440" marR="91440" marT="45720" marB="45720">
-                    <a:lnL w="3810" cap="flat" cmpd="sng" algn="ctr">
-                      <a:solidFill>
-                        <a:srgbClr val="30363D"/>
-                      </a:solidFill>
-                      <a:prstDash val="solid"/>
-                      <a:round/>
-                      <a:headEnd type="none" w="med" len="med"/>
-                      <a:tailEnd type="none" w="med" len="med"/>
-                    </a:lnL>
-                    <a:lnR w="3810" cap="flat" cmpd="sng" algn="ctr">
-                      <a:solidFill>
-                        <a:srgbClr val="30363D"/>
-                      </a:solidFill>
-                      <a:prstDash val="solid"/>
-                      <a:round/>
-                      <a:headEnd type="none" w="med" len="med"/>
-                      <a:tailEnd type="none" w="med" len="med"/>
-                    </a:lnR>
-                    <a:lnT w="3810" cap="flat" cmpd="sng" algn="ctr">
-                      <a:solidFill>
-                        <a:srgbClr val="30363D"/>
-                      </a:solidFill>
-                      <a:prstDash val="solid"/>
-                      <a:round/>
-                      <a:headEnd type="none" w="med" len="med"/>
-                      <a:tailEnd type="none" w="med" len="med"/>
-                    </a:lnT>
-                    <a:lnB w="3810" cap="flat" cmpd="sng" algn="ctr">
-                      <a:solidFill>
-                        <a:srgbClr val="30363D"/>
-                      </a:solidFill>
-                      <a:prstDash val="solid"/>
-                      <a:round/>
-                      <a:headEnd type="none" w="med" len="med"/>
-                      <a:tailEnd type="none" w="med" len="med"/>
-                    </a:lnB>
-                  </a:tcPr>
-                </a:tc>
-                <a:tc>
-                  <a:txBody>
-                    <a:bodyPr/>
-                    <a:lstStyle/>
-                    <a:p>
-                      <a:pPr indent="0" marL="0">
-                        <a:buNone/>
-                      </a:pPr>
-                      <a:r>
-                        <a:rPr lang="en-US" sz="900" dirty="0">
-                          <a:solidFill>
-                            <a:srgbClr val="E6EDF3"/>
-                          </a:solidFill>
-                          <a:latin typeface="Consolas" pitchFamily="34" charset="0"/>
-                          <a:ea typeface="Consolas" pitchFamily="34" charset="-122"/>
-                          <a:cs typeface="Consolas" pitchFamily="34" charset="-120"/>
-                        </a:rPr>
-                        <a:t>0.267</a:t>
-                      </a:r>
-                      <a:endParaRPr lang="en-US" sz="900" dirty="0">
-                        <a:latin typeface="Consolas" charset="0"/>
-                        <a:ea typeface="Consolas" charset="0"/>
-                        <a:cs typeface="Consolas" charset="0"/>
-                      </a:endParaRPr>
-                    </a:p>
-                  </a:txBody>
-                  <a:tcPr marL="91440" marR="91440" marT="45720" marB="45720">
-                    <a:lnL w="3810" cap="flat" cmpd="sng" algn="ctr">
-                      <a:solidFill>
-                        <a:srgbClr val="30363D"/>
-                      </a:solidFill>
-                      <a:prstDash val="solid"/>
-                      <a:round/>
-                      <a:headEnd type="none" w="med" len="med"/>
-                      <a:tailEnd type="none" w="med" len="med"/>
-                    </a:lnL>
-                    <a:lnR w="3810" cap="flat" cmpd="sng" algn="ctr">
-                      <a:solidFill>
-                        <a:srgbClr val="30363D"/>
-                      </a:solidFill>
-                      <a:prstDash val="solid"/>
-                      <a:round/>
-                      <a:headEnd type="none" w="med" len="med"/>
-                      <a:tailEnd type="none" w="med" len="med"/>
-                    </a:lnR>
-                    <a:lnT w="3810" cap="flat" cmpd="sng" algn="ctr">
-                      <a:solidFill>
-                        <a:srgbClr val="30363D"/>
-                      </a:solidFill>
-                      <a:prstDash val="solid"/>
-                      <a:round/>
-                      <a:headEnd type="none" w="med" len="med"/>
-                      <a:tailEnd type="none" w="med" len="med"/>
-                    </a:lnT>
-                    <a:lnB w="3810" cap="flat" cmpd="sng" algn="ctr">
-                      <a:solidFill>
-                        <a:srgbClr val="30363D"/>
-                      </a:solidFill>
-                      <a:prstDash val="solid"/>
-                      <a:round/>
-                      <a:headEnd type="none" w="med" len="med"/>
-                      <a:tailEnd type="none" w="med" len="med"/>
-                    </a:lnB>
-                  </a:tcPr>
-                </a:tc>
-                <a:tc>
-                  <a:txBody>
-                    <a:bodyPr/>
-                    <a:lstStyle/>
-                    <a:p>
-                      <a:pPr indent="0" marL="0">
-                        <a:buNone/>
-                      </a:pPr>
-                      <a:r>
-                        <a:rPr lang="en-US" sz="900" dirty="0">
-                          <a:solidFill>
-                            <a:srgbClr val="E6EDF3"/>
-                          </a:solidFill>
-                          <a:latin typeface="Consolas" pitchFamily="34" charset="0"/>
-                          <a:ea typeface="Consolas" pitchFamily="34" charset="-122"/>
-                          <a:cs typeface="Consolas" pitchFamily="34" charset="-120"/>
-                        </a:rPr>
-                        <a:t>0.200</a:t>
-                      </a:r>
-                      <a:endParaRPr lang="en-US" sz="900" dirty="0">
-                        <a:latin typeface="Consolas" charset="0"/>
-                        <a:ea typeface="Consolas" charset="0"/>
-                        <a:cs typeface="Consolas" charset="0"/>
-                      </a:endParaRPr>
-                    </a:p>
-                  </a:txBody>
-                  <a:tcPr marL="91440" marR="91440" marT="45720" marB="45720">
-                    <a:lnL w="3810" cap="flat" cmpd="sng" algn="ctr">
-                      <a:solidFill>
-                        <a:srgbClr val="30363D"/>
-                      </a:solidFill>
-                      <a:prstDash val="solid"/>
-                      <a:round/>
-                      <a:headEnd type="none" w="med" len="med"/>
-                      <a:tailEnd type="none" w="med" len="med"/>
-                    </a:lnL>
-                    <a:lnR w="3810" cap="flat" cmpd="sng" algn="ctr">
-                      <a:solidFill>
-                        <a:srgbClr val="30363D"/>
-                      </a:solidFill>
-                      <a:prstDash val="solid"/>
-                      <a:round/>
-                      <a:headEnd type="none" w="med" len="med"/>
-                      <a:tailEnd type="none" w="med" len="med"/>
-                    </a:lnR>
-                    <a:lnT w="3810" cap="flat" cmpd="sng" algn="ctr">
-                      <a:solidFill>
-                        <a:srgbClr val="30363D"/>
-                      </a:solidFill>
-                      <a:prstDash val="solid"/>
-                      <a:round/>
-                      <a:headEnd type="none" w="med" len="med"/>
-                      <a:tailEnd type="none" w="med" len="med"/>
-                    </a:lnT>
-                    <a:lnB w="3810" cap="flat" cmpd="sng" algn="ctr">
-                      <a:solidFill>
-                        <a:srgbClr val="30363D"/>
-                      </a:solidFill>
-                      <a:prstDash val="solid"/>
-                      <a:round/>
-                      <a:headEnd type="none" w="med" len="med"/>
-                      <a:tailEnd type="none" w="med" len="med"/>
-                    </a:lnB>
-                  </a:tcPr>
-                </a:tc>
-                <a:tc>
-                  <a:txBody>
-                    <a:bodyPr/>
-                    <a:lstStyle/>
-                    <a:p>
-                      <a:pPr indent="0" marL="0">
-                        <a:buNone/>
-                      </a:pPr>
-                      <a:r>
-                        <a:rPr lang="en-US" sz="900" dirty="0">
-                          <a:solidFill>
-                            <a:srgbClr val="E6EDF3"/>
-                          </a:solidFill>
-                          <a:latin typeface="Consolas" pitchFamily="34" charset="0"/>
-                          <a:ea typeface="Consolas" pitchFamily="34" charset="-122"/>
-                          <a:cs typeface="Consolas" pitchFamily="34" charset="-120"/>
-                        </a:rPr>
-                        <a:t>+6.7%</a:t>
-                      </a:r>
-                      <a:endParaRPr lang="en-US" sz="900" dirty="0">
-                        <a:latin typeface="Consolas" charset="0"/>
-                        <a:ea typeface="Consolas" charset="0"/>
-                        <a:cs typeface="Consolas" charset="0"/>
-                      </a:endParaRPr>
-                    </a:p>
-                  </a:txBody>
-                  <a:tcPr marL="91440" marR="91440" marT="45720" marB="45720">
-                    <a:lnL w="3810" cap="flat" cmpd="sng" algn="ctr">
-                      <a:solidFill>
-                        <a:srgbClr val="30363D"/>
-                      </a:solidFill>
-                      <a:prstDash val="solid"/>
-                      <a:round/>
-                      <a:headEnd type="none" w="med" len="med"/>
-                      <a:tailEnd type="none" w="med" len="med"/>
-                    </a:lnL>
-                    <a:lnR w="3810" cap="flat" cmpd="sng" algn="ctr">
-                      <a:solidFill>
-                        <a:srgbClr val="30363D"/>
-                      </a:solidFill>
-                      <a:prstDash val="solid"/>
-                      <a:round/>
-                      <a:headEnd type="none" w="med" len="med"/>
-                      <a:tailEnd type="none" w="med" len="med"/>
-                    </a:lnR>
-                    <a:lnT w="3810" cap="flat" cmpd="sng" algn="ctr">
-                      <a:solidFill>
-                        <a:srgbClr val="30363D"/>
-                      </a:solidFill>
-                      <a:prstDash val="solid"/>
-                      <a:round/>
-                      <a:headEnd type="none" w="med" len="med"/>
-                      <a:tailEnd type="none" w="med" len="med"/>
-                    </a:lnT>
-                    <a:lnB w="3810" cap="flat" cmpd="sng" algn="ctr">
-                      <a:solidFill>
-                        <a:srgbClr val="30363D"/>
-                      </a:solidFill>
-                      <a:prstDash val="solid"/>
-                      <a:round/>
-                      <a:headEnd type="none" w="med" len="med"/>
-                      <a:tailEnd type="none" w="med" len="med"/>
-                    </a:lnB>
-                  </a:tcPr>
-                </a:tc>
-              </a:tr>
-              <a:tr h="201168">
-                <a:tc>
-                  <a:txBody>
-                    <a:bodyPr/>
-                    <a:lstStyle/>
-                    <a:p>
-                      <a:pPr indent="0" marL="0">
-                        <a:buNone/>
-                      </a:pPr>
-                      <a:r>
-                        <a:rPr lang="en-US" sz="900" dirty="0">
-                          <a:solidFill>
-                            <a:srgbClr val="E6EDF3"/>
-                          </a:solidFill>
-                          <a:latin typeface="Consolas" pitchFamily="34" charset="0"/>
-                          <a:ea typeface="Consolas" pitchFamily="34" charset="-122"/>
-                          <a:cs typeface="Consolas" pitchFamily="34" charset="-120"/>
-                        </a:rPr>
-                        <a:t>4</a:t>
-                      </a:r>
-                      <a:endParaRPr lang="en-US" sz="900" dirty="0">
-                        <a:latin typeface="Consolas" charset="0"/>
-                        <a:ea typeface="Consolas" charset="0"/>
-                        <a:cs typeface="Consolas" charset="0"/>
-                      </a:endParaRPr>
-                    </a:p>
-                  </a:txBody>
-                  <a:tcPr marL="91440" marR="91440" marT="45720" marB="45720">
-                    <a:lnL w="3810" cap="flat" cmpd="sng" algn="ctr">
-                      <a:solidFill>
-                        <a:srgbClr val="30363D"/>
-                      </a:solidFill>
-                      <a:prstDash val="solid"/>
-                      <a:round/>
-                      <a:headEnd type="none" w="med" len="med"/>
-                      <a:tailEnd type="none" w="med" len="med"/>
-                    </a:lnL>
-                    <a:lnR w="3810" cap="flat" cmpd="sng" algn="ctr">
-                      <a:solidFill>
-                        <a:srgbClr val="30363D"/>
-                      </a:solidFill>
-                      <a:prstDash val="solid"/>
-                      <a:round/>
-                      <a:headEnd type="none" w="med" len="med"/>
-                      <a:tailEnd type="none" w="med" len="med"/>
-                    </a:lnR>
-                    <a:lnT w="3810" cap="flat" cmpd="sng" algn="ctr">
-                      <a:solidFill>
-                        <a:srgbClr val="30363D"/>
-                      </a:solidFill>
-                      <a:prstDash val="solid"/>
-                      <a:round/>
-                      <a:headEnd type="none" w="med" len="med"/>
-                      <a:tailEnd type="none" w="med" len="med"/>
-                    </a:lnT>
-                    <a:lnB w="3810" cap="flat" cmpd="sng" algn="ctr">
-                      <a:solidFill>
-                        <a:srgbClr val="30363D"/>
-                      </a:solidFill>
-                      <a:prstDash val="solid"/>
-                      <a:round/>
-                      <a:headEnd type="none" w="med" len="med"/>
-                      <a:tailEnd type="none" w="med" len="med"/>
-                    </a:lnB>
-                  </a:tcPr>
-                </a:tc>
-                <a:tc>
-                  <a:txBody>
-                    <a:bodyPr/>
-                    <a:lstStyle/>
-                    <a:p>
-                      <a:pPr indent="0" marL="0">
-                        <a:buNone/>
-                      </a:pPr>
-                      <a:r>
-                        <a:rPr lang="en-US" sz="900" dirty="0">
-                          <a:solidFill>
-                            <a:srgbClr val="E6EDF3"/>
-                          </a:solidFill>
-                          <a:latin typeface="Consolas" pitchFamily="34" charset="0"/>
-                          <a:ea typeface="Consolas" pitchFamily="34" charset="-122"/>
-                          <a:cs typeface="Consolas" pitchFamily="34" charset="-120"/>
-                        </a:rPr>
-                        <a:t>0.267</a:t>
-                      </a:r>
-                      <a:endParaRPr lang="en-US" sz="900" dirty="0">
-                        <a:latin typeface="Consolas" charset="0"/>
-                        <a:ea typeface="Consolas" charset="0"/>
-                        <a:cs typeface="Consolas" charset="0"/>
-                      </a:endParaRPr>
-                    </a:p>
-                  </a:txBody>
-                  <a:tcPr marL="91440" marR="91440" marT="45720" marB="45720">
-                    <a:lnL w="3810" cap="flat" cmpd="sng" algn="ctr">
-                      <a:solidFill>
-                        <a:srgbClr val="30363D"/>
-                      </a:solidFill>
-                      <a:prstDash val="solid"/>
-                      <a:round/>
-                      <a:headEnd type="none" w="med" len="med"/>
-                      <a:tailEnd type="none" w="med" len="med"/>
-                    </a:lnL>
-                    <a:lnR w="3810" cap="flat" cmpd="sng" algn="ctr">
-                      <a:solidFill>
-                        <a:srgbClr val="30363D"/>
-                      </a:solidFill>
-                      <a:prstDash val="solid"/>
-                      <a:round/>
-                      <a:headEnd type="none" w="med" len="med"/>
-                      <a:tailEnd type="none" w="med" len="med"/>
-                    </a:lnR>
-                    <a:lnT w="3810" cap="flat" cmpd="sng" algn="ctr">
-                      <a:solidFill>
-                        <a:srgbClr val="30363D"/>
-                      </a:solidFill>
-                      <a:prstDash val="solid"/>
-                      <a:round/>
-                      <a:headEnd type="none" w="med" len="med"/>
-                      <a:tailEnd type="none" w="med" len="med"/>
-                    </a:lnT>
-                    <a:lnB w="3810" cap="flat" cmpd="sng" algn="ctr">
-                      <a:solidFill>
-                        <a:srgbClr val="30363D"/>
-                      </a:solidFill>
-                      <a:prstDash val="solid"/>
-                      <a:round/>
-                      <a:headEnd type="none" w="med" len="med"/>
-                      <a:tailEnd type="none" w="med" len="med"/>
-                    </a:lnB>
-                  </a:tcPr>
-                </a:tc>
-                <a:tc>
-                  <a:txBody>
-                    <a:bodyPr/>
-                    <a:lstStyle/>
-                    <a:p>
-                      <a:pPr indent="0" marL="0">
-                        <a:buNone/>
-                      </a:pPr>
-                      <a:r>
-                        <a:rPr lang="en-US" sz="900" dirty="0">
-                          <a:solidFill>
-                            <a:srgbClr val="E6EDF3"/>
-                          </a:solidFill>
-                          <a:latin typeface="Consolas" pitchFamily="34" charset="0"/>
-                          <a:ea typeface="Consolas" pitchFamily="34" charset="-122"/>
-                          <a:cs typeface="Consolas" pitchFamily="34" charset="-120"/>
-                        </a:rPr>
-                        <a:t>0.267</a:t>
-                      </a:r>
-                      <a:endParaRPr lang="en-US" sz="900" dirty="0">
-                        <a:latin typeface="Consolas" charset="0"/>
-                        <a:ea typeface="Consolas" charset="0"/>
-                        <a:cs typeface="Consolas" charset="0"/>
-                      </a:endParaRPr>
-                    </a:p>
-                  </a:txBody>
-                  <a:tcPr marL="91440" marR="91440" marT="45720" marB="45720">
-                    <a:lnL w="3810" cap="flat" cmpd="sng" algn="ctr">
-                      <a:solidFill>
-                        <a:srgbClr val="30363D"/>
-                      </a:solidFill>
-                      <a:prstDash val="solid"/>
-                      <a:round/>
-                      <a:headEnd type="none" w="med" len="med"/>
-                      <a:tailEnd type="none" w="med" len="med"/>
-                    </a:lnL>
-                    <a:lnR w="3810" cap="flat" cmpd="sng" algn="ctr">
-                      <a:solidFill>
-                        <a:srgbClr val="30363D"/>
-                      </a:solidFill>
-                      <a:prstDash val="solid"/>
-                      <a:round/>
-                      <a:headEnd type="none" w="med" len="med"/>
-                      <a:tailEnd type="none" w="med" len="med"/>
-                    </a:lnR>
-                    <a:lnT w="3810" cap="flat" cmpd="sng" algn="ctr">
-                      <a:solidFill>
-                        <a:srgbClr val="30363D"/>
-                      </a:solidFill>
-                      <a:prstDash val="solid"/>
-                      <a:round/>
-                      <a:headEnd type="none" w="med" len="med"/>
-                      <a:tailEnd type="none" w="med" len="med"/>
-                    </a:lnT>
-                    <a:lnB w="3810" cap="flat" cmpd="sng" algn="ctr">
-                      <a:solidFill>
-                        <a:srgbClr val="30363D"/>
-                      </a:solidFill>
-                      <a:prstDash val="solid"/>
-                      <a:round/>
-                      <a:headEnd type="none" w="med" len="med"/>
-                      <a:tailEnd type="none" w="med" len="med"/>
-                    </a:lnB>
-                  </a:tcPr>
-                </a:tc>
-                <a:tc>
-                  <a:txBody>
-                    <a:bodyPr/>
-                    <a:lstStyle/>
-                    <a:p>
-                      <a:pPr indent="0" marL="0">
-                        <a:buNone/>
-                      </a:pPr>
-                      <a:r>
-                        <a:rPr lang="en-US" sz="900" dirty="0">
-                          <a:solidFill>
-                            <a:srgbClr val="E6EDF3"/>
-                          </a:solidFill>
-                          <a:latin typeface="Consolas" pitchFamily="34" charset="0"/>
-                          <a:ea typeface="Consolas" pitchFamily="34" charset="-122"/>
-                          <a:cs typeface="Consolas" pitchFamily="34" charset="-120"/>
-                        </a:rPr>
-                        <a:t>+0.0%</a:t>
-                      </a:r>
-                      <a:endParaRPr lang="en-US" sz="900" dirty="0">
-                        <a:latin typeface="Consolas" charset="0"/>
-                        <a:ea typeface="Consolas" charset="0"/>
-                        <a:cs typeface="Consolas" charset="0"/>
-                      </a:endParaRPr>
-                    </a:p>
-                  </a:txBody>
-                  <a:tcPr marL="91440" marR="91440" marT="45720" marB="45720">
-                    <a:lnL w="3810" cap="flat" cmpd="sng" algn="ctr">
-                      <a:solidFill>
-                        <a:srgbClr val="30363D"/>
-                      </a:solidFill>
-                      <a:prstDash val="solid"/>
-                      <a:round/>
-                      <a:headEnd type="none" w="med" len="med"/>
-                      <a:tailEnd type="none" w="med" len="med"/>
-                    </a:lnL>
-                    <a:lnR w="3810" cap="flat" cmpd="sng" algn="ctr">
-                      <a:solidFill>
-                        <a:srgbClr val="30363D"/>
-                      </a:solidFill>
-                      <a:prstDash val="solid"/>
-                      <a:round/>
-                      <a:headEnd type="none" w="med" len="med"/>
-                      <a:tailEnd type="none" w="med" len="med"/>
-                    </a:lnR>
-                    <a:lnT w="3810" cap="flat" cmpd="sng" algn="ctr">
-                      <a:solidFill>
-                        <a:srgbClr val="30363D"/>
-                      </a:solidFill>
-                      <a:prstDash val="solid"/>
-                      <a:round/>
-                      <a:headEnd type="none" w="med" len="med"/>
-                      <a:tailEnd type="none" w="med" len="med"/>
-                    </a:lnT>
-                    <a:lnB w="3810" cap="flat" cmpd="sng" algn="ctr">
-                      <a:solidFill>
-                        <a:srgbClr val="30363D"/>
-                      </a:solidFill>
-                      <a:prstDash val="solid"/>
-                      <a:round/>
-                      <a:headEnd type="none" w="med" len="med"/>
-                      <a:tailEnd type="none" w="med" len="med"/>
-                    </a:lnB>
-                  </a:tcPr>
-                </a:tc>
-              </a:tr>
-              <a:tr h="201168">
-                <a:tc>
-                  <a:txBody>
-                    <a:bodyPr/>
-                    <a:lstStyle/>
-                    <a:p>
-                      <a:pPr indent="0" marL="0">
-                        <a:buNone/>
-                      </a:pPr>
-                      <a:r>
-                        <a:rPr lang="en-US" sz="900" dirty="0">
-                          <a:solidFill>
-                            <a:srgbClr val="E6EDF3"/>
-                          </a:solidFill>
-                          <a:latin typeface="Consolas" pitchFamily="34" charset="0"/>
-                          <a:ea typeface="Consolas" pitchFamily="34" charset="-122"/>
-                          <a:cs typeface="Consolas" pitchFamily="34" charset="-120"/>
-                        </a:rPr>
-                        <a:t>5</a:t>
-                      </a:r>
-                      <a:endParaRPr lang="en-US" sz="900" dirty="0">
-                        <a:latin typeface="Consolas" charset="0"/>
-                        <a:ea typeface="Consolas" charset="0"/>
-                        <a:cs typeface="Consolas" charset="0"/>
-                      </a:endParaRPr>
-                    </a:p>
-                  </a:txBody>
-                  <a:tcPr marL="91440" marR="91440" marT="45720" marB="45720">
-                    <a:lnL w="3810" cap="flat" cmpd="sng" algn="ctr">
-                      <a:solidFill>
-                        <a:srgbClr val="30363D"/>
-                      </a:solidFill>
-                      <a:prstDash val="solid"/>
-                      <a:round/>
-                      <a:headEnd type="none" w="med" len="med"/>
-                      <a:tailEnd type="none" w="med" len="med"/>
-                    </a:lnL>
-                    <a:lnR w="3810" cap="flat" cmpd="sng" algn="ctr">
-                      <a:solidFill>
-                        <a:srgbClr val="30363D"/>
-                      </a:solidFill>
-                      <a:prstDash val="solid"/>
-                      <a:round/>
-                      <a:headEnd type="none" w="med" len="med"/>
-                      <a:tailEnd type="none" w="med" len="med"/>
-                    </a:lnR>
-                    <a:lnT w="3810" cap="flat" cmpd="sng" algn="ctr">
-                      <a:solidFill>
-                        <a:srgbClr val="30363D"/>
-                      </a:solidFill>
-                      <a:prstDash val="solid"/>
-                      <a:round/>
-                      <a:headEnd type="none" w="med" len="med"/>
-                      <a:tailEnd type="none" w="med" len="med"/>
-                    </a:lnT>
-                    <a:lnB w="3810" cap="flat" cmpd="sng" algn="ctr">
-                      <a:solidFill>
-                        <a:srgbClr val="30363D"/>
-                      </a:solidFill>
-                      <a:prstDash val="solid"/>
-                      <a:round/>
-                      <a:headEnd type="none" w="med" len="med"/>
-                      <a:tailEnd type="none" w="med" len="med"/>
-                    </a:lnB>
-                  </a:tcPr>
-                </a:tc>
-                <a:tc>
-                  <a:txBody>
-                    <a:bodyPr/>
-                    <a:lstStyle/>
-                    <a:p>
-                      <a:pPr indent="0" marL="0">
-                        <a:buNone/>
-                      </a:pPr>
-                      <a:r>
-                        <a:rPr lang="en-US" sz="900" dirty="0">
-                          <a:solidFill>
-                            <a:srgbClr val="E6EDF3"/>
-                          </a:solidFill>
-                          <a:latin typeface="Consolas" pitchFamily="34" charset="0"/>
-                          <a:ea typeface="Consolas" pitchFamily="34" charset="-122"/>
-                          <a:cs typeface="Consolas" pitchFamily="34" charset="-120"/>
-                        </a:rPr>
-                        <a:t>0.365</a:t>
-                      </a:r>
-                      <a:endParaRPr lang="en-US" sz="900" dirty="0">
-                        <a:latin typeface="Consolas" charset="0"/>
-                        <a:ea typeface="Consolas" charset="0"/>
-                        <a:cs typeface="Consolas" charset="0"/>
-                      </a:endParaRPr>
-                    </a:p>
-                  </a:txBody>
-                  <a:tcPr marL="91440" marR="91440" marT="45720" marB="45720">
-                    <a:lnL w="3810" cap="flat" cmpd="sng" algn="ctr">
-                      <a:solidFill>
-                        <a:srgbClr val="30363D"/>
-                      </a:solidFill>
-                      <a:prstDash val="solid"/>
-                      <a:round/>
-                      <a:headEnd type="none" w="med" len="med"/>
-                      <a:tailEnd type="none" w="med" len="med"/>
-                    </a:lnL>
-                    <a:lnR w="3810" cap="flat" cmpd="sng" algn="ctr">
-                      <a:solidFill>
-                        <a:srgbClr val="30363D"/>
-                      </a:solidFill>
-                      <a:prstDash val="solid"/>
-                      <a:round/>
-                      <a:headEnd type="none" w="med" len="med"/>
-                      <a:tailEnd type="none" w="med" len="med"/>
-                    </a:lnR>
-                    <a:lnT w="3810" cap="flat" cmpd="sng" algn="ctr">
-                      <a:solidFill>
-                        <a:srgbClr val="30363D"/>
-                      </a:solidFill>
-                      <a:prstDash val="solid"/>
-                      <a:round/>
-                      <a:headEnd type="none" w="med" len="med"/>
-                      <a:tailEnd type="none" w="med" len="med"/>
-                    </a:lnT>
-                    <a:lnB w="3810" cap="flat" cmpd="sng" algn="ctr">
-                      <a:solidFill>
-                        <a:srgbClr val="30363D"/>
-                      </a:solidFill>
-                      <a:prstDash val="solid"/>
-                      <a:round/>
-                      <a:headEnd type="none" w="med" len="med"/>
-                      <a:tailEnd type="none" w="med" len="med"/>
-                    </a:lnB>
-                  </a:tcPr>
-                </a:tc>
-                <a:tc>
-                  <a:txBody>
-                    <a:bodyPr/>
-                    <a:lstStyle/>
-                    <a:p>
-                      <a:pPr indent="0" marL="0">
-                        <a:buNone/>
-                      </a:pPr>
-                      <a:r>
-                        <a:rPr lang="en-US" sz="900" dirty="0">
-                          <a:solidFill>
-                            <a:srgbClr val="E6EDF3"/>
-                          </a:solidFill>
-                          <a:latin typeface="Consolas" pitchFamily="34" charset="0"/>
-                          <a:ea typeface="Consolas" pitchFamily="34" charset="-122"/>
-                          <a:cs typeface="Consolas" pitchFamily="34" charset="-120"/>
-                        </a:rPr>
-                        <a:t>0.333</a:t>
-                      </a:r>
-                      <a:endParaRPr lang="en-US" sz="900" dirty="0">
-                        <a:latin typeface="Consolas" charset="0"/>
-                        <a:ea typeface="Consolas" charset="0"/>
-                        <a:cs typeface="Consolas" charset="0"/>
-                      </a:endParaRPr>
-                    </a:p>
-                  </a:txBody>
-                  <a:tcPr marL="91440" marR="91440" marT="45720" marB="45720">
-                    <a:lnL w="3810" cap="flat" cmpd="sng" algn="ctr">
-                      <a:solidFill>
-                        <a:srgbClr val="30363D"/>
-                      </a:solidFill>
-                      <a:prstDash val="solid"/>
-                      <a:round/>
-                      <a:headEnd type="none" w="med" len="med"/>
-                      <a:tailEnd type="none" w="med" len="med"/>
-                    </a:lnL>
-                    <a:lnR w="3810" cap="flat" cmpd="sng" algn="ctr">
-                      <a:solidFill>
-                        <a:srgbClr val="30363D"/>
-                      </a:solidFill>
-                      <a:prstDash val="solid"/>
-                      <a:round/>
-                      <a:headEnd type="none" w="med" len="med"/>
-                      <a:tailEnd type="none" w="med" len="med"/>
-                    </a:lnR>
-                    <a:lnT w="3810" cap="flat" cmpd="sng" algn="ctr">
-                      <a:solidFill>
-                        <a:srgbClr val="30363D"/>
-                      </a:solidFill>
-                      <a:prstDash val="solid"/>
-                      <a:round/>
-                      <a:headEnd type="none" w="med" len="med"/>
-                      <a:tailEnd type="none" w="med" len="med"/>
-                    </a:lnT>
-                    <a:lnB w="3810" cap="flat" cmpd="sng" algn="ctr">
-                      <a:solidFill>
-                        <a:srgbClr val="30363D"/>
-                      </a:solidFill>
-                      <a:prstDash val="solid"/>
-                      <a:round/>
-                      <a:headEnd type="none" w="med" len="med"/>
-                      <a:tailEnd type="none" w="med" len="med"/>
-                    </a:lnB>
-                  </a:tcPr>
-                </a:tc>
-                <a:tc>
-                  <a:txBody>
-                    <a:bodyPr/>
-                    <a:lstStyle/>
-                    <a:p>
-                      <a:pPr indent="0" marL="0">
-                        <a:buNone/>
-                      </a:pPr>
-                      <a:r>
-                        <a:rPr lang="en-US" sz="900" dirty="0">
-                          <a:solidFill>
-                            <a:srgbClr val="E6EDF3"/>
-                          </a:solidFill>
-                          <a:latin typeface="Consolas" pitchFamily="34" charset="0"/>
-                          <a:ea typeface="Consolas" pitchFamily="34" charset="-122"/>
-                          <a:cs typeface="Consolas" pitchFamily="34" charset="-120"/>
-                        </a:rPr>
-                        <a:t>+3.1%</a:t>
-                      </a:r>
-                      <a:endParaRPr lang="en-US" sz="900" dirty="0">
-                        <a:latin typeface="Consolas" charset="0"/>
-                        <a:ea typeface="Consolas" charset="0"/>
-                        <a:cs typeface="Consolas" charset="0"/>
-                      </a:endParaRPr>
-                    </a:p>
-                  </a:txBody>
-                  <a:tcPr marL="91440" marR="91440" marT="45720" marB="45720">
-                    <a:lnL w="3810" cap="flat" cmpd="sng" algn="ctr">
-                      <a:solidFill>
-                        <a:srgbClr val="30363D"/>
-                      </a:solidFill>
-                      <a:prstDash val="solid"/>
-                      <a:round/>
-                      <a:headEnd type="none" w="med" len="med"/>
-                      <a:tailEnd type="none" w="med" len="med"/>
-                    </a:lnL>
-                    <a:lnR w="3810" cap="flat" cmpd="sng" algn="ctr">
-                      <a:solidFill>
-                        <a:srgbClr val="30363D"/>
-                      </a:solidFill>
-                      <a:prstDash val="solid"/>
-                      <a:round/>
-                      <a:headEnd type="none" w="med" len="med"/>
-                      <a:tailEnd type="none" w="med" len="med"/>
-                    </a:lnR>
-                    <a:lnT w="3810" cap="flat" cmpd="sng" algn="ctr">
-                      <a:solidFill>
-                        <a:srgbClr val="30363D"/>
-                      </a:solidFill>
-                      <a:prstDash val="solid"/>
-                      <a:round/>
-                      <a:headEnd type="none" w="med" len="med"/>
-                      <a:tailEnd type="none" w="med" len="med"/>
-                    </a:lnT>
-                    <a:lnB w="3810" cap="flat" cmpd="sng" algn="ctr">
-                      <a:solidFill>
-                        <a:srgbClr val="30363D"/>
-                      </a:solidFill>
-                      <a:prstDash val="solid"/>
-                      <a:round/>
-                      <a:headEnd type="none" w="med" len="med"/>
-                      <a:tailEnd type="none" w="med" len="med"/>
-                    </a:lnB>
-                  </a:tcPr>
-                </a:tc>
-              </a:tr>
-              <a:tr h="201168">
-                <a:tc>
-                  <a:txBody>
-                    <a:bodyPr/>
-                    <a:lstStyle/>
-                    <a:p>
-                      <a:pPr indent="0" marL="0">
-                        <a:buNone/>
-                      </a:pPr>
-                      <a:r>
-                        <a:rPr lang="en-US" sz="900" dirty="0">
-                          <a:solidFill>
-                            <a:srgbClr val="E6EDF3"/>
-                          </a:solidFill>
-                          <a:latin typeface="Consolas" pitchFamily="34" charset="0"/>
-                          <a:ea typeface="Consolas" pitchFamily="34" charset="-122"/>
-                          <a:cs typeface="Consolas" pitchFamily="34" charset="-120"/>
-                        </a:rPr>
-                        <a:t>6</a:t>
-                      </a:r>
-                      <a:endParaRPr lang="en-US" sz="900" dirty="0">
-                        <a:latin typeface="Consolas" charset="0"/>
-                        <a:ea typeface="Consolas" charset="0"/>
-                        <a:cs typeface="Consolas" charset="0"/>
-                      </a:endParaRPr>
-                    </a:p>
-                  </a:txBody>
-                  <a:tcPr marL="91440" marR="91440" marT="45720" marB="45720">
-                    <a:lnL w="3810" cap="flat" cmpd="sng" algn="ctr">
-                      <a:solidFill>
-                        <a:srgbClr val="30363D"/>
-                      </a:solidFill>
-                      <a:prstDash val="solid"/>
-                      <a:round/>
-                      <a:headEnd type="none" w="med" len="med"/>
-                      <a:tailEnd type="none" w="med" len="med"/>
-                    </a:lnL>
-                    <a:lnR w="3810" cap="flat" cmpd="sng" algn="ctr">
-                      <a:solidFill>
-                        <a:srgbClr val="30363D"/>
-                      </a:solidFill>
-                      <a:prstDash val="solid"/>
-                      <a:round/>
-                      <a:headEnd type="none" w="med" len="med"/>
-                      <a:tailEnd type="none" w="med" len="med"/>
-                    </a:lnR>
-                    <a:lnT w="3810" cap="flat" cmpd="sng" algn="ctr">
-                      <a:solidFill>
-                        <a:srgbClr val="30363D"/>
-                      </a:solidFill>
-                      <a:prstDash val="solid"/>
-                      <a:round/>
-                      <a:headEnd type="none" w="med" len="med"/>
-                      <a:tailEnd type="none" w="med" len="med"/>
-                    </a:lnT>
-                    <a:lnB w="3810" cap="flat" cmpd="sng" algn="ctr">
-                      <a:solidFill>
-                        <a:srgbClr val="30363D"/>
-                      </a:solidFill>
-                      <a:prstDash val="solid"/>
-                      <a:round/>
-                      <a:headEnd type="none" w="med" len="med"/>
-                      <a:tailEnd type="none" w="med" len="med"/>
-                    </a:lnB>
-                  </a:tcPr>
-                </a:tc>
-                <a:tc>
-                  <a:txBody>
-                    <a:bodyPr/>
-                    <a:lstStyle/>
-                    <a:p>
-                      <a:pPr indent="0" marL="0">
-                        <a:buNone/>
-                      </a:pPr>
-                      <a:r>
-                        <a:rPr lang="en-US" sz="900" dirty="0">
-                          <a:solidFill>
-                            <a:srgbClr val="E6EDF3"/>
-                          </a:solidFill>
-                          <a:latin typeface="Consolas" pitchFamily="34" charset="0"/>
-                          <a:ea typeface="Consolas" pitchFamily="34" charset="-122"/>
-                          <a:cs typeface="Consolas" pitchFamily="34" charset="-120"/>
-                        </a:rPr>
-                        <a:t>0.430</a:t>
-                      </a:r>
-                      <a:endParaRPr lang="en-US" sz="900" dirty="0">
-                        <a:latin typeface="Consolas" charset="0"/>
-                        <a:ea typeface="Consolas" charset="0"/>
-                        <a:cs typeface="Consolas" charset="0"/>
-                      </a:endParaRPr>
-                    </a:p>
-                  </a:txBody>
-                  <a:tcPr marL="91440" marR="91440" marT="45720" marB="45720">
-                    <a:lnL w="3810" cap="flat" cmpd="sng" algn="ctr">
-                      <a:solidFill>
-                        <a:srgbClr val="30363D"/>
-                      </a:solidFill>
-                      <a:prstDash val="solid"/>
-                      <a:round/>
-                      <a:headEnd type="none" w="med" len="med"/>
-                      <a:tailEnd type="none" w="med" len="med"/>
-                    </a:lnL>
-                    <a:lnR w="3810" cap="flat" cmpd="sng" algn="ctr">
-                      <a:solidFill>
-                        <a:srgbClr val="30363D"/>
-                      </a:solidFill>
-                      <a:prstDash val="solid"/>
-                      <a:round/>
-                      <a:headEnd type="none" w="med" len="med"/>
-                      <a:tailEnd type="none" w="med" len="med"/>
-                    </a:lnR>
-                    <a:lnT w="3810" cap="flat" cmpd="sng" algn="ctr">
-                      <a:solidFill>
-                        <a:srgbClr val="30363D"/>
-                      </a:solidFill>
-                      <a:prstDash val="solid"/>
-                      <a:round/>
-                      <a:headEnd type="none" w="med" len="med"/>
-                      <a:tailEnd type="none" w="med" len="med"/>
-                    </a:lnT>
-                    <a:lnB w="3810" cap="flat" cmpd="sng" algn="ctr">
-                      <a:solidFill>
-                        <a:srgbClr val="30363D"/>
-                      </a:solidFill>
-                      <a:prstDash val="solid"/>
-                      <a:round/>
-                      <a:headEnd type="none" w="med" len="med"/>
-                      <a:tailEnd type="none" w="med" len="med"/>
-                    </a:lnB>
-                  </a:tcPr>
-                </a:tc>
-                <a:tc>
-                  <a:txBody>
-                    <a:bodyPr/>
-                    <a:lstStyle/>
-                    <a:p>
-                      <a:pPr indent="0" marL="0">
-                        <a:buNone/>
-                      </a:pPr>
-                      <a:r>
-                        <a:rPr lang="en-US" sz="900" dirty="0">
-                          <a:solidFill>
-                            <a:srgbClr val="E6EDF3"/>
-                          </a:solidFill>
-                          <a:latin typeface="Consolas" pitchFamily="34" charset="0"/>
-                          <a:ea typeface="Consolas" pitchFamily="34" charset="-122"/>
-                          <a:cs typeface="Consolas" pitchFamily="34" charset="-120"/>
-                        </a:rPr>
-                        <a:t>0.400</a:t>
-                      </a:r>
-                      <a:endParaRPr lang="en-US" sz="900" dirty="0">
-                        <a:latin typeface="Consolas" charset="0"/>
-                        <a:ea typeface="Consolas" charset="0"/>
-                        <a:cs typeface="Consolas" charset="0"/>
-                      </a:endParaRPr>
-                    </a:p>
-                  </a:txBody>
-                  <a:tcPr marL="91440" marR="91440" marT="45720" marB="45720">
-                    <a:lnL w="3810" cap="flat" cmpd="sng" algn="ctr">
-                      <a:solidFill>
-                        <a:srgbClr val="30363D"/>
-                      </a:solidFill>
-                      <a:prstDash val="solid"/>
-                      <a:round/>
-                      <a:headEnd type="none" w="med" len="med"/>
-                      <a:tailEnd type="none" w="med" len="med"/>
-                    </a:lnL>
-                    <a:lnR w="3810" cap="flat" cmpd="sng" algn="ctr">
-                      <a:solidFill>
-                        <a:srgbClr val="30363D"/>
-                      </a:solidFill>
-                      <a:prstDash val="solid"/>
-                      <a:round/>
-                      <a:headEnd type="none" w="med" len="med"/>
-                      <a:tailEnd type="none" w="med" len="med"/>
-                    </a:lnR>
-                    <a:lnT w="3810" cap="flat" cmpd="sng" algn="ctr">
-                      <a:solidFill>
-                        <a:srgbClr val="30363D"/>
-                      </a:solidFill>
-                      <a:prstDash val="solid"/>
-                      <a:round/>
-                      <a:headEnd type="none" w="med" len="med"/>
-                      <a:tailEnd type="none" w="med" len="med"/>
-                    </a:lnT>
-                    <a:lnB w="3810" cap="flat" cmpd="sng" algn="ctr">
-                      <a:solidFill>
-                        <a:srgbClr val="30363D"/>
-                      </a:solidFill>
-                      <a:prstDash val="solid"/>
-                      <a:round/>
-                      <a:headEnd type="none" w="med" len="med"/>
-                      <a:tailEnd type="none" w="med" len="med"/>
-                    </a:lnB>
-                  </a:tcPr>
-                </a:tc>
-                <a:tc>
-                  <a:txBody>
-                    <a:bodyPr/>
-                    <a:lstStyle/>
-                    <a:p>
-                      <a:pPr indent="0" marL="0">
-                        <a:buNone/>
-                      </a:pPr>
-                      <a:r>
-                        <a:rPr lang="en-US" sz="900" dirty="0">
-                          <a:solidFill>
-                            <a:srgbClr val="E6EDF3"/>
-                          </a:solidFill>
-                          <a:latin typeface="Consolas" pitchFamily="34" charset="0"/>
-                          <a:ea typeface="Consolas" pitchFamily="34" charset="-122"/>
-                          <a:cs typeface="Consolas" pitchFamily="34" charset="-120"/>
-                        </a:rPr>
-                        <a:t>+3.0%</a:t>
-                      </a:r>
-                      <a:endParaRPr lang="en-US" sz="900" dirty="0">
-                        <a:latin typeface="Consolas" charset="0"/>
-                        <a:ea typeface="Consolas" charset="0"/>
-                        <a:cs typeface="Consolas" charset="0"/>
-                      </a:endParaRPr>
-                    </a:p>
-                  </a:txBody>
-                  <a:tcPr marL="91440" marR="91440" marT="45720" marB="45720">
-                    <a:lnL w="3810" cap="flat" cmpd="sng" algn="ctr">
-                      <a:solidFill>
-                        <a:srgbClr val="30363D"/>
-                      </a:solidFill>
-                      <a:prstDash val="solid"/>
-                      <a:round/>
-                      <a:headEnd type="none" w="med" len="med"/>
-                      <a:tailEnd type="none" w="med" len="med"/>
-                    </a:lnL>
-                    <a:lnR w="3810" cap="flat" cmpd="sng" algn="ctr">
-                      <a:solidFill>
-                        <a:srgbClr val="30363D"/>
-                      </a:solidFill>
-                      <a:prstDash val="solid"/>
-                      <a:round/>
-                      <a:headEnd type="none" w="med" len="med"/>
-                      <a:tailEnd type="none" w="med" len="med"/>
-                    </a:lnR>
-                    <a:lnT w="3810" cap="flat" cmpd="sng" algn="ctr">
-                      <a:solidFill>
-                        <a:srgbClr val="30363D"/>
-                      </a:solidFill>
-                      <a:prstDash val="solid"/>
-                      <a:round/>
-                      <a:headEnd type="none" w="med" len="med"/>
-                      <a:tailEnd type="none" w="med" len="med"/>
-                    </a:lnT>
-                    <a:lnB w="3810" cap="flat" cmpd="sng" algn="ctr">
-                      <a:solidFill>
-                        <a:srgbClr val="30363D"/>
-                      </a:solidFill>
-                      <a:prstDash val="solid"/>
-                      <a:round/>
-                      <a:headEnd type="none" w="med" len="med"/>
-                      <a:tailEnd type="none" w="med" len="med"/>
-                    </a:lnB>
-                  </a:tcPr>
-                </a:tc>
-              </a:tr>
-              <a:tr h="201168">
-                <a:tc>
-                  <a:txBody>
-                    <a:bodyPr/>
-                    <a:lstStyle/>
-                    <a:p>
-                      <a:pPr indent="0" marL="0">
-                        <a:buNone/>
-                      </a:pPr>
-                      <a:r>
-                        <a:rPr lang="en-US" sz="900" dirty="0">
-                          <a:solidFill>
-                            <a:srgbClr val="E6EDF3"/>
-                          </a:solidFill>
-                          <a:latin typeface="Consolas" pitchFamily="34" charset="0"/>
-                          <a:ea typeface="Consolas" pitchFamily="34" charset="-122"/>
-                          <a:cs typeface="Consolas" pitchFamily="34" charset="-120"/>
-                        </a:rPr>
-                        <a:t>7</a:t>
-                      </a:r>
-                      <a:endParaRPr lang="en-US" sz="900" dirty="0">
-                        <a:latin typeface="Consolas" charset="0"/>
-                        <a:ea typeface="Consolas" charset="0"/>
-                        <a:cs typeface="Consolas" charset="0"/>
-                      </a:endParaRPr>
-                    </a:p>
-                  </a:txBody>
-                  <a:tcPr marL="91440" marR="91440" marT="45720" marB="45720">
-                    <a:lnL w="3810" cap="flat" cmpd="sng" algn="ctr">
-                      <a:solidFill>
-                        <a:srgbClr val="30363D"/>
-                      </a:solidFill>
-                      <a:prstDash val="solid"/>
-                      <a:round/>
-                      <a:headEnd type="none" w="med" len="med"/>
-                      <a:tailEnd type="none" w="med" len="med"/>
-                    </a:lnL>
-                    <a:lnR w="3810" cap="flat" cmpd="sng" algn="ctr">
-                      <a:solidFill>
-                        <a:srgbClr val="30363D"/>
-                      </a:solidFill>
-                      <a:prstDash val="solid"/>
-                      <a:round/>
-                      <a:headEnd type="none" w="med" len="med"/>
-                      <a:tailEnd type="none" w="med" len="med"/>
-                    </a:lnR>
-                    <a:lnT w="3810" cap="flat" cmpd="sng" algn="ctr">
-                      <a:solidFill>
-                        <a:srgbClr val="30363D"/>
-                      </a:solidFill>
-                      <a:prstDash val="solid"/>
-                      <a:round/>
-                      <a:headEnd type="none" w="med" len="med"/>
-                      <a:tailEnd type="none" w="med" len="med"/>
-                    </a:lnT>
-                    <a:lnB w="3810" cap="flat" cmpd="sng" algn="ctr">
-                      <a:solidFill>
-                        <a:srgbClr val="30363D"/>
-                      </a:solidFill>
-                      <a:prstDash val="solid"/>
-                      <a:round/>
-                      <a:headEnd type="none" w="med" len="med"/>
-                      <a:tailEnd type="none" w="med" len="med"/>
-                    </a:lnB>
-                  </a:tcPr>
-                </a:tc>
-                <a:tc>
-                  <a:txBody>
-                    <a:bodyPr/>
-                    <a:lstStyle/>
-                    <a:p>
-                      <a:pPr indent="0" marL="0">
-                        <a:buNone/>
-                      </a:pPr>
-                      <a:r>
-                        <a:rPr lang="en-US" sz="900" dirty="0">
-                          <a:solidFill>
-                            <a:srgbClr val="E6EDF3"/>
-                          </a:solidFill>
-                          <a:latin typeface="Consolas" pitchFamily="34" charset="0"/>
-                          <a:ea typeface="Consolas" pitchFamily="34" charset="-122"/>
-                          <a:cs typeface="Consolas" pitchFamily="34" charset="-120"/>
-                        </a:rPr>
-                        <a:t>0.526</a:t>
-                      </a:r>
-                      <a:endParaRPr lang="en-US" sz="900" dirty="0">
-                        <a:latin typeface="Consolas" charset="0"/>
-                        <a:ea typeface="Consolas" charset="0"/>
-                        <a:cs typeface="Consolas" charset="0"/>
-                      </a:endParaRPr>
-                    </a:p>
-                  </a:txBody>
-                  <a:tcPr marL="91440" marR="91440" marT="45720" marB="45720">
-                    <a:lnL w="3810" cap="flat" cmpd="sng" algn="ctr">
-                      <a:solidFill>
-                        <a:srgbClr val="30363D"/>
-                      </a:solidFill>
-                      <a:prstDash val="solid"/>
-                      <a:round/>
-                      <a:headEnd type="none" w="med" len="med"/>
-                      <a:tailEnd type="none" w="med" len="med"/>
-                    </a:lnL>
-                    <a:lnR w="3810" cap="flat" cmpd="sng" algn="ctr">
-                      <a:solidFill>
-                        <a:srgbClr val="30363D"/>
-                      </a:solidFill>
-                      <a:prstDash val="solid"/>
-                      <a:round/>
-                      <a:headEnd type="none" w="med" len="med"/>
-                      <a:tailEnd type="none" w="med" len="med"/>
-                    </a:lnR>
-                    <a:lnT w="3810" cap="flat" cmpd="sng" algn="ctr">
-                      <a:solidFill>
-                        <a:srgbClr val="30363D"/>
-                      </a:solidFill>
-                      <a:prstDash val="solid"/>
-                      <a:round/>
-                      <a:headEnd type="none" w="med" len="med"/>
-                      <a:tailEnd type="none" w="med" len="med"/>
-                    </a:lnT>
-                    <a:lnB w="3810" cap="flat" cmpd="sng" algn="ctr">
-                      <a:solidFill>
-                        <a:srgbClr val="30363D"/>
-                      </a:solidFill>
-                      <a:prstDash val="solid"/>
-                      <a:round/>
-                      <a:headEnd type="none" w="med" len="med"/>
-                      <a:tailEnd type="none" w="med" len="med"/>
-                    </a:lnB>
-                  </a:tcPr>
-                </a:tc>
-                <a:tc>
-                  <a:txBody>
-                    <a:bodyPr/>
-                    <a:lstStyle/>
-                    <a:p>
-                      <a:pPr indent="0" marL="0">
-                        <a:buNone/>
-                      </a:pPr>
-                      <a:r>
-                        <a:rPr lang="en-US" sz="900" dirty="0">
-                          <a:solidFill>
-                            <a:srgbClr val="E6EDF3"/>
-                          </a:solidFill>
-                          <a:latin typeface="Consolas" pitchFamily="34" charset="0"/>
-                          <a:ea typeface="Consolas" pitchFamily="34" charset="-122"/>
-                          <a:cs typeface="Consolas" pitchFamily="34" charset="-120"/>
-                        </a:rPr>
-                        <a:t>0.467</a:t>
-                      </a:r>
-                      <a:endParaRPr lang="en-US" sz="900" dirty="0">
-                        <a:latin typeface="Consolas" charset="0"/>
-                        <a:ea typeface="Consolas" charset="0"/>
-                        <a:cs typeface="Consolas" charset="0"/>
-                      </a:endParaRPr>
-                    </a:p>
-                  </a:txBody>
-                  <a:tcPr marL="91440" marR="91440" marT="45720" marB="45720">
-                    <a:lnL w="3810" cap="flat" cmpd="sng" algn="ctr">
-                      <a:solidFill>
-                        <a:srgbClr val="30363D"/>
-                      </a:solidFill>
-                      <a:prstDash val="solid"/>
-                      <a:round/>
-                      <a:headEnd type="none" w="med" len="med"/>
-                      <a:tailEnd type="none" w="med" len="med"/>
-                    </a:lnL>
-                    <a:lnR w="3810" cap="flat" cmpd="sng" algn="ctr">
-                      <a:solidFill>
-                        <a:srgbClr val="30363D"/>
-                      </a:solidFill>
-                      <a:prstDash val="solid"/>
-                      <a:round/>
-                      <a:headEnd type="none" w="med" len="med"/>
-                      <a:tailEnd type="none" w="med" len="med"/>
-                    </a:lnR>
-                    <a:lnT w="3810" cap="flat" cmpd="sng" algn="ctr">
-                      <a:solidFill>
-                        <a:srgbClr val="30363D"/>
-                      </a:solidFill>
-                      <a:prstDash val="solid"/>
-                      <a:round/>
-                      <a:headEnd type="none" w="med" len="med"/>
-                      <a:tailEnd type="none" w="med" len="med"/>
-                    </a:lnT>
-                    <a:lnB w="3810" cap="flat" cmpd="sng" algn="ctr">
-                      <a:solidFill>
-                        <a:srgbClr val="30363D"/>
-                      </a:solidFill>
-                      <a:prstDash val="solid"/>
-                      <a:round/>
-                      <a:headEnd type="none" w="med" len="med"/>
-                      <a:tailEnd type="none" w="med" len="med"/>
-                    </a:lnB>
-                  </a:tcPr>
-                </a:tc>
-                <a:tc>
-                  <a:txBody>
-                    <a:bodyPr/>
-                    <a:lstStyle/>
-                    <a:p>
-                      <a:pPr indent="0" marL="0">
-                        <a:buNone/>
-                      </a:pPr>
-                      <a:r>
-                        <a:rPr lang="en-US" sz="900" dirty="0">
-                          <a:solidFill>
-                            <a:srgbClr val="E6EDF3"/>
-                          </a:solidFill>
-                          <a:latin typeface="Consolas" pitchFamily="34" charset="0"/>
-                          <a:ea typeface="Consolas" pitchFamily="34" charset="-122"/>
-                          <a:cs typeface="Consolas" pitchFamily="34" charset="-120"/>
-                        </a:rPr>
-                        <a:t>+5.9%</a:t>
-                      </a:r>
-                      <a:endParaRPr lang="en-US" sz="900" dirty="0">
-                        <a:latin typeface="Consolas" charset="0"/>
-                        <a:ea typeface="Consolas" charset="0"/>
-                        <a:cs typeface="Consolas" charset="0"/>
-                      </a:endParaRPr>
-                    </a:p>
-                  </a:txBody>
-                  <a:tcPr marL="91440" marR="91440" marT="45720" marB="45720">
-                    <a:lnL w="3810" cap="flat" cmpd="sng" algn="ctr">
-                      <a:solidFill>
-                        <a:srgbClr val="30363D"/>
-                      </a:solidFill>
-                      <a:prstDash val="solid"/>
-                      <a:round/>
-                      <a:headEnd type="none" w="med" len="med"/>
-                      <a:tailEnd type="none" w="med" len="med"/>
-                    </a:lnL>
-                    <a:lnR w="3810" cap="flat" cmpd="sng" algn="ctr">
-                      <a:solidFill>
-                        <a:srgbClr val="30363D"/>
-                      </a:solidFill>
-                      <a:prstDash val="solid"/>
-                      <a:round/>
-                      <a:headEnd type="none" w="med" len="med"/>
-                      <a:tailEnd type="none" w="med" len="med"/>
-                    </a:lnR>
-                    <a:lnT w="3810" cap="flat" cmpd="sng" algn="ctr">
-                      <a:solidFill>
-                        <a:srgbClr val="30363D"/>
-                      </a:solidFill>
-                      <a:prstDash val="solid"/>
-                      <a:round/>
-                      <a:headEnd type="none" w="med" len="med"/>
-                      <a:tailEnd type="none" w="med" len="med"/>
-                    </a:lnT>
-                    <a:lnB w="3810" cap="flat" cmpd="sng" algn="ctr">
-                      <a:solidFill>
-                        <a:srgbClr val="30363D"/>
-                      </a:solidFill>
-                      <a:prstDash val="solid"/>
-                      <a:round/>
-                      <a:headEnd type="none" w="med" len="med"/>
-                      <a:tailEnd type="none" w="med" len="med"/>
-                    </a:lnB>
-                  </a:tcPr>
-                </a:tc>
-              </a:tr>
-              <a:tr h="201168">
-                <a:tc>
-                  <a:txBody>
-                    <a:bodyPr/>
-                    <a:lstStyle/>
-                    <a:p>
-                      <a:pPr indent="0" marL="0">
-                        <a:buNone/>
-                      </a:pPr>
-                      <a:r>
-                        <a:rPr lang="en-US" sz="900" dirty="0">
-                          <a:solidFill>
-                            <a:srgbClr val="E6EDF3"/>
-                          </a:solidFill>
-                          <a:latin typeface="Consolas" pitchFamily="34" charset="0"/>
-                          <a:ea typeface="Consolas" pitchFamily="34" charset="-122"/>
-                          <a:cs typeface="Consolas" pitchFamily="34" charset="-120"/>
-                        </a:rPr>
-                        <a:t>8</a:t>
-                      </a:r>
-                      <a:endParaRPr lang="en-US" sz="900" dirty="0">
-                        <a:latin typeface="Consolas" charset="0"/>
-                        <a:ea typeface="Consolas" charset="0"/>
-                        <a:cs typeface="Consolas" charset="0"/>
-                      </a:endParaRPr>
-                    </a:p>
-                  </a:txBody>
-                  <a:tcPr marL="91440" marR="91440" marT="45720" marB="45720">
-                    <a:lnL w="3810" cap="flat" cmpd="sng" algn="ctr">
-                      <a:solidFill>
-                        <a:srgbClr val="30363D"/>
-                      </a:solidFill>
-                      <a:prstDash val="solid"/>
-                      <a:round/>
-                      <a:headEnd type="none" w="med" len="med"/>
-                      <a:tailEnd type="none" w="med" len="med"/>
-                    </a:lnL>
-                    <a:lnR w="3810" cap="flat" cmpd="sng" algn="ctr">
-                      <a:solidFill>
-                        <a:srgbClr val="30363D"/>
-                      </a:solidFill>
-                      <a:prstDash val="solid"/>
-                      <a:round/>
-                      <a:headEnd type="none" w="med" len="med"/>
-                      <a:tailEnd type="none" w="med" len="med"/>
-                    </a:lnR>
-                    <a:lnT w="3810" cap="flat" cmpd="sng" algn="ctr">
-                      <a:solidFill>
-                        <a:srgbClr val="30363D"/>
-                      </a:solidFill>
-                      <a:prstDash val="solid"/>
-                      <a:round/>
-                      <a:headEnd type="none" w="med" len="med"/>
-                      <a:tailEnd type="none" w="med" len="med"/>
-                    </a:lnT>
-                    <a:lnB w="3810" cap="flat" cmpd="sng" algn="ctr">
-                      <a:solidFill>
-                        <a:srgbClr val="30363D"/>
-                      </a:solidFill>
-                      <a:prstDash val="solid"/>
-                      <a:round/>
-                      <a:headEnd type="none" w="med" len="med"/>
-                      <a:tailEnd type="none" w="med" len="med"/>
-                    </a:lnB>
-                  </a:tcPr>
-                </a:tc>
-                <a:tc>
-                  <a:txBody>
-                    <a:bodyPr/>
-                    <a:lstStyle/>
-                    <a:p>
-                      <a:pPr indent="0" marL="0">
-                        <a:buNone/>
-                      </a:pPr>
-                      <a:r>
-                        <a:rPr lang="en-US" sz="900" dirty="0">
-                          <a:solidFill>
-                            <a:srgbClr val="E6EDF3"/>
-                          </a:solidFill>
-                          <a:latin typeface="Consolas" pitchFamily="34" charset="0"/>
-                          <a:ea typeface="Consolas" pitchFamily="34" charset="-122"/>
-                          <a:cs typeface="Consolas" pitchFamily="34" charset="-120"/>
-                        </a:rPr>
-                        <a:t>0.513</a:t>
-                      </a:r>
-                      <a:endParaRPr lang="en-US" sz="900" dirty="0">
-                        <a:latin typeface="Consolas" charset="0"/>
-                        <a:ea typeface="Consolas" charset="0"/>
-                        <a:cs typeface="Consolas" charset="0"/>
-                      </a:endParaRPr>
-                    </a:p>
-                  </a:txBody>
-                  <a:tcPr marL="91440" marR="91440" marT="45720" marB="45720">
-                    <a:lnL w="3810" cap="flat" cmpd="sng" algn="ctr">
-                      <a:solidFill>
-                        <a:srgbClr val="30363D"/>
-                      </a:solidFill>
-                      <a:prstDash val="solid"/>
-                      <a:round/>
-                      <a:headEnd type="none" w="med" len="med"/>
-                      <a:tailEnd type="none" w="med" len="med"/>
-                    </a:lnL>
-                    <a:lnR w="3810" cap="flat" cmpd="sng" algn="ctr">
-                      <a:solidFill>
-                        <a:srgbClr val="30363D"/>
-                      </a:solidFill>
-                      <a:prstDash val="solid"/>
-                      <a:round/>
-                      <a:headEnd type="none" w="med" len="med"/>
-                      <a:tailEnd type="none" w="med" len="med"/>
-                    </a:lnR>
-                    <a:lnT w="3810" cap="flat" cmpd="sng" algn="ctr">
-                      <a:solidFill>
-                        <a:srgbClr val="30363D"/>
-                      </a:solidFill>
-                      <a:prstDash val="solid"/>
-                      <a:round/>
-                      <a:headEnd type="none" w="med" len="med"/>
-                      <a:tailEnd type="none" w="med" len="med"/>
-                    </a:lnT>
-                    <a:lnB w="3810" cap="flat" cmpd="sng" algn="ctr">
-                      <a:solidFill>
-                        <a:srgbClr val="30363D"/>
-                      </a:solidFill>
-                      <a:prstDash val="solid"/>
-                      <a:round/>
-                      <a:headEnd type="none" w="med" len="med"/>
-                      <a:tailEnd type="none" w="med" len="med"/>
-                    </a:lnB>
-                  </a:tcPr>
-                </a:tc>
-                <a:tc>
-                  <a:txBody>
-                    <a:bodyPr/>
-                    <a:lstStyle/>
-                    <a:p>
-                      <a:pPr indent="0" marL="0">
-                        <a:buNone/>
-                      </a:pPr>
-                      <a:r>
-                        <a:rPr lang="en-US" sz="900" dirty="0">
-                          <a:solidFill>
-                            <a:srgbClr val="E6EDF3"/>
-                          </a:solidFill>
-                          <a:latin typeface="Consolas" pitchFamily="34" charset="0"/>
-                          <a:ea typeface="Consolas" pitchFamily="34" charset="-122"/>
-                          <a:cs typeface="Consolas" pitchFamily="34" charset="-120"/>
-                        </a:rPr>
-                        <a:t>0.533</a:t>
-                      </a:r>
-                      <a:endParaRPr lang="en-US" sz="900" dirty="0">
-                        <a:latin typeface="Consolas" charset="0"/>
-                        <a:ea typeface="Consolas" charset="0"/>
-                        <a:cs typeface="Consolas" charset="0"/>
-                      </a:endParaRPr>
-                    </a:p>
-                  </a:txBody>
-                  <a:tcPr marL="91440" marR="91440" marT="45720" marB="45720">
-                    <a:lnL w="3810" cap="flat" cmpd="sng" algn="ctr">
-                      <a:solidFill>
-                        <a:srgbClr val="30363D"/>
-                      </a:solidFill>
-                      <a:prstDash val="solid"/>
-                      <a:round/>
-                      <a:headEnd type="none" w="med" len="med"/>
-                      <a:tailEnd type="none" w="med" len="med"/>
-                    </a:lnL>
-                    <a:lnR w="3810" cap="flat" cmpd="sng" algn="ctr">
-                      <a:solidFill>
-                        <a:srgbClr val="30363D"/>
-                      </a:solidFill>
-                      <a:prstDash val="solid"/>
-                      <a:round/>
-                      <a:headEnd type="none" w="med" len="med"/>
-                      <a:tailEnd type="none" w="med" len="med"/>
-                    </a:lnR>
-                    <a:lnT w="3810" cap="flat" cmpd="sng" algn="ctr">
-                      <a:solidFill>
-                        <a:srgbClr val="30363D"/>
-                      </a:solidFill>
-                      <a:prstDash val="solid"/>
-                      <a:round/>
-                      <a:headEnd type="none" w="med" len="med"/>
-                      <a:tailEnd type="none" w="med" len="med"/>
-                    </a:lnT>
-                    <a:lnB w="3810" cap="flat" cmpd="sng" algn="ctr">
-                      <a:solidFill>
-                        <a:srgbClr val="30363D"/>
-                      </a:solidFill>
-                      <a:prstDash val="solid"/>
-                      <a:round/>
-                      <a:headEnd type="none" w="med" len="med"/>
-                      <a:tailEnd type="none" w="med" len="med"/>
-                    </a:lnB>
-                  </a:tcPr>
-                </a:tc>
-                <a:tc>
-                  <a:txBody>
-                    <a:bodyPr/>
-                    <a:lstStyle/>
-                    <a:p>
-                      <a:pPr indent="0" marL="0">
-                        <a:buNone/>
-                      </a:pPr>
-                      <a:r>
-                        <a:rPr lang="en-US" sz="900" dirty="0">
-                          <a:solidFill>
-                            <a:srgbClr val="E6EDF3"/>
-                          </a:solidFill>
-                          <a:latin typeface="Consolas" pitchFamily="34" charset="0"/>
-                          <a:ea typeface="Consolas" pitchFamily="34" charset="-122"/>
-                          <a:cs typeface="Consolas" pitchFamily="34" charset="-120"/>
-                        </a:rPr>
-                        <a:t>-2.1%</a:t>
-                      </a:r>
-                      <a:endParaRPr lang="en-US" sz="900" dirty="0">
-                        <a:latin typeface="Consolas" charset="0"/>
-                        <a:ea typeface="Consolas" charset="0"/>
-                        <a:cs typeface="Consolas" charset="0"/>
-                      </a:endParaRPr>
-                    </a:p>
-                  </a:txBody>
-                  <a:tcPr marL="91440" marR="91440" marT="45720" marB="45720">
-                    <a:lnL w="3810" cap="flat" cmpd="sng" algn="ctr">
-                      <a:solidFill>
-                        <a:srgbClr val="30363D"/>
-                      </a:solidFill>
-                      <a:prstDash val="solid"/>
-                      <a:round/>
-                      <a:headEnd type="none" w="med" len="med"/>
-                      <a:tailEnd type="none" w="med" len="med"/>
-                    </a:lnL>
-                    <a:lnR w="3810" cap="flat" cmpd="sng" algn="ctr">
-                      <a:solidFill>
-                        <a:srgbClr val="30363D"/>
-                      </a:solidFill>
-                      <a:prstDash val="solid"/>
-                      <a:round/>
-                      <a:headEnd type="none" w="med" len="med"/>
-                      <a:tailEnd type="none" w="med" len="med"/>
-                    </a:lnR>
-                    <a:lnT w="3810" cap="flat" cmpd="sng" algn="ctr">
-                      <a:solidFill>
-                        <a:srgbClr val="30363D"/>
-                      </a:solidFill>
-                      <a:prstDash val="solid"/>
-                      <a:round/>
-                      <a:headEnd type="none" w="med" len="med"/>
-                      <a:tailEnd type="none" w="med" len="med"/>
-                    </a:lnT>
-                    <a:lnB w="3810" cap="flat" cmpd="sng" algn="ctr">
-                      <a:solidFill>
-                        <a:srgbClr val="30363D"/>
-                      </a:solidFill>
-                      <a:prstDash val="solid"/>
-                      <a:round/>
-                      <a:headEnd type="none" w="med" len="med"/>
-                      <a:tailEnd type="none" w="med" len="med"/>
-                    </a:lnB>
-                  </a:tcPr>
-                </a:tc>
-              </a:tr>
-              <a:tr h="201168">
-                <a:tc>
-                  <a:txBody>
-                    <a:bodyPr/>
-                    <a:lstStyle/>
-                    <a:p>
-                      <a:pPr indent="0" marL="0">
-                        <a:buNone/>
-                      </a:pPr>
-                      <a:r>
-                        <a:rPr lang="en-US" sz="900" dirty="0">
-                          <a:solidFill>
-                            <a:srgbClr val="E6EDF3"/>
-                          </a:solidFill>
-                          <a:latin typeface="Consolas" pitchFamily="34" charset="0"/>
-                          <a:ea typeface="Consolas" pitchFamily="34" charset="-122"/>
-                          <a:cs typeface="Consolas" pitchFamily="34" charset="-120"/>
-                        </a:rPr>
-                        <a:t>9</a:t>
-                      </a:r>
-                      <a:endParaRPr lang="en-US" sz="900" dirty="0">
-                        <a:latin typeface="Consolas" charset="0"/>
-                        <a:ea typeface="Consolas" charset="0"/>
-                        <a:cs typeface="Consolas" charset="0"/>
-                      </a:endParaRPr>
-                    </a:p>
-                  </a:txBody>
-                  <a:tcPr marL="91440" marR="91440" marT="45720" marB="45720">
-                    <a:lnL w="3810" cap="flat" cmpd="sng" algn="ctr">
-                      <a:solidFill>
-                        <a:srgbClr val="30363D"/>
-                      </a:solidFill>
-                      <a:prstDash val="solid"/>
-                      <a:round/>
-                      <a:headEnd type="none" w="med" len="med"/>
-                      <a:tailEnd type="none" w="med" len="med"/>
-                    </a:lnL>
-                    <a:lnR w="3810" cap="flat" cmpd="sng" algn="ctr">
-                      <a:solidFill>
-                        <a:srgbClr val="30363D"/>
-                      </a:solidFill>
-                      <a:prstDash val="solid"/>
-                      <a:round/>
-                      <a:headEnd type="none" w="med" len="med"/>
-                      <a:tailEnd type="none" w="med" len="med"/>
-                    </a:lnR>
-                    <a:lnT w="3810" cap="flat" cmpd="sng" algn="ctr">
-                      <a:solidFill>
-                        <a:srgbClr val="30363D"/>
-                      </a:solidFill>
-                      <a:prstDash val="solid"/>
-                      <a:round/>
-                      <a:headEnd type="none" w="med" len="med"/>
-                      <a:tailEnd type="none" w="med" len="med"/>
-                    </a:lnT>
-                    <a:lnB w="3810" cap="flat" cmpd="sng" algn="ctr">
-                      <a:solidFill>
-                        <a:srgbClr val="30363D"/>
-                      </a:solidFill>
-                      <a:prstDash val="solid"/>
-                      <a:round/>
-                      <a:headEnd type="none" w="med" len="med"/>
-                      <a:tailEnd type="none" w="med" len="med"/>
-                    </a:lnB>
-                  </a:tcPr>
-                </a:tc>
-                <a:tc>
-                  <a:txBody>
-                    <a:bodyPr/>
-                    <a:lstStyle/>
-                    <a:p>
-                      <a:pPr indent="0" marL="0">
-                        <a:buNone/>
-                      </a:pPr>
-                      <a:r>
-                        <a:rPr lang="en-US" sz="900" dirty="0">
-                          <a:solidFill>
-                            <a:srgbClr val="E6EDF3"/>
-                          </a:solidFill>
-                          <a:latin typeface="Consolas" pitchFamily="34" charset="0"/>
-                          <a:ea typeface="Consolas" pitchFamily="34" charset="-122"/>
-                          <a:cs typeface="Consolas" pitchFamily="34" charset="-120"/>
-                        </a:rPr>
-                        <a:t>0.607</a:t>
-                      </a:r>
-                      <a:endParaRPr lang="en-US" sz="900" dirty="0">
-                        <a:latin typeface="Consolas" charset="0"/>
-                        <a:ea typeface="Consolas" charset="0"/>
-                        <a:cs typeface="Consolas" charset="0"/>
-                      </a:endParaRPr>
-                    </a:p>
-                  </a:txBody>
-                  <a:tcPr marL="91440" marR="91440" marT="45720" marB="45720">
-                    <a:lnL w="3810" cap="flat" cmpd="sng" algn="ctr">
-                      <a:solidFill>
-                        <a:srgbClr val="30363D"/>
-                      </a:solidFill>
-                      <a:prstDash val="solid"/>
-                      <a:round/>
-                      <a:headEnd type="none" w="med" len="med"/>
-                      <a:tailEnd type="none" w="med" len="med"/>
-                    </a:lnL>
-                    <a:lnR w="3810" cap="flat" cmpd="sng" algn="ctr">
-                      <a:solidFill>
-                        <a:srgbClr val="30363D"/>
-                      </a:solidFill>
-                      <a:prstDash val="solid"/>
-                      <a:round/>
-                      <a:headEnd type="none" w="med" len="med"/>
-                      <a:tailEnd type="none" w="med" len="med"/>
-                    </a:lnR>
-                    <a:lnT w="3810" cap="flat" cmpd="sng" algn="ctr">
-                      <a:solidFill>
-                        <a:srgbClr val="30363D"/>
-                      </a:solidFill>
-                      <a:prstDash val="solid"/>
-                      <a:round/>
-                      <a:headEnd type="none" w="med" len="med"/>
-                      <a:tailEnd type="none" w="med" len="med"/>
-                    </a:lnT>
-                    <a:lnB w="3810" cap="flat" cmpd="sng" algn="ctr">
-                      <a:solidFill>
-                        <a:srgbClr val="30363D"/>
-                      </a:solidFill>
-                      <a:prstDash val="solid"/>
-                      <a:round/>
-                      <a:headEnd type="none" w="med" len="med"/>
-                      <a:tailEnd type="none" w="med" len="med"/>
-                    </a:lnB>
-                  </a:tcPr>
-                </a:tc>
-                <a:tc>
-                  <a:txBody>
-                    <a:bodyPr/>
-                    <a:lstStyle/>
-                    <a:p>
-                      <a:pPr indent="0" marL="0">
-                        <a:buNone/>
-                      </a:pPr>
-                      <a:r>
-                        <a:rPr lang="en-US" sz="900" dirty="0">
-                          <a:solidFill>
-                            <a:srgbClr val="E6EDF3"/>
-                          </a:solidFill>
-                          <a:latin typeface="Consolas" pitchFamily="34" charset="0"/>
-                          <a:ea typeface="Consolas" pitchFamily="34" charset="-122"/>
-                          <a:cs typeface="Consolas" pitchFamily="34" charset="-120"/>
-                        </a:rPr>
-                        <a:t>0.600</a:t>
-                      </a:r>
-                      <a:endParaRPr lang="en-US" sz="900" dirty="0">
-                        <a:latin typeface="Consolas" charset="0"/>
-                        <a:ea typeface="Consolas" charset="0"/>
-                        <a:cs typeface="Consolas" charset="0"/>
-                      </a:endParaRPr>
-                    </a:p>
-                  </a:txBody>
-                  <a:tcPr marL="91440" marR="91440" marT="45720" marB="45720">
-                    <a:lnL w="3810" cap="flat" cmpd="sng" algn="ctr">
-                      <a:solidFill>
-                        <a:srgbClr val="30363D"/>
-                      </a:solidFill>
-                      <a:prstDash val="solid"/>
-                      <a:round/>
-                      <a:headEnd type="none" w="med" len="med"/>
-                      <a:tailEnd type="none" w="med" len="med"/>
-                    </a:lnL>
-                    <a:lnR w="3810" cap="flat" cmpd="sng" algn="ctr">
-                      <a:solidFill>
-                        <a:srgbClr val="30363D"/>
-                      </a:solidFill>
-                      <a:prstDash val="solid"/>
-                      <a:round/>
-                      <a:headEnd type="none" w="med" len="med"/>
-                      <a:tailEnd type="none" w="med" len="med"/>
-                    </a:lnR>
-                    <a:lnT w="3810" cap="flat" cmpd="sng" algn="ctr">
-                      <a:solidFill>
-                        <a:srgbClr val="30363D"/>
-                      </a:solidFill>
-                      <a:prstDash val="solid"/>
-                      <a:round/>
-                      <a:headEnd type="none" w="med" len="med"/>
-                      <a:tailEnd type="none" w="med" len="med"/>
-                    </a:lnT>
-                    <a:lnB w="3810" cap="flat" cmpd="sng" algn="ctr">
-                      <a:solidFill>
-                        <a:srgbClr val="30363D"/>
-                      </a:solidFill>
-                      <a:prstDash val="solid"/>
-                      <a:round/>
-                      <a:headEnd type="none" w="med" len="med"/>
-                      <a:tailEnd type="none" w="med" len="med"/>
-                    </a:lnB>
-                  </a:tcPr>
-                </a:tc>
-                <a:tc>
-                  <a:txBody>
-                    <a:bodyPr/>
-                    <a:lstStyle/>
-                    <a:p>
-                      <a:pPr indent="0" marL="0">
-                        <a:buNone/>
-                      </a:pPr>
-                      <a:r>
-                        <a:rPr lang="en-US" sz="900" dirty="0">
-                          <a:solidFill>
-                            <a:srgbClr val="E6EDF3"/>
-                          </a:solidFill>
-                          <a:latin typeface="Consolas" pitchFamily="34" charset="0"/>
-                          <a:ea typeface="Consolas" pitchFamily="34" charset="-122"/>
-                          <a:cs typeface="Consolas" pitchFamily="34" charset="-120"/>
-                        </a:rPr>
-                        <a:t>+0.7%</a:t>
-                      </a:r>
-                      <a:endParaRPr lang="en-US" sz="900" dirty="0">
-                        <a:latin typeface="Consolas" charset="0"/>
-                        <a:ea typeface="Consolas" charset="0"/>
-                        <a:cs typeface="Consolas" charset="0"/>
-                      </a:endParaRPr>
-                    </a:p>
-                  </a:txBody>
-                  <a:tcPr marL="91440" marR="91440" marT="45720" marB="45720">
-                    <a:lnL w="3810" cap="flat" cmpd="sng" algn="ctr">
-                      <a:solidFill>
-                        <a:srgbClr val="30363D"/>
-                      </a:solidFill>
-                      <a:prstDash val="solid"/>
-                      <a:round/>
-                      <a:headEnd type="none" w="med" len="med"/>
-                      <a:tailEnd type="none" w="med" len="med"/>
-                    </a:lnL>
-                    <a:lnR w="3810" cap="flat" cmpd="sng" algn="ctr">
-                      <a:solidFill>
-                        <a:srgbClr val="30363D"/>
-                      </a:solidFill>
-                      <a:prstDash val="solid"/>
-                      <a:round/>
-                      <a:headEnd type="none" w="med" len="med"/>
-                      <a:tailEnd type="none" w="med" len="med"/>
-                    </a:lnR>
-                    <a:lnT w="3810" cap="flat" cmpd="sng" algn="ctr">
-                      <a:solidFill>
-                        <a:srgbClr val="30363D"/>
-                      </a:solidFill>
-                      <a:prstDash val="solid"/>
-                      <a:round/>
-                      <a:headEnd type="none" w="med" len="med"/>
-                      <a:tailEnd type="none" w="med" len="med"/>
-                    </a:lnT>
-                    <a:lnB w="3810" cap="flat" cmpd="sng" algn="ctr">
-                      <a:solidFill>
-                        <a:srgbClr val="30363D"/>
-                      </a:solidFill>
-                      <a:prstDash val="solid"/>
-                      <a:round/>
-                      <a:headEnd type="none" w="med" len="med"/>
-                      <a:tailEnd type="none" w="med" len="med"/>
-                    </a:lnB>
-                  </a:tcPr>
-                </a:tc>
-              </a:tr>
-              <a:tr h="201168">
-                <a:tc>
-                  <a:txBody>
-                    <a:bodyPr/>
-                    <a:lstStyle/>
-                    <a:p>
-                      <a:pPr indent="0" marL="0">
-                        <a:buNone/>
-                      </a:pPr>
-                      <a:r>
-                        <a:rPr lang="en-US" sz="900" dirty="0">
-                          <a:solidFill>
-                            <a:srgbClr val="E6EDF3"/>
-                          </a:solidFill>
-                          <a:latin typeface="Consolas" pitchFamily="34" charset="0"/>
-                          <a:ea typeface="Consolas" pitchFamily="34" charset="-122"/>
-                          <a:cs typeface="Consolas" pitchFamily="34" charset="-120"/>
-                        </a:rPr>
-                        <a:t>10</a:t>
-                      </a:r>
-                      <a:endParaRPr lang="en-US" sz="900" dirty="0">
-                        <a:latin typeface="Consolas" charset="0"/>
-                        <a:ea typeface="Consolas" charset="0"/>
-                        <a:cs typeface="Consolas" charset="0"/>
-                      </a:endParaRPr>
-                    </a:p>
-                  </a:txBody>
-                  <a:tcPr marL="91440" marR="91440" marT="45720" marB="45720">
-                    <a:lnL w="3810" cap="flat" cmpd="sng" algn="ctr">
-                      <a:solidFill>
-                        <a:srgbClr val="30363D"/>
-                      </a:solidFill>
-                      <a:prstDash val="solid"/>
-                      <a:round/>
-                      <a:headEnd type="none" w="med" len="med"/>
-                      <a:tailEnd type="none" w="med" len="med"/>
-                    </a:lnL>
-                    <a:lnR w="3810" cap="flat" cmpd="sng" algn="ctr">
-                      <a:solidFill>
-                        <a:srgbClr val="30363D"/>
-                      </a:solidFill>
-                      <a:prstDash val="solid"/>
-                      <a:round/>
-                      <a:headEnd type="none" w="med" len="med"/>
-                      <a:tailEnd type="none" w="med" len="med"/>
-                    </a:lnR>
-                    <a:lnT w="3810" cap="flat" cmpd="sng" algn="ctr">
-                      <a:solidFill>
-                        <a:srgbClr val="30363D"/>
-                      </a:solidFill>
-                      <a:prstDash val="solid"/>
-                      <a:round/>
-                      <a:headEnd type="none" w="med" len="med"/>
-                      <a:tailEnd type="none" w="med" len="med"/>
-                    </a:lnT>
-                    <a:lnB w="3810" cap="flat" cmpd="sng" algn="ctr">
-                      <a:solidFill>
-                        <a:srgbClr val="30363D"/>
-                      </a:solidFill>
-                      <a:prstDash val="solid"/>
-                      <a:round/>
-                      <a:headEnd type="none" w="med" len="med"/>
-                      <a:tailEnd type="none" w="med" len="med"/>
-                    </a:lnB>
-                  </a:tcPr>
-                </a:tc>
-                <a:tc>
-                  <a:txBody>
-                    <a:bodyPr/>
-                    <a:lstStyle/>
-                    <a:p>
-                      <a:pPr indent="0" marL="0">
-                        <a:buNone/>
-                      </a:pPr>
-                      <a:r>
-                        <a:rPr lang="en-US" sz="900" dirty="0">
-                          <a:solidFill>
-                            <a:srgbClr val="E6EDF3"/>
-                          </a:solidFill>
-                          <a:latin typeface="Consolas" pitchFamily="34" charset="0"/>
-                          <a:ea typeface="Consolas" pitchFamily="34" charset="-122"/>
-                          <a:cs typeface="Consolas" pitchFamily="34" charset="-120"/>
-                        </a:rPr>
-                        <a:t>0.671</a:t>
-                      </a:r>
-                      <a:endParaRPr lang="en-US" sz="900" dirty="0">
-                        <a:latin typeface="Consolas" charset="0"/>
-                        <a:ea typeface="Consolas" charset="0"/>
-                        <a:cs typeface="Consolas" charset="0"/>
-                      </a:endParaRPr>
-                    </a:p>
-                  </a:txBody>
-                  <a:tcPr marL="91440" marR="91440" marT="45720" marB="45720">
-                    <a:lnL w="3810" cap="flat" cmpd="sng" algn="ctr">
-                      <a:solidFill>
-                        <a:srgbClr val="30363D"/>
-                      </a:solidFill>
-                      <a:prstDash val="solid"/>
-                      <a:round/>
-                      <a:headEnd type="none" w="med" len="med"/>
-                      <a:tailEnd type="none" w="med" len="med"/>
-                    </a:lnL>
-                    <a:lnR w="3810" cap="flat" cmpd="sng" algn="ctr">
-                      <a:solidFill>
-                        <a:srgbClr val="30363D"/>
-                      </a:solidFill>
-                      <a:prstDash val="solid"/>
-                      <a:round/>
-                      <a:headEnd type="none" w="med" len="med"/>
-                      <a:tailEnd type="none" w="med" len="med"/>
-                    </a:lnR>
-                    <a:lnT w="3810" cap="flat" cmpd="sng" algn="ctr">
-                      <a:solidFill>
-                        <a:srgbClr val="30363D"/>
-                      </a:solidFill>
-                      <a:prstDash val="solid"/>
-                      <a:round/>
-                      <a:headEnd type="none" w="med" len="med"/>
-                      <a:tailEnd type="none" w="med" len="med"/>
-                    </a:lnT>
-                    <a:lnB w="3810" cap="flat" cmpd="sng" algn="ctr">
-                      <a:solidFill>
-                        <a:srgbClr val="30363D"/>
-                      </a:solidFill>
-                      <a:prstDash val="solid"/>
-                      <a:round/>
-                      <a:headEnd type="none" w="med" len="med"/>
-                      <a:tailEnd type="none" w="med" len="med"/>
-                    </a:lnB>
-                  </a:tcPr>
-                </a:tc>
-                <a:tc>
-                  <a:txBody>
-                    <a:bodyPr/>
-                    <a:lstStyle/>
-                    <a:p>
-                      <a:pPr indent="0" marL="0">
-                        <a:buNone/>
-                      </a:pPr>
-                      <a:r>
-                        <a:rPr lang="en-US" sz="900" dirty="0">
-                          <a:solidFill>
-                            <a:srgbClr val="E6EDF3"/>
-                          </a:solidFill>
-                          <a:latin typeface="Consolas" pitchFamily="34" charset="0"/>
-                          <a:ea typeface="Consolas" pitchFamily="34" charset="-122"/>
-                          <a:cs typeface="Consolas" pitchFamily="34" charset="-120"/>
-                        </a:rPr>
-                        <a:t>0.667</a:t>
-                      </a:r>
-                      <a:endParaRPr lang="en-US" sz="900" dirty="0">
-                        <a:latin typeface="Consolas" charset="0"/>
-                        <a:ea typeface="Consolas" charset="0"/>
-                        <a:cs typeface="Consolas" charset="0"/>
-                      </a:endParaRPr>
-                    </a:p>
-                  </a:txBody>
-                  <a:tcPr marL="91440" marR="91440" marT="45720" marB="45720">
-                    <a:lnL w="3810" cap="flat" cmpd="sng" algn="ctr">
-                      <a:solidFill>
-                        <a:srgbClr val="30363D"/>
-                      </a:solidFill>
-                      <a:prstDash val="solid"/>
-                      <a:round/>
-                      <a:headEnd type="none" w="med" len="med"/>
-                      <a:tailEnd type="none" w="med" len="med"/>
-                    </a:lnL>
-                    <a:lnR w="3810" cap="flat" cmpd="sng" algn="ctr">
-                      <a:solidFill>
-                        <a:srgbClr val="30363D"/>
-                      </a:solidFill>
-                      <a:prstDash val="solid"/>
-                      <a:round/>
-                      <a:headEnd type="none" w="med" len="med"/>
-                      <a:tailEnd type="none" w="med" len="med"/>
-                    </a:lnR>
-                    <a:lnT w="3810" cap="flat" cmpd="sng" algn="ctr">
-                      <a:solidFill>
-                        <a:srgbClr val="30363D"/>
-                      </a:solidFill>
-                      <a:prstDash val="solid"/>
-                      <a:round/>
-                      <a:headEnd type="none" w="med" len="med"/>
-                      <a:tailEnd type="none" w="med" len="med"/>
-                    </a:lnT>
-                    <a:lnB w="3810" cap="flat" cmpd="sng" algn="ctr">
-                      <a:solidFill>
-                        <a:srgbClr val="30363D"/>
-                      </a:solidFill>
-                      <a:prstDash val="solid"/>
-                      <a:round/>
-                      <a:headEnd type="none" w="med" len="med"/>
-                      <a:tailEnd type="none" w="med" len="med"/>
-                    </a:lnB>
-                  </a:tcPr>
-                </a:tc>
-                <a:tc>
-                  <a:txBody>
-                    <a:bodyPr/>
-                    <a:lstStyle/>
-                    <a:p>
-                      <a:pPr indent="0" marL="0">
-                        <a:buNone/>
-                      </a:pPr>
-                      <a:r>
-                        <a:rPr lang="en-US" sz="900" dirty="0">
-                          <a:solidFill>
-                            <a:srgbClr val="E6EDF3"/>
-                          </a:solidFill>
-                          <a:latin typeface="Consolas" pitchFamily="34" charset="0"/>
-                          <a:ea typeface="Consolas" pitchFamily="34" charset="-122"/>
-                          <a:cs typeface="Consolas" pitchFamily="34" charset="-120"/>
-                        </a:rPr>
-                        <a:t>+0.4%</a:t>
-                      </a:r>
-                      <a:endParaRPr lang="en-US" sz="900" dirty="0">
-                        <a:latin typeface="Consolas" charset="0"/>
-                        <a:ea typeface="Consolas" charset="0"/>
-                        <a:cs typeface="Consolas" charset="0"/>
-                      </a:endParaRPr>
-                    </a:p>
-                  </a:txBody>
-                  <a:tcPr marL="91440" marR="91440" marT="45720" marB="45720">
-                    <a:lnL w="3810" cap="flat" cmpd="sng" algn="ctr">
-                      <a:solidFill>
-                        <a:srgbClr val="30363D"/>
-                      </a:solidFill>
-                      <a:prstDash val="solid"/>
-                      <a:round/>
-                      <a:headEnd type="none" w="med" len="med"/>
-                      <a:tailEnd type="none" w="med" len="med"/>
-                    </a:lnL>
-                    <a:lnR w="3810" cap="flat" cmpd="sng" algn="ctr">
-                      <a:solidFill>
-                        <a:srgbClr val="30363D"/>
-                      </a:solidFill>
-                      <a:prstDash val="solid"/>
-                      <a:round/>
-                      <a:headEnd type="none" w="med" len="med"/>
-                      <a:tailEnd type="none" w="med" len="med"/>
-                    </a:lnR>
-                    <a:lnT w="3810" cap="flat" cmpd="sng" algn="ctr">
-                      <a:solidFill>
-                        <a:srgbClr val="30363D"/>
-                      </a:solidFill>
-                      <a:prstDash val="solid"/>
-                      <a:round/>
-                      <a:headEnd type="none" w="med" len="med"/>
-                      <a:tailEnd type="none" w="med" len="med"/>
-                    </a:lnT>
-                    <a:lnB w="3810" cap="flat" cmpd="sng" algn="ctr">
-                      <a:solidFill>
-                        <a:srgbClr val="30363D"/>
-                      </a:solidFill>
-                      <a:prstDash val="solid"/>
-                      <a:round/>
-                      <a:headEnd type="none" w="med" len="med"/>
-                      <a:tailEnd type="none" w="med" len="med"/>
-                    </a:lnB>
-                  </a:tcPr>
-                </a:tc>
-              </a:tr>
-              <a:tr h="201168">
-                <a:tc>
-                  <a:txBody>
-                    <a:bodyPr/>
-                    <a:lstStyle/>
-                    <a:p>
-                      <a:pPr indent="0" marL="0">
-                        <a:buNone/>
-                      </a:pPr>
-                      <a:r>
-                        <a:rPr lang="en-US" sz="900" dirty="0">
-                          <a:solidFill>
-                            <a:srgbClr val="E6EDF3"/>
-                          </a:solidFill>
-                          <a:latin typeface="Consolas" pitchFamily="34" charset="0"/>
-                          <a:ea typeface="Consolas" pitchFamily="34" charset="-122"/>
-                          <a:cs typeface="Consolas" pitchFamily="34" charset="-120"/>
-                        </a:rPr>
-                        <a:t>11</a:t>
-                      </a:r>
-                      <a:endParaRPr lang="en-US" sz="900" dirty="0">
-                        <a:latin typeface="Consolas" charset="0"/>
-                        <a:ea typeface="Consolas" charset="0"/>
-                        <a:cs typeface="Consolas" charset="0"/>
-                      </a:endParaRPr>
-                    </a:p>
-                  </a:txBody>
-                  <a:tcPr marL="91440" marR="91440" marT="45720" marB="45720">
-                    <a:lnL w="3810" cap="flat" cmpd="sng" algn="ctr">
-                      <a:solidFill>
-                        <a:srgbClr val="30363D"/>
-                      </a:solidFill>
-                      <a:prstDash val="solid"/>
-                      <a:round/>
-                      <a:headEnd type="none" w="med" len="med"/>
-                      <a:tailEnd type="none" w="med" len="med"/>
-                    </a:lnL>
-                    <a:lnR w="3810" cap="flat" cmpd="sng" algn="ctr">
-                      <a:solidFill>
-                        <a:srgbClr val="30363D"/>
-                      </a:solidFill>
-                      <a:prstDash val="solid"/>
-                      <a:round/>
-                      <a:headEnd type="none" w="med" len="med"/>
-                      <a:tailEnd type="none" w="med" len="med"/>
-                    </a:lnR>
-                    <a:lnT w="3810" cap="flat" cmpd="sng" algn="ctr">
-                      <a:solidFill>
-                        <a:srgbClr val="30363D"/>
-                      </a:solidFill>
-                      <a:prstDash val="solid"/>
-                      <a:round/>
-                      <a:headEnd type="none" w="med" len="med"/>
-                      <a:tailEnd type="none" w="med" len="med"/>
-                    </a:lnT>
-                    <a:lnB w="3810" cap="flat" cmpd="sng" algn="ctr">
-                      <a:solidFill>
-                        <a:srgbClr val="30363D"/>
-                      </a:solidFill>
-                      <a:prstDash val="solid"/>
-                      <a:round/>
-                      <a:headEnd type="none" w="med" len="med"/>
-                      <a:tailEnd type="none" w="med" len="med"/>
-                    </a:lnB>
-                  </a:tcPr>
-                </a:tc>
-                <a:tc>
-                  <a:txBody>
-                    <a:bodyPr/>
-                    <a:lstStyle/>
-                    <a:p>
-                      <a:pPr indent="0" marL="0">
-                        <a:buNone/>
-                      </a:pPr>
-                      <a:r>
-                        <a:rPr lang="en-US" sz="900" dirty="0">
-                          <a:solidFill>
-                            <a:srgbClr val="E6EDF3"/>
-                          </a:solidFill>
-                          <a:latin typeface="Consolas" pitchFamily="34" charset="0"/>
-                          <a:ea typeface="Consolas" pitchFamily="34" charset="-122"/>
-                          <a:cs typeface="Consolas" pitchFamily="34" charset="-120"/>
-                        </a:rPr>
-                        <a:t>0.764</a:t>
-                      </a:r>
-                      <a:endParaRPr lang="en-US" sz="900" dirty="0">
-                        <a:latin typeface="Consolas" charset="0"/>
-                        <a:ea typeface="Consolas" charset="0"/>
-                        <a:cs typeface="Consolas" charset="0"/>
-                      </a:endParaRPr>
-                    </a:p>
-                  </a:txBody>
-                  <a:tcPr marL="91440" marR="91440" marT="45720" marB="45720">
-                    <a:lnL w="3810" cap="flat" cmpd="sng" algn="ctr">
-                      <a:solidFill>
-                        <a:srgbClr val="30363D"/>
-                      </a:solidFill>
-                      <a:prstDash val="solid"/>
-                      <a:round/>
-                      <a:headEnd type="none" w="med" len="med"/>
-                      <a:tailEnd type="none" w="med" len="med"/>
-                    </a:lnL>
-                    <a:lnR w="3810" cap="flat" cmpd="sng" algn="ctr">
-                      <a:solidFill>
-                        <a:srgbClr val="30363D"/>
-                      </a:solidFill>
-                      <a:prstDash val="solid"/>
-                      <a:round/>
-                      <a:headEnd type="none" w="med" len="med"/>
-                      <a:tailEnd type="none" w="med" len="med"/>
-                    </a:lnR>
-                    <a:lnT w="3810" cap="flat" cmpd="sng" algn="ctr">
-                      <a:solidFill>
-                        <a:srgbClr val="30363D"/>
-                      </a:solidFill>
-                      <a:prstDash val="solid"/>
-                      <a:round/>
-                      <a:headEnd type="none" w="med" len="med"/>
-                      <a:tailEnd type="none" w="med" len="med"/>
-                    </a:lnT>
-                    <a:lnB w="3810" cap="flat" cmpd="sng" algn="ctr">
-                      <a:solidFill>
-                        <a:srgbClr val="30363D"/>
-                      </a:solidFill>
-                      <a:prstDash val="solid"/>
-                      <a:round/>
-                      <a:headEnd type="none" w="med" len="med"/>
-                      <a:tailEnd type="none" w="med" len="med"/>
-                    </a:lnB>
-                  </a:tcPr>
-                </a:tc>
-                <a:tc>
-                  <a:txBody>
-                    <a:bodyPr/>
-                    <a:lstStyle/>
-                    <a:p>
-                      <a:pPr indent="0" marL="0">
-                        <a:buNone/>
-                      </a:pPr>
-                      <a:r>
-                        <a:rPr lang="en-US" sz="900" dirty="0">
-                          <a:solidFill>
-                            <a:srgbClr val="E6EDF3"/>
-                          </a:solidFill>
-                          <a:latin typeface="Consolas" pitchFamily="34" charset="0"/>
-                          <a:ea typeface="Consolas" pitchFamily="34" charset="-122"/>
-                          <a:cs typeface="Consolas" pitchFamily="34" charset="-120"/>
-                        </a:rPr>
-                        <a:t>0.733</a:t>
-                      </a:r>
-                      <a:endParaRPr lang="en-US" sz="900" dirty="0">
-                        <a:latin typeface="Consolas" charset="0"/>
-                        <a:ea typeface="Consolas" charset="0"/>
-                        <a:cs typeface="Consolas" charset="0"/>
-                      </a:endParaRPr>
-                    </a:p>
-                  </a:txBody>
-                  <a:tcPr marL="91440" marR="91440" marT="45720" marB="45720">
-                    <a:lnL w="3810" cap="flat" cmpd="sng" algn="ctr">
-                      <a:solidFill>
-                        <a:srgbClr val="30363D"/>
-                      </a:solidFill>
-                      <a:prstDash val="solid"/>
-                      <a:round/>
-                      <a:headEnd type="none" w="med" len="med"/>
-                      <a:tailEnd type="none" w="med" len="med"/>
-                    </a:lnL>
-                    <a:lnR w="3810" cap="flat" cmpd="sng" algn="ctr">
-                      <a:solidFill>
-                        <a:srgbClr val="30363D"/>
-                      </a:solidFill>
-                      <a:prstDash val="solid"/>
-                      <a:round/>
-                      <a:headEnd type="none" w="med" len="med"/>
-                      <a:tailEnd type="none" w="med" len="med"/>
-                    </a:lnR>
-                    <a:lnT w="3810" cap="flat" cmpd="sng" algn="ctr">
-                      <a:solidFill>
-                        <a:srgbClr val="30363D"/>
-                      </a:solidFill>
-                      <a:prstDash val="solid"/>
-                      <a:round/>
-                      <a:headEnd type="none" w="med" len="med"/>
-                      <a:tailEnd type="none" w="med" len="med"/>
-                    </a:lnT>
-                    <a:lnB w="3810" cap="flat" cmpd="sng" algn="ctr">
-                      <a:solidFill>
-                        <a:srgbClr val="30363D"/>
-                      </a:solidFill>
-                      <a:prstDash val="solid"/>
-                      <a:round/>
-                      <a:headEnd type="none" w="med" len="med"/>
-                      <a:tailEnd type="none" w="med" len="med"/>
-                    </a:lnB>
-                  </a:tcPr>
-                </a:tc>
-                <a:tc>
-                  <a:txBody>
-                    <a:bodyPr/>
-                    <a:lstStyle/>
-                    <a:p>
-                      <a:pPr indent="0" marL="0">
-                        <a:buNone/>
-                      </a:pPr>
-                      <a:r>
-                        <a:rPr lang="en-US" sz="900" dirty="0">
-                          <a:solidFill>
-                            <a:srgbClr val="E6EDF3"/>
-                          </a:solidFill>
-                          <a:latin typeface="Consolas" pitchFamily="34" charset="0"/>
-                          <a:ea typeface="Consolas" pitchFamily="34" charset="-122"/>
-                          <a:cs typeface="Consolas" pitchFamily="34" charset="-120"/>
-                        </a:rPr>
-                        <a:t>+3.1%</a:t>
-                      </a:r>
-                      <a:endParaRPr lang="en-US" sz="900" dirty="0">
-                        <a:latin typeface="Consolas" charset="0"/>
-                        <a:ea typeface="Consolas" charset="0"/>
-                        <a:cs typeface="Consolas" charset="0"/>
-                      </a:endParaRPr>
-                    </a:p>
-                  </a:txBody>
-                  <a:tcPr marL="91440" marR="91440" marT="45720" marB="45720">
-                    <a:lnL w="3810" cap="flat" cmpd="sng" algn="ctr">
-                      <a:solidFill>
-                        <a:srgbClr val="30363D"/>
-                      </a:solidFill>
-                      <a:prstDash val="solid"/>
-                      <a:round/>
-                      <a:headEnd type="none" w="med" len="med"/>
-                      <a:tailEnd type="none" w="med" len="med"/>
-                    </a:lnL>
-                    <a:lnR w="3810" cap="flat" cmpd="sng" algn="ctr">
-                      <a:solidFill>
-                        <a:srgbClr val="30363D"/>
-                      </a:solidFill>
-                      <a:prstDash val="solid"/>
-                      <a:round/>
-                      <a:headEnd type="none" w="med" len="med"/>
-                      <a:tailEnd type="none" w="med" len="med"/>
-                    </a:lnR>
-                    <a:lnT w="3810" cap="flat" cmpd="sng" algn="ctr">
-                      <a:solidFill>
-                        <a:srgbClr val="30363D"/>
-                      </a:solidFill>
-                      <a:prstDash val="solid"/>
-                      <a:round/>
-                      <a:headEnd type="none" w="med" len="med"/>
-                      <a:tailEnd type="none" w="med" len="med"/>
-                    </a:lnT>
-                    <a:lnB w="3810" cap="flat" cmpd="sng" algn="ctr">
-                      <a:solidFill>
-                        <a:srgbClr val="30363D"/>
-                      </a:solidFill>
-                      <a:prstDash val="solid"/>
-                      <a:round/>
-                      <a:headEnd type="none" w="med" len="med"/>
-                      <a:tailEnd type="none" w="med" len="med"/>
-                    </a:lnB>
-                  </a:tcPr>
-                </a:tc>
-              </a:tr>
-              <a:tr h="201168">
-                <a:tc>
-                  <a:txBody>
-                    <a:bodyPr/>
-                    <a:lstStyle/>
-                    <a:p>
-                      <a:pPr indent="0" marL="0">
-                        <a:buNone/>
-                      </a:pPr>
-                      <a:r>
-                        <a:rPr lang="en-US" sz="900" dirty="0">
-                          <a:solidFill>
-                            <a:srgbClr val="E6EDF3"/>
-                          </a:solidFill>
-                          <a:latin typeface="Consolas" pitchFamily="34" charset="0"/>
-                          <a:ea typeface="Consolas" pitchFamily="34" charset="-122"/>
-                          <a:cs typeface="Consolas" pitchFamily="34" charset="-120"/>
-                        </a:rPr>
-                        <a:t>12</a:t>
-                      </a:r>
-                      <a:endParaRPr lang="en-US" sz="900" dirty="0">
-                        <a:latin typeface="Consolas" charset="0"/>
-                        <a:ea typeface="Consolas" charset="0"/>
-                        <a:cs typeface="Consolas" charset="0"/>
-                      </a:endParaRPr>
-                    </a:p>
-                  </a:txBody>
-                  <a:tcPr marL="91440" marR="91440" marT="45720" marB="45720">
-                    <a:lnL w="3810" cap="flat" cmpd="sng" algn="ctr">
-                      <a:solidFill>
-                        <a:srgbClr val="30363D"/>
-                      </a:solidFill>
-                      <a:prstDash val="solid"/>
-                      <a:round/>
-                      <a:headEnd type="none" w="med" len="med"/>
-                      <a:tailEnd type="none" w="med" len="med"/>
-                    </a:lnL>
-                    <a:lnR w="3810" cap="flat" cmpd="sng" algn="ctr">
-                      <a:solidFill>
-                        <a:srgbClr val="30363D"/>
-                      </a:solidFill>
-                      <a:prstDash val="solid"/>
-                      <a:round/>
-                      <a:headEnd type="none" w="med" len="med"/>
-                      <a:tailEnd type="none" w="med" len="med"/>
-                    </a:lnR>
-                    <a:lnT w="3810" cap="flat" cmpd="sng" algn="ctr">
-                      <a:solidFill>
-                        <a:srgbClr val="30363D"/>
-                      </a:solidFill>
-                      <a:prstDash val="solid"/>
-                      <a:round/>
-                      <a:headEnd type="none" w="med" len="med"/>
-                      <a:tailEnd type="none" w="med" len="med"/>
-                    </a:lnT>
-                    <a:lnB w="3810" cap="flat" cmpd="sng" algn="ctr">
-                      <a:solidFill>
-                        <a:srgbClr val="30363D"/>
-                      </a:solidFill>
-                      <a:prstDash val="solid"/>
-                      <a:round/>
-                      <a:headEnd type="none" w="med" len="med"/>
-                      <a:tailEnd type="none" w="med" len="med"/>
-                    </a:lnB>
-                  </a:tcPr>
-                </a:tc>
-                <a:tc>
-                  <a:txBody>
-                    <a:bodyPr/>
-                    <a:lstStyle/>
-                    <a:p>
-                      <a:pPr indent="0" marL="0">
-                        <a:buNone/>
-                      </a:pPr>
-                      <a:r>
-                        <a:rPr lang="en-US" sz="900" dirty="0">
-                          <a:solidFill>
-                            <a:srgbClr val="E6EDF3"/>
-                          </a:solidFill>
-                          <a:latin typeface="Consolas" pitchFamily="34" charset="0"/>
-                          <a:ea typeface="Consolas" pitchFamily="34" charset="-122"/>
-                          <a:cs typeface="Consolas" pitchFamily="34" charset="-120"/>
-                        </a:rPr>
-                        <a:t>0.761</a:t>
-                      </a:r>
-                      <a:endParaRPr lang="en-US" sz="900" dirty="0">
-                        <a:latin typeface="Consolas" charset="0"/>
-                        <a:ea typeface="Consolas" charset="0"/>
-                        <a:cs typeface="Consolas" charset="0"/>
-                      </a:endParaRPr>
-                    </a:p>
-                  </a:txBody>
-                  <a:tcPr marL="91440" marR="91440" marT="45720" marB="45720">
-                    <a:lnL w="3810" cap="flat" cmpd="sng" algn="ctr">
-                      <a:solidFill>
-                        <a:srgbClr val="30363D"/>
-                      </a:solidFill>
-                      <a:prstDash val="solid"/>
-                      <a:round/>
-                      <a:headEnd type="none" w="med" len="med"/>
-                      <a:tailEnd type="none" w="med" len="med"/>
-                    </a:lnL>
-                    <a:lnR w="3810" cap="flat" cmpd="sng" algn="ctr">
-                      <a:solidFill>
-                        <a:srgbClr val="30363D"/>
-                      </a:solidFill>
-                      <a:prstDash val="solid"/>
-                      <a:round/>
-                      <a:headEnd type="none" w="med" len="med"/>
-                      <a:tailEnd type="none" w="med" len="med"/>
-                    </a:lnR>
-                    <a:lnT w="3810" cap="flat" cmpd="sng" algn="ctr">
-                      <a:solidFill>
-                        <a:srgbClr val="30363D"/>
-                      </a:solidFill>
-                      <a:prstDash val="solid"/>
-                      <a:round/>
-                      <a:headEnd type="none" w="med" len="med"/>
-                      <a:tailEnd type="none" w="med" len="med"/>
-                    </a:lnT>
-                    <a:lnB w="3810" cap="flat" cmpd="sng" algn="ctr">
-                      <a:solidFill>
-                        <a:srgbClr val="30363D"/>
-                      </a:solidFill>
-                      <a:prstDash val="solid"/>
-                      <a:round/>
-                      <a:headEnd type="none" w="med" len="med"/>
-                      <a:tailEnd type="none" w="med" len="med"/>
-                    </a:lnB>
-                  </a:tcPr>
-                </a:tc>
-                <a:tc>
-                  <a:txBody>
-                    <a:bodyPr/>
-                    <a:lstStyle/>
-                    <a:p>
-                      <a:pPr indent="0" marL="0">
-                        <a:buNone/>
-                      </a:pPr>
-                      <a:r>
-                        <a:rPr lang="en-US" sz="900" dirty="0">
-                          <a:solidFill>
-                            <a:srgbClr val="E6EDF3"/>
-                          </a:solidFill>
-                          <a:latin typeface="Consolas" pitchFamily="34" charset="0"/>
-                          <a:ea typeface="Consolas" pitchFamily="34" charset="-122"/>
-                          <a:cs typeface="Consolas" pitchFamily="34" charset="-120"/>
-                        </a:rPr>
-                        <a:t>0.800</a:t>
-                      </a:r>
-                      <a:endParaRPr lang="en-US" sz="900" dirty="0">
-                        <a:latin typeface="Consolas" charset="0"/>
-                        <a:ea typeface="Consolas" charset="0"/>
-                        <a:cs typeface="Consolas" charset="0"/>
-                      </a:endParaRPr>
-                    </a:p>
-                  </a:txBody>
-                  <a:tcPr marL="91440" marR="91440" marT="45720" marB="45720">
-                    <a:lnL w="3810" cap="flat" cmpd="sng" algn="ctr">
-                      <a:solidFill>
-                        <a:srgbClr val="30363D"/>
-                      </a:solidFill>
-                      <a:prstDash val="solid"/>
-                      <a:round/>
-                      <a:headEnd type="none" w="med" len="med"/>
-                      <a:tailEnd type="none" w="med" len="med"/>
-                    </a:lnL>
-                    <a:lnR w="3810" cap="flat" cmpd="sng" algn="ctr">
-                      <a:solidFill>
-                        <a:srgbClr val="30363D"/>
-                      </a:solidFill>
-                      <a:prstDash val="solid"/>
-                      <a:round/>
-                      <a:headEnd type="none" w="med" len="med"/>
-                      <a:tailEnd type="none" w="med" len="med"/>
-                    </a:lnR>
-                    <a:lnT w="3810" cap="flat" cmpd="sng" algn="ctr">
-                      <a:solidFill>
-                        <a:srgbClr val="30363D"/>
-                      </a:solidFill>
-                      <a:prstDash val="solid"/>
-                      <a:round/>
-                      <a:headEnd type="none" w="med" len="med"/>
-                      <a:tailEnd type="none" w="med" len="med"/>
-                    </a:lnT>
-                    <a:lnB w="3810" cap="flat" cmpd="sng" algn="ctr">
-                      <a:solidFill>
-                        <a:srgbClr val="30363D"/>
-                      </a:solidFill>
-                      <a:prstDash val="solid"/>
-                      <a:round/>
-                      <a:headEnd type="none" w="med" len="med"/>
-                      <a:tailEnd type="none" w="med" len="med"/>
-                    </a:lnB>
-                  </a:tcPr>
-                </a:tc>
-                <a:tc>
-                  <a:txBody>
-                    <a:bodyPr/>
-                    <a:lstStyle/>
-                    <a:p>
-                      <a:pPr indent="0" marL="0">
-                        <a:buNone/>
-                      </a:pPr>
-                      <a:r>
-                        <a:rPr lang="en-US" sz="900" dirty="0">
-                          <a:solidFill>
-                            <a:srgbClr val="E6EDF3"/>
-                          </a:solidFill>
-                          <a:latin typeface="Consolas" pitchFamily="34" charset="0"/>
-                          <a:ea typeface="Consolas" pitchFamily="34" charset="-122"/>
-                          <a:cs typeface="Consolas" pitchFamily="34" charset="-120"/>
-                        </a:rPr>
-                        <a:t>-3.9%</a:t>
-                      </a:r>
-                      <a:endParaRPr lang="en-US" sz="900" dirty="0">
-                        <a:latin typeface="Consolas" charset="0"/>
-                        <a:ea typeface="Consolas" charset="0"/>
-                        <a:cs typeface="Consolas" charset="0"/>
-                      </a:endParaRPr>
-                    </a:p>
-                  </a:txBody>
-                  <a:tcPr marL="91440" marR="91440" marT="45720" marB="45720">
-                    <a:lnL w="3810" cap="flat" cmpd="sng" algn="ctr">
-                      <a:solidFill>
-                        <a:srgbClr val="30363D"/>
-                      </a:solidFill>
-                      <a:prstDash val="solid"/>
-                      <a:round/>
-                      <a:headEnd type="none" w="med" len="med"/>
-                      <a:tailEnd type="none" w="med" len="med"/>
-                    </a:lnL>
-                    <a:lnR w="3810" cap="flat" cmpd="sng" algn="ctr">
-                      <a:solidFill>
-                        <a:srgbClr val="30363D"/>
-                      </a:solidFill>
-                      <a:prstDash val="solid"/>
-                      <a:round/>
-                      <a:headEnd type="none" w="med" len="med"/>
-                      <a:tailEnd type="none" w="med" len="med"/>
-                    </a:lnR>
-                    <a:lnT w="3810" cap="flat" cmpd="sng" algn="ctr">
-                      <a:solidFill>
-                        <a:srgbClr val="30363D"/>
-                      </a:solidFill>
-                      <a:prstDash val="solid"/>
-                      <a:round/>
-                      <a:headEnd type="none" w="med" len="med"/>
-                      <a:tailEnd type="none" w="med" len="med"/>
-                    </a:lnT>
-                    <a:lnB w="3810" cap="flat" cmpd="sng" algn="ctr">
-                      <a:solidFill>
-                        <a:srgbClr val="30363D"/>
-                      </a:solidFill>
-                      <a:prstDash val="solid"/>
-                      <a:round/>
-                      <a:headEnd type="none" w="med" len="med"/>
-                      <a:tailEnd type="none" w="med" len="med"/>
-                    </a:lnB>
-                  </a:tcPr>
-                </a:tc>
-              </a:tr>
-              <a:tr h="201168">
-                <a:tc>
-                  <a:txBody>
-                    <a:bodyPr/>
-                    <a:lstStyle/>
-                    <a:p>
-                      <a:pPr indent="0" marL="0">
-                        <a:buNone/>
-                      </a:pPr>
-                      <a:r>
-                        <a:rPr lang="en-US" sz="900" dirty="0">
-                          <a:solidFill>
-                            <a:srgbClr val="E6EDF3"/>
-                          </a:solidFill>
-                          <a:latin typeface="Consolas" pitchFamily="34" charset="0"/>
-                          <a:ea typeface="Consolas" pitchFamily="34" charset="-122"/>
-                          <a:cs typeface="Consolas" pitchFamily="34" charset="-120"/>
-                        </a:rPr>
-                        <a:t>13</a:t>
-                      </a:r>
-                      <a:endParaRPr lang="en-US" sz="900" dirty="0">
-                        <a:latin typeface="Consolas" charset="0"/>
-                        <a:ea typeface="Consolas" charset="0"/>
-                        <a:cs typeface="Consolas" charset="0"/>
-                      </a:endParaRPr>
-                    </a:p>
-                  </a:txBody>
-                  <a:tcPr marL="91440" marR="91440" marT="45720" marB="45720">
-                    <a:lnL w="3810" cap="flat" cmpd="sng" algn="ctr">
-                      <a:solidFill>
-                        <a:srgbClr val="30363D"/>
-                      </a:solidFill>
-                      <a:prstDash val="solid"/>
-                      <a:round/>
-                      <a:headEnd type="none" w="med" len="med"/>
-                      <a:tailEnd type="none" w="med" len="med"/>
-                    </a:lnL>
-                    <a:lnR w="3810" cap="flat" cmpd="sng" algn="ctr">
-                      <a:solidFill>
-                        <a:srgbClr val="30363D"/>
-                      </a:solidFill>
-                      <a:prstDash val="solid"/>
-                      <a:round/>
-                      <a:headEnd type="none" w="med" len="med"/>
-                      <a:tailEnd type="none" w="med" len="med"/>
-                    </a:lnR>
-                    <a:lnT w="3810" cap="flat" cmpd="sng" algn="ctr">
-                      <a:solidFill>
-                        <a:srgbClr val="30363D"/>
-                      </a:solidFill>
-                      <a:prstDash val="solid"/>
-                      <a:round/>
-                      <a:headEnd type="none" w="med" len="med"/>
-                      <a:tailEnd type="none" w="med" len="med"/>
-                    </a:lnT>
-                    <a:lnB w="3810" cap="flat" cmpd="sng" algn="ctr">
-                      <a:solidFill>
-                        <a:srgbClr val="30363D"/>
-                      </a:solidFill>
-                      <a:prstDash val="solid"/>
-                      <a:round/>
-                      <a:headEnd type="none" w="med" len="med"/>
-                      <a:tailEnd type="none" w="med" len="med"/>
-                    </a:lnB>
-                  </a:tcPr>
-                </a:tc>
-                <a:tc>
-                  <a:txBody>
-                    <a:bodyPr/>
-                    <a:lstStyle/>
-                    <a:p>
-                      <a:pPr indent="0" marL="0">
-                        <a:buNone/>
-                      </a:pPr>
-                      <a:r>
-                        <a:rPr lang="en-US" sz="900" dirty="0">
-                          <a:solidFill>
-                            <a:srgbClr val="E6EDF3"/>
-                          </a:solidFill>
-                          <a:latin typeface="Consolas" pitchFamily="34" charset="0"/>
-                          <a:ea typeface="Consolas" pitchFamily="34" charset="-122"/>
-                          <a:cs typeface="Consolas" pitchFamily="34" charset="-120"/>
-                        </a:rPr>
-                        <a:t>0.853</a:t>
-                      </a:r>
-                      <a:endParaRPr lang="en-US" sz="900" dirty="0">
-                        <a:latin typeface="Consolas" charset="0"/>
-                        <a:ea typeface="Consolas" charset="0"/>
-                        <a:cs typeface="Consolas" charset="0"/>
-                      </a:endParaRPr>
-                    </a:p>
-                  </a:txBody>
-                  <a:tcPr marL="91440" marR="91440" marT="45720" marB="45720">
-                    <a:lnL w="3810" cap="flat" cmpd="sng" algn="ctr">
-                      <a:solidFill>
-                        <a:srgbClr val="30363D"/>
-                      </a:solidFill>
-                      <a:prstDash val="solid"/>
-                      <a:round/>
-                      <a:headEnd type="none" w="med" len="med"/>
-                      <a:tailEnd type="none" w="med" len="med"/>
-                    </a:lnL>
-                    <a:lnR w="3810" cap="flat" cmpd="sng" algn="ctr">
-                      <a:solidFill>
-                        <a:srgbClr val="30363D"/>
-                      </a:solidFill>
-                      <a:prstDash val="solid"/>
-                      <a:round/>
-                      <a:headEnd type="none" w="med" len="med"/>
-                      <a:tailEnd type="none" w="med" len="med"/>
-                    </a:lnR>
-                    <a:lnT w="3810" cap="flat" cmpd="sng" algn="ctr">
-                      <a:solidFill>
-                        <a:srgbClr val="30363D"/>
-                      </a:solidFill>
-                      <a:prstDash val="solid"/>
-                      <a:round/>
-                      <a:headEnd type="none" w="med" len="med"/>
-                      <a:tailEnd type="none" w="med" len="med"/>
-                    </a:lnT>
-                    <a:lnB w="3810" cap="flat" cmpd="sng" algn="ctr">
-                      <a:solidFill>
-                        <a:srgbClr val="30363D"/>
-                      </a:solidFill>
-                      <a:prstDash val="solid"/>
-                      <a:round/>
-                      <a:headEnd type="none" w="med" len="med"/>
-                      <a:tailEnd type="none" w="med" len="med"/>
-                    </a:lnB>
-                  </a:tcPr>
-                </a:tc>
-                <a:tc>
-                  <a:txBody>
-                    <a:bodyPr/>
-                    <a:lstStyle/>
-                    <a:p>
-                      <a:pPr indent="0" marL="0">
-                        <a:buNone/>
-                      </a:pPr>
-                      <a:r>
-                        <a:rPr lang="en-US" sz="900" dirty="0">
-                          <a:solidFill>
-                            <a:srgbClr val="E6EDF3"/>
-                          </a:solidFill>
-                          <a:latin typeface="Consolas" pitchFamily="34" charset="0"/>
-                          <a:ea typeface="Consolas" pitchFamily="34" charset="-122"/>
-                          <a:cs typeface="Consolas" pitchFamily="34" charset="-120"/>
-                        </a:rPr>
-                        <a:t>0.867</a:t>
-                      </a:r>
-                      <a:endParaRPr lang="en-US" sz="900" dirty="0">
-                        <a:latin typeface="Consolas" charset="0"/>
-                        <a:ea typeface="Consolas" charset="0"/>
-                        <a:cs typeface="Consolas" charset="0"/>
-                      </a:endParaRPr>
-                    </a:p>
-                  </a:txBody>
-                  <a:tcPr marL="91440" marR="91440" marT="45720" marB="45720">
-                    <a:lnL w="3810" cap="flat" cmpd="sng" algn="ctr">
-                      <a:solidFill>
-                        <a:srgbClr val="30363D"/>
-                      </a:solidFill>
-                      <a:prstDash val="solid"/>
-                      <a:round/>
-                      <a:headEnd type="none" w="med" len="med"/>
-                      <a:tailEnd type="none" w="med" len="med"/>
-                    </a:lnL>
-                    <a:lnR w="3810" cap="flat" cmpd="sng" algn="ctr">
-                      <a:solidFill>
-                        <a:srgbClr val="30363D"/>
-                      </a:solidFill>
-                      <a:prstDash val="solid"/>
-                      <a:round/>
-                      <a:headEnd type="none" w="med" len="med"/>
-                      <a:tailEnd type="none" w="med" len="med"/>
-                    </a:lnR>
-                    <a:lnT w="3810" cap="flat" cmpd="sng" algn="ctr">
-                      <a:solidFill>
-                        <a:srgbClr val="30363D"/>
-                      </a:solidFill>
-                      <a:prstDash val="solid"/>
-                      <a:round/>
-                      <a:headEnd type="none" w="med" len="med"/>
-                      <a:tailEnd type="none" w="med" len="med"/>
-                    </a:lnT>
-                    <a:lnB w="3810" cap="flat" cmpd="sng" algn="ctr">
-                      <a:solidFill>
-                        <a:srgbClr val="30363D"/>
-                      </a:solidFill>
-                      <a:prstDash val="solid"/>
-                      <a:round/>
-                      <a:headEnd type="none" w="med" len="med"/>
-                      <a:tailEnd type="none" w="med" len="med"/>
-                    </a:lnB>
-                  </a:tcPr>
-                </a:tc>
-                <a:tc>
-                  <a:txBody>
-                    <a:bodyPr/>
-                    <a:lstStyle/>
-                    <a:p>
-                      <a:pPr indent="0" marL="0">
-                        <a:buNone/>
-                      </a:pPr>
-                      <a:r>
-                        <a:rPr lang="en-US" sz="900" dirty="0">
-                          <a:solidFill>
-                            <a:srgbClr val="E6EDF3"/>
-                          </a:solidFill>
-                          <a:latin typeface="Consolas" pitchFamily="34" charset="0"/>
-                          <a:ea typeface="Consolas" pitchFamily="34" charset="-122"/>
-                          <a:cs typeface="Consolas" pitchFamily="34" charset="-120"/>
-                        </a:rPr>
-                        <a:t>-1.4%</a:t>
-                      </a:r>
-                      <a:endParaRPr lang="en-US" sz="900" dirty="0">
-                        <a:latin typeface="Consolas" charset="0"/>
-                        <a:ea typeface="Consolas" charset="0"/>
-                        <a:cs typeface="Consolas" charset="0"/>
-                      </a:endParaRPr>
-                    </a:p>
-                  </a:txBody>
-                  <a:tcPr marL="91440" marR="91440" marT="45720" marB="45720">
-                    <a:lnL w="3810" cap="flat" cmpd="sng" algn="ctr">
-                      <a:solidFill>
-                        <a:srgbClr val="30363D"/>
-                      </a:solidFill>
-                      <a:prstDash val="solid"/>
-                      <a:round/>
-                      <a:headEnd type="none" w="med" len="med"/>
-                      <a:tailEnd type="none" w="med" len="med"/>
-                    </a:lnL>
-                    <a:lnR w="3810" cap="flat" cmpd="sng" algn="ctr">
-                      <a:solidFill>
-                        <a:srgbClr val="30363D"/>
-                      </a:solidFill>
-                      <a:prstDash val="solid"/>
-                      <a:round/>
-                      <a:headEnd type="none" w="med" len="med"/>
-                      <a:tailEnd type="none" w="med" len="med"/>
-                    </a:lnR>
-                    <a:lnT w="3810" cap="flat" cmpd="sng" algn="ctr">
-                      <a:solidFill>
-                        <a:srgbClr val="30363D"/>
-                      </a:solidFill>
-                      <a:prstDash val="solid"/>
-                      <a:round/>
-                      <a:headEnd type="none" w="med" len="med"/>
-                      <a:tailEnd type="none" w="med" len="med"/>
-                    </a:lnT>
-                    <a:lnB w="3810" cap="flat" cmpd="sng" algn="ctr">
-                      <a:solidFill>
-                        <a:srgbClr val="30363D"/>
-                      </a:solidFill>
-                      <a:prstDash val="solid"/>
-                      <a:round/>
-                      <a:headEnd type="none" w="med" len="med"/>
-                      <a:tailEnd type="none" w="med" len="med"/>
-                    </a:lnB>
-                  </a:tcPr>
-                </a:tc>
-              </a:tr>
-              <a:tr h="201168">
-                <a:tc>
-                  <a:txBody>
-                    <a:bodyPr/>
-                    <a:lstStyle/>
-                    <a:p>
-                      <a:pPr indent="0" marL="0">
-                        <a:buNone/>
-                      </a:pPr>
-                      <a:r>
-                        <a:rPr lang="en-US" sz="900" dirty="0">
-                          <a:solidFill>
-                            <a:srgbClr val="E6EDF3"/>
-                          </a:solidFill>
-                          <a:latin typeface="Consolas" pitchFamily="34" charset="0"/>
-                          <a:ea typeface="Consolas" pitchFamily="34" charset="-122"/>
-                          <a:cs typeface="Consolas" pitchFamily="34" charset="-120"/>
-                        </a:rPr>
-                        <a:t>14</a:t>
-                      </a:r>
-                      <a:endParaRPr lang="en-US" sz="900" dirty="0">
-                        <a:latin typeface="Consolas" charset="0"/>
-                        <a:ea typeface="Consolas" charset="0"/>
-                        <a:cs typeface="Consolas" charset="0"/>
-                      </a:endParaRPr>
-                    </a:p>
-                  </a:txBody>
-                  <a:tcPr marL="91440" marR="91440" marT="45720" marB="45720">
-                    <a:lnL w="3810" cap="flat" cmpd="sng" algn="ctr">
-                      <a:solidFill>
-                        <a:srgbClr val="30363D"/>
-                      </a:solidFill>
-                      <a:prstDash val="solid"/>
-                      <a:round/>
-                      <a:headEnd type="none" w="med" len="med"/>
-                      <a:tailEnd type="none" w="med" len="med"/>
-                    </a:lnL>
-                    <a:lnR w="3810" cap="flat" cmpd="sng" algn="ctr">
-                      <a:solidFill>
-                        <a:srgbClr val="30363D"/>
-                      </a:solidFill>
-                      <a:prstDash val="solid"/>
-                      <a:round/>
-                      <a:headEnd type="none" w="med" len="med"/>
-                      <a:tailEnd type="none" w="med" len="med"/>
-                    </a:lnR>
-                    <a:lnT w="3810" cap="flat" cmpd="sng" algn="ctr">
-                      <a:solidFill>
-                        <a:srgbClr val="30363D"/>
-                      </a:solidFill>
-                      <a:prstDash val="solid"/>
-                      <a:round/>
-                      <a:headEnd type="none" w="med" len="med"/>
-                      <a:tailEnd type="none" w="med" len="med"/>
-                    </a:lnT>
-                    <a:lnB w="3810" cap="flat" cmpd="sng" algn="ctr">
-                      <a:solidFill>
-                        <a:srgbClr val="30363D"/>
-                      </a:solidFill>
-                      <a:prstDash val="solid"/>
-                      <a:round/>
-                      <a:headEnd type="none" w="med" len="med"/>
-                      <a:tailEnd type="none" w="med" len="med"/>
-                    </a:lnB>
-                  </a:tcPr>
-                </a:tc>
-                <a:tc>
-                  <a:txBody>
-                    <a:bodyPr/>
-                    <a:lstStyle/>
-                    <a:p>
-                      <a:pPr indent="0" marL="0">
-                        <a:buNone/>
-                      </a:pPr>
-                      <a:r>
-                        <a:rPr lang="en-US" sz="900" dirty="0">
-                          <a:solidFill>
-                            <a:srgbClr val="E6EDF3"/>
-                          </a:solidFill>
-                          <a:latin typeface="Consolas" pitchFamily="34" charset="0"/>
-                          <a:ea typeface="Consolas" pitchFamily="34" charset="-122"/>
-                          <a:cs typeface="Consolas" pitchFamily="34" charset="-120"/>
-                        </a:rPr>
-                        <a:t>0.913</a:t>
-                      </a:r>
-                      <a:endParaRPr lang="en-US" sz="900" dirty="0">
-                        <a:latin typeface="Consolas" charset="0"/>
-                        <a:ea typeface="Consolas" charset="0"/>
-                        <a:cs typeface="Consolas" charset="0"/>
-                      </a:endParaRPr>
-                    </a:p>
-                  </a:txBody>
-                  <a:tcPr marL="91440" marR="91440" marT="45720" marB="45720">
-                    <a:lnL w="3810" cap="flat" cmpd="sng" algn="ctr">
-                      <a:solidFill>
-                        <a:srgbClr val="30363D"/>
-                      </a:solidFill>
-                      <a:prstDash val="solid"/>
-                      <a:round/>
-                      <a:headEnd type="none" w="med" len="med"/>
-                      <a:tailEnd type="none" w="med" len="med"/>
-                    </a:lnL>
-                    <a:lnR w="3810" cap="flat" cmpd="sng" algn="ctr">
-                      <a:solidFill>
-                        <a:srgbClr val="30363D"/>
-                      </a:solidFill>
-                      <a:prstDash val="solid"/>
-                      <a:round/>
-                      <a:headEnd type="none" w="med" len="med"/>
-                      <a:tailEnd type="none" w="med" len="med"/>
-                    </a:lnR>
-                    <a:lnT w="3810" cap="flat" cmpd="sng" algn="ctr">
-                      <a:solidFill>
-                        <a:srgbClr val="30363D"/>
-                      </a:solidFill>
-                      <a:prstDash val="solid"/>
-                      <a:round/>
-                      <a:headEnd type="none" w="med" len="med"/>
-                      <a:tailEnd type="none" w="med" len="med"/>
-                    </a:lnT>
-                    <a:lnB w="3810" cap="flat" cmpd="sng" algn="ctr">
-                      <a:solidFill>
-                        <a:srgbClr val="30363D"/>
-                      </a:solidFill>
-                      <a:prstDash val="solid"/>
-                      <a:round/>
-                      <a:headEnd type="none" w="med" len="med"/>
-                      <a:tailEnd type="none" w="med" len="med"/>
-                    </a:lnB>
-                  </a:tcPr>
-                </a:tc>
-                <a:tc>
-                  <a:txBody>
-                    <a:bodyPr/>
-                    <a:lstStyle/>
-                    <a:p>
-                      <a:pPr indent="0" marL="0">
-                        <a:buNone/>
-                      </a:pPr>
-                      <a:r>
-                        <a:rPr lang="en-US" sz="900" dirty="0">
-                          <a:solidFill>
-                            <a:srgbClr val="E6EDF3"/>
-                          </a:solidFill>
-                          <a:latin typeface="Consolas" pitchFamily="34" charset="0"/>
-                          <a:ea typeface="Consolas" pitchFamily="34" charset="-122"/>
-                          <a:cs typeface="Consolas" pitchFamily="34" charset="-120"/>
-                        </a:rPr>
-                        <a:t>0.933</a:t>
-                      </a:r>
-                      <a:endParaRPr lang="en-US" sz="900" dirty="0">
-                        <a:latin typeface="Consolas" charset="0"/>
-                        <a:ea typeface="Consolas" charset="0"/>
-                        <a:cs typeface="Consolas" charset="0"/>
-                      </a:endParaRPr>
-                    </a:p>
-                  </a:txBody>
-                  <a:tcPr marL="91440" marR="91440" marT="45720" marB="45720">
-                    <a:lnL w="3810" cap="flat" cmpd="sng" algn="ctr">
-                      <a:solidFill>
-                        <a:srgbClr val="30363D"/>
-                      </a:solidFill>
-                      <a:prstDash val="solid"/>
-                      <a:round/>
-                      <a:headEnd type="none" w="med" len="med"/>
-                      <a:tailEnd type="none" w="med" len="med"/>
-                    </a:lnL>
-                    <a:lnR w="3810" cap="flat" cmpd="sng" algn="ctr">
-                      <a:solidFill>
-                        <a:srgbClr val="30363D"/>
-                      </a:solidFill>
-                      <a:prstDash val="solid"/>
-                      <a:round/>
-                      <a:headEnd type="none" w="med" len="med"/>
-                      <a:tailEnd type="none" w="med" len="med"/>
-                    </a:lnR>
-                    <a:lnT w="3810" cap="flat" cmpd="sng" algn="ctr">
-                      <a:solidFill>
-                        <a:srgbClr val="30363D"/>
-                      </a:solidFill>
-                      <a:prstDash val="solid"/>
-                      <a:round/>
-                      <a:headEnd type="none" w="med" len="med"/>
-                      <a:tailEnd type="none" w="med" len="med"/>
-                    </a:lnT>
-                    <a:lnB w="3810" cap="flat" cmpd="sng" algn="ctr">
-                      <a:solidFill>
-                        <a:srgbClr val="30363D"/>
-                      </a:solidFill>
-                      <a:prstDash val="solid"/>
-                      <a:round/>
-                      <a:headEnd type="none" w="med" len="med"/>
-                      <a:tailEnd type="none" w="med" len="med"/>
-                    </a:lnB>
-                  </a:tcPr>
-                </a:tc>
-                <a:tc>
-                  <a:txBody>
-                    <a:bodyPr/>
-                    <a:lstStyle/>
-                    <a:p>
-                      <a:pPr indent="0" marL="0">
-                        <a:buNone/>
-                      </a:pPr>
-                      <a:r>
-                        <a:rPr lang="en-US" sz="900" dirty="0">
-                          <a:solidFill>
-                            <a:srgbClr val="E6EDF3"/>
-                          </a:solidFill>
-                          <a:latin typeface="Consolas" pitchFamily="34" charset="0"/>
-                          <a:ea typeface="Consolas" pitchFamily="34" charset="-122"/>
-                          <a:cs typeface="Consolas" pitchFamily="34" charset="-120"/>
-                        </a:rPr>
-                        <a:t>-2.1%</a:t>
-                      </a:r>
-                      <a:endParaRPr lang="en-US" sz="900" dirty="0">
-                        <a:latin typeface="Consolas" charset="0"/>
-                        <a:ea typeface="Consolas" charset="0"/>
-                        <a:cs typeface="Consolas" charset="0"/>
-                      </a:endParaRPr>
-                    </a:p>
-                  </a:txBody>
-                  <a:tcPr marL="91440" marR="91440" marT="45720" marB="45720">
-                    <a:lnL w="3810" cap="flat" cmpd="sng" algn="ctr">
-                      <a:solidFill>
-                        <a:srgbClr val="30363D"/>
-                      </a:solidFill>
-                      <a:prstDash val="solid"/>
-                      <a:round/>
-                      <a:headEnd type="none" w="med" len="med"/>
-                      <a:tailEnd type="none" w="med" len="med"/>
-                    </a:lnL>
-                    <a:lnR w="3810" cap="flat" cmpd="sng" algn="ctr">
-                      <a:solidFill>
-                        <a:srgbClr val="30363D"/>
-                      </a:solidFill>
-                      <a:prstDash val="solid"/>
-                      <a:round/>
-                      <a:headEnd type="none" w="med" len="med"/>
-                      <a:tailEnd type="none" w="med" len="med"/>
-                    </a:lnR>
-                    <a:lnT w="3810" cap="flat" cmpd="sng" algn="ctr">
-                      <a:solidFill>
-                        <a:srgbClr val="30363D"/>
-                      </a:solidFill>
-                      <a:prstDash val="solid"/>
-                      <a:round/>
-                      <a:headEnd type="none" w="med" len="med"/>
-                      <a:tailEnd type="none" w="med" len="med"/>
-                    </a:lnT>
-                    <a:lnB w="3810" cap="flat" cmpd="sng" algn="ctr">
-                      <a:solidFill>
-                        <a:srgbClr val="30363D"/>
-                      </a:solidFill>
-                      <a:prstDash val="solid"/>
-                      <a:round/>
-                      <a:headEnd type="none" w="med" len="med"/>
-                      <a:tailEnd type="none" w="med" len="med"/>
-                    </a:lnB>
-                  </a:tcPr>
-                </a:tc>
-              </a:tr>
-              <a:tr h="201168">
-                <a:tc>
-                  <a:txBody>
-                    <a:bodyPr/>
-                    <a:lstStyle/>
-                    <a:p>
-                      <a:pPr indent="0" marL="0">
-                        <a:buNone/>
-                      </a:pPr>
-                      <a:r>
-                        <a:rPr lang="en-US" sz="900" dirty="0">
-                          <a:solidFill>
-                            <a:srgbClr val="E6EDF3"/>
-                          </a:solidFill>
-                          <a:latin typeface="Consolas" pitchFamily="34" charset="0"/>
-                          <a:ea typeface="Consolas" pitchFamily="34" charset="-122"/>
-                          <a:cs typeface="Consolas" pitchFamily="34" charset="-120"/>
-                        </a:rPr>
-                        <a:t>15</a:t>
-                      </a:r>
-                      <a:endParaRPr lang="en-US" sz="900" dirty="0">
-                        <a:latin typeface="Consolas" charset="0"/>
-                        <a:ea typeface="Consolas" charset="0"/>
-                        <a:cs typeface="Consolas" charset="0"/>
-                      </a:endParaRPr>
-                    </a:p>
-                  </a:txBody>
-                  <a:tcPr marL="91440" marR="91440" marT="45720" marB="45720">
-                    <a:lnL w="3810" cap="flat" cmpd="sng" algn="ctr">
-                      <a:solidFill>
-                        <a:srgbClr val="30363D"/>
-                      </a:solidFill>
-                      <a:prstDash val="solid"/>
-                      <a:round/>
-                      <a:headEnd type="none" w="med" len="med"/>
-                      <a:tailEnd type="none" w="med" len="med"/>
-                    </a:lnL>
-                    <a:lnR w="3810" cap="flat" cmpd="sng" algn="ctr">
-                      <a:solidFill>
-                        <a:srgbClr val="30363D"/>
-                      </a:solidFill>
-                      <a:prstDash val="solid"/>
-                      <a:round/>
-                      <a:headEnd type="none" w="med" len="med"/>
-                      <a:tailEnd type="none" w="med" len="med"/>
-                    </a:lnR>
-                    <a:lnT w="3810" cap="flat" cmpd="sng" algn="ctr">
-                      <a:solidFill>
-                        <a:srgbClr val="30363D"/>
-                      </a:solidFill>
-                      <a:prstDash val="solid"/>
-                      <a:round/>
-                      <a:headEnd type="none" w="med" len="med"/>
-                      <a:tailEnd type="none" w="med" len="med"/>
-                    </a:lnT>
-                    <a:lnB w="3810" cap="flat" cmpd="sng" algn="ctr">
-                      <a:solidFill>
-                        <a:srgbClr val="30363D"/>
-                      </a:solidFill>
-                      <a:prstDash val="solid"/>
-                      <a:round/>
-                      <a:headEnd type="none" w="med" len="med"/>
-                      <a:tailEnd type="none" w="med" len="med"/>
-                    </a:lnB>
-                  </a:tcPr>
-                </a:tc>
-                <a:tc>
-                  <a:txBody>
-                    <a:bodyPr/>
-                    <a:lstStyle/>
-                    <a:p>
-                      <a:pPr indent="0" marL="0">
-                        <a:buNone/>
-                      </a:pPr>
-                      <a:r>
-                        <a:rPr lang="en-US" sz="900" dirty="0">
-                          <a:solidFill>
-                            <a:srgbClr val="E6EDF3"/>
-                          </a:solidFill>
-                          <a:latin typeface="Consolas" pitchFamily="34" charset="0"/>
-                          <a:ea typeface="Consolas" pitchFamily="34" charset="-122"/>
-                          <a:cs typeface="Consolas" pitchFamily="34" charset="-120"/>
-                        </a:rPr>
-                        <a:t>1.000</a:t>
-                      </a:r>
-                      <a:endParaRPr lang="en-US" sz="900" dirty="0">
-                        <a:latin typeface="Consolas" charset="0"/>
-                        <a:ea typeface="Consolas" charset="0"/>
-                        <a:cs typeface="Consolas" charset="0"/>
-                      </a:endParaRPr>
-                    </a:p>
-                  </a:txBody>
-                  <a:tcPr marL="91440" marR="91440" marT="45720" marB="45720">
-                    <a:lnL w="3810" cap="flat" cmpd="sng" algn="ctr">
-                      <a:solidFill>
-                        <a:srgbClr val="30363D"/>
-                      </a:solidFill>
-                      <a:prstDash val="solid"/>
-                      <a:round/>
-                      <a:headEnd type="none" w="med" len="med"/>
-                      <a:tailEnd type="none" w="med" len="med"/>
-                    </a:lnL>
-                    <a:lnR w="3810" cap="flat" cmpd="sng" algn="ctr">
-                      <a:solidFill>
-                        <a:srgbClr val="30363D"/>
-                      </a:solidFill>
-                      <a:prstDash val="solid"/>
-                      <a:round/>
-                      <a:headEnd type="none" w="med" len="med"/>
-                      <a:tailEnd type="none" w="med" len="med"/>
-                    </a:lnR>
-                    <a:lnT w="3810" cap="flat" cmpd="sng" algn="ctr">
-                      <a:solidFill>
-                        <a:srgbClr val="30363D"/>
-                      </a:solidFill>
-                      <a:prstDash val="solid"/>
-                      <a:round/>
-                      <a:headEnd type="none" w="med" len="med"/>
-                      <a:tailEnd type="none" w="med" len="med"/>
-                    </a:lnT>
-                    <a:lnB w="3810" cap="flat" cmpd="sng" algn="ctr">
-                      <a:solidFill>
-                        <a:srgbClr val="30363D"/>
-                      </a:solidFill>
-                      <a:prstDash val="solid"/>
-                      <a:round/>
-                      <a:headEnd type="none" w="med" len="med"/>
-                      <a:tailEnd type="none" w="med" len="med"/>
-                    </a:lnB>
-                  </a:tcPr>
-                </a:tc>
-                <a:tc>
-                  <a:txBody>
-                    <a:bodyPr/>
-                    <a:lstStyle/>
-                    <a:p>
-                      <a:pPr indent="0" marL="0">
-                        <a:buNone/>
-                      </a:pPr>
-                      <a:r>
-                        <a:rPr lang="en-US" sz="900" dirty="0">
-                          <a:solidFill>
-                            <a:srgbClr val="E6EDF3"/>
-                          </a:solidFill>
-                          <a:latin typeface="Consolas" pitchFamily="34" charset="0"/>
-                          <a:ea typeface="Consolas" pitchFamily="34" charset="-122"/>
-                          <a:cs typeface="Consolas" pitchFamily="34" charset="-120"/>
-                        </a:rPr>
-                        <a:t>1.000</a:t>
-                      </a:r>
-                      <a:endParaRPr lang="en-US" sz="900" dirty="0">
-                        <a:latin typeface="Consolas" charset="0"/>
-                        <a:ea typeface="Consolas" charset="0"/>
-                        <a:cs typeface="Consolas" charset="0"/>
-                      </a:endParaRPr>
-                    </a:p>
-                  </a:txBody>
-                  <a:tcPr marL="91440" marR="91440" marT="45720" marB="45720">
-                    <a:lnL w="3810" cap="flat" cmpd="sng" algn="ctr">
-                      <a:solidFill>
-                        <a:srgbClr val="30363D"/>
-                      </a:solidFill>
-                      <a:prstDash val="solid"/>
-                      <a:round/>
-                      <a:headEnd type="none" w="med" len="med"/>
-                      <a:tailEnd type="none" w="med" len="med"/>
-                    </a:lnL>
-                    <a:lnR w="3810" cap="flat" cmpd="sng" algn="ctr">
-                      <a:solidFill>
-                        <a:srgbClr val="30363D"/>
-                      </a:solidFill>
-                      <a:prstDash val="solid"/>
-                      <a:round/>
-                      <a:headEnd type="none" w="med" len="med"/>
-                      <a:tailEnd type="none" w="med" len="med"/>
-                    </a:lnR>
-                    <a:lnT w="3810" cap="flat" cmpd="sng" algn="ctr">
-                      <a:solidFill>
-                        <a:srgbClr val="30363D"/>
-                      </a:solidFill>
-                      <a:prstDash val="solid"/>
-                      <a:round/>
-                      <a:headEnd type="none" w="med" len="med"/>
-                      <a:tailEnd type="none" w="med" len="med"/>
-                    </a:lnT>
-                    <a:lnB w="3810" cap="flat" cmpd="sng" algn="ctr">
-                      <a:solidFill>
-                        <a:srgbClr val="30363D"/>
-                      </a:solidFill>
-                      <a:prstDash val="solid"/>
-                      <a:round/>
-                      <a:headEnd type="none" w="med" len="med"/>
-                      <a:tailEnd type="none" w="med" len="med"/>
-                    </a:lnB>
-                  </a:tcPr>
-                </a:tc>
-                <a:tc>
-                  <a:txBody>
-                    <a:bodyPr/>
-                    <a:lstStyle/>
-                    <a:p>
-                      <a:pPr indent="0" marL="0">
-                        <a:buNone/>
-                      </a:pPr>
-                      <a:r>
-                        <a:rPr lang="en-US" sz="900" dirty="0">
-                          <a:solidFill>
-                            <a:srgbClr val="E6EDF3"/>
-                          </a:solidFill>
-                          <a:latin typeface="Consolas" pitchFamily="34" charset="0"/>
-                          <a:ea typeface="Consolas" pitchFamily="34" charset="-122"/>
-                          <a:cs typeface="Consolas" pitchFamily="34" charset="-120"/>
-                        </a:rPr>
-                        <a:t>+0.0%</a:t>
-                      </a:r>
-                      <a:endParaRPr lang="en-US" sz="900" dirty="0">
-                        <a:latin typeface="Consolas" charset="0"/>
-                        <a:ea typeface="Consolas" charset="0"/>
-                        <a:cs typeface="Consolas" charset="0"/>
-                      </a:endParaRPr>
-                    </a:p>
-                  </a:txBody>
-                  <a:tcPr marL="91440" marR="91440" marT="45720" marB="45720">
-                    <a:lnL w="3810" cap="flat" cmpd="sng" algn="ctr">
-                      <a:solidFill>
-                        <a:srgbClr val="30363D"/>
-                      </a:solidFill>
-                      <a:prstDash val="solid"/>
-                      <a:round/>
-                      <a:headEnd type="none" w="med" len="med"/>
-                      <a:tailEnd type="none" w="med" len="med"/>
-                    </a:lnL>
-                    <a:lnR w="3810" cap="flat" cmpd="sng" algn="ctr">
-                      <a:solidFill>
-                        <a:srgbClr val="30363D"/>
-                      </a:solidFill>
-                      <a:prstDash val="solid"/>
-                      <a:round/>
-                      <a:headEnd type="none" w="med" len="med"/>
-                      <a:tailEnd type="none" w="med" len="med"/>
-                    </a:lnR>
-                    <a:lnT w="3810" cap="flat" cmpd="sng" algn="ctr">
-                      <a:solidFill>
-                        <a:srgbClr val="30363D"/>
-                      </a:solidFill>
-                      <a:prstDash val="solid"/>
-                      <a:round/>
-                      <a:headEnd type="none" w="med" len="med"/>
-                      <a:tailEnd type="none" w="med" len="med"/>
-                    </a:lnT>
-                    <a:lnB w="3810" cap="flat" cmpd="sng" algn="ctr">
-                      <a:solidFill>
-                        <a:srgbClr val="30363D"/>
-                      </a:solidFill>
-                      <a:prstDash val="solid"/>
-                      <a:round/>
-                      <a:headEnd type="none" w="med" len="med"/>
-                      <a:tailEnd type="none" w="med" len="med"/>
-                    </a:lnB>
-                  </a:tcPr>
-                </a:tc>
-              </a:tr>
-            </a:tbl>
-          </a:graphicData>
-        </a:graphic>
-      </p:graphicFrame>
-      <p:sp>
-        <p:nvSpPr>
-          <p:cNvPr id="9" name="Text 6"/>
-          <p:cNvSpPr/>
-          <p:nvPr/>
-        </p:nvSpPr>
-        <p:spPr>
-          <a:xfrm>
-            <a:off x="4937760" y="4343400"/>
-            <a:ext cx="3840480" cy="182880"/>
-          </a:xfrm>
-          <a:prstGeom prst="rect">
-            <a:avLst/>
-          </a:prstGeom>
-          <a:noFill/>
-          <a:ln/>
-        </p:spPr>
-        <p:txBody>
-          <a:bodyPr wrap="square" lIns="0" tIns="0" rIns="0" bIns="0" rtlCol="0" anchor="ctr"/>
-          <a:lstStyle/>
-          <a:p>
-            <a:pPr indent="0" marL="0">
-              <a:buNone/>
-            </a:pPr>
-            <a:r>
-              <a:rPr lang="en-US" sz="900" i="1" dirty="0">
-                <a:solidFill>
-                  <a:srgbClr val="F78166"/>
-                </a:solidFill>
-                <a:latin typeface="Calibri" pitchFamily="34" charset="0"/>
-                <a:ea typeface="Calibri" pitchFamily="34" charset="-122"/>
-                <a:cs typeface="Calibri" pitchFamily="34" charset="-120"/>
-              </a:rPr>
-              <a:t>← Non-monotonic pairs highlighted</a:t>
-            </a:r>
-            <a:endParaRPr lang="en-US" sz="900" dirty="0"/>
+            <a:endParaRPr lang="en-US" sz="1100" dirty="0"/>
           </a:p>
         </p:txBody>
       </p:sp>
@@ -8002,9 +3756,9 @@
 </p:sld>
 </file>
 
-<file path=ppt/slides/slide5.xml><?xml version="1.0" encoding="utf-8"?>
+<file path=ppt/slides/slide6.xml><?xml version="1.0" encoding="utf-8"?>
 <p:sld xmlns:a="http://schemas.openxmlformats.org/drawingml/2006/main" xmlns:r="http://schemas.openxmlformats.org/officeDocument/2006/relationships" xmlns:p="http://schemas.openxmlformats.org/presentationml/2006/main">
-  <p:cSld name="Slide 5">
+  <p:cSld name="Slide 6">
     <p:bg>
       <p:bgPr>
         <a:solidFill>
@@ -8087,7 +3841,7 @@
       </p:sp>
       <p:graphicFrame>
         <p:nvGraphicFramePr>
-          <p:cNvPr id="6" name="Table 0"/>
+          <p:cNvPr id="7" name="Table 0"/>
           <p:cNvGraphicFramePr>
             <a:graphicFrameLocks noGrp="1"/>
           </p:cNvGraphicFramePr>
@@ -11776,221 +7530,33 @@
           </a:graphicData>
         </a:graphic>
       </p:graphicFrame>
-      <p:sp>
-        <p:nvSpPr>
-          <p:cNvPr id="5" name="Shape 2"/>
-          <p:cNvSpPr/>
+      <p:pic>
+        <p:nvPicPr>
+          <p:cNvPr id="5" name="Image 0" descr="slide_plots/linearity_optimized.png">    </p:cNvPr>
+          <p:cNvPicPr>
+            <a:picLocks noChangeAspect="1"/>
+          </p:cNvPicPr>
           <p:nvPr/>
-        </p:nvSpPr>
+        </p:nvPicPr>
+        <p:blipFill>
+          <a:blip r:embed="rId1"/>
+          <a:stretch>
+            <a:fillRect/>
+          </a:stretch>
+        </p:blipFill>
         <p:spPr>
           <a:xfrm>
-            <a:off x="5852160" y="822960"/>
-            <a:ext cx="2926080" cy="2286000"/>
-          </a:xfrm>
-          <a:prstGeom prst="roundRect">
-            <a:avLst>
-              <a:gd name="adj" fmla="val 4000"/>
-            </a:avLst>
-          </a:prstGeom>
-          <a:solidFill>
-            <a:srgbClr val="161B22"/>
-          </a:solidFill>
-          <a:ln w="12700">
-            <a:solidFill>
-              <a:srgbClr val="30363D"/>
-            </a:solidFill>
-            <a:prstDash val="solid"/>
-          </a:ln>
-        </p:spPr>
-      </p:sp>
-      <p:sp>
-        <p:nvSpPr>
-          <p:cNvPr id="6" name="Text 3"/>
-          <p:cNvSpPr/>
-          <p:nvPr/>
-        </p:nvSpPr>
-        <p:spPr>
-          <a:xfrm>
-            <a:off x="6035040" y="914400"/>
-            <a:ext cx="2560320" cy="274320"/>
+            <a:off x="5303520" y="731520"/>
+            <a:ext cx="3657600" cy="2743200"/>
           </a:xfrm>
           <a:prstGeom prst="rect">
             <a:avLst/>
           </a:prstGeom>
-          <a:noFill/>
-          <a:ln/>
         </p:spPr>
-        <p:txBody>
-          <a:bodyPr wrap="square" lIns="0" tIns="0" rIns="0" bIns="0" rtlCol="0" anchor="ctr"/>
-          <a:lstStyle/>
-          <a:p>
-            <a:pPr indent="0" marL="0">
-              <a:buNone/>
-            </a:pPr>
-            <a:r>
-              <a:rPr lang="en-US" sz="1400" b="1" dirty="0">
-                <a:solidFill>
-                  <a:srgbClr val="3FB950"/>
-                </a:solidFill>
-                <a:latin typeface="Calibri" pitchFamily="34" charset="0"/>
-                <a:ea typeface="Calibri" pitchFamily="34" charset="-122"/>
-                <a:cs typeface="Calibri" pitchFamily="34" charset="-120"/>
-              </a:rPr>
-              <a:t>Key Insight</a:t>
-            </a:r>
-            <a:endParaRPr lang="en-US" sz="1400" dirty="0"/>
-          </a:p>
-        </p:txBody>
-      </p:sp>
+      </p:pic>
       <p:sp>
         <p:nvSpPr>
-          <p:cNvPr id="7" name="Text 4"/>
-          <p:cNvSpPr/>
-          <p:nvPr/>
-        </p:nvSpPr>
-        <p:spPr>
-          <a:xfrm>
-            <a:off x="6035040" y="1234440"/>
-            <a:ext cx="2560320" cy="1737360"/>
-          </a:xfrm>
-          <a:prstGeom prst="rect">
-            <a:avLst/>
-          </a:prstGeom>
-          <a:noFill/>
-          <a:ln/>
-        </p:spPr>
-        <p:txBody>
-          <a:bodyPr wrap="square" lIns="0" tIns="0" rIns="0" bIns="0" rtlCol="0" anchor="ctr"/>
-          <a:lstStyle/>
-          <a:p>
-            <a:pPr indent="0" marL="0">
-              <a:buNone/>
-            </a:pPr>
-            <a:r>
-              <a:rPr lang="en-US" sz="1200" b="1" dirty="0">
-                <a:solidFill>
-                  <a:srgbClr val="E6EDF3"/>
-                </a:solidFill>
-                <a:latin typeface="Calibri" pitchFamily="34" charset="0"/>
-                <a:ea typeface="Calibri" pitchFamily="34" charset="-122"/>
-                <a:cs typeface="Calibri" pitchFamily="34" charset="-120"/>
-              </a:rPr>
-              <a:t>Only B2 and B3 needed
-adjustment
-</a:t>
-            </a:r>
-            <a:endParaRPr lang="en-US" sz="1200" dirty="0"/>
-          </a:p>
-          <a:p>
-            <a:pPr indent="0" marL="0">
-              <a:buNone/>
-            </a:pPr>
-            <a:r>
-              <a:rPr lang="en-US" sz="1100" dirty="0">
-                <a:solidFill>
-                  <a:srgbClr val="E6EDF3"/>
-                </a:solidFill>
-                <a:latin typeface="Calibri" pitchFamily="34" charset="0"/>
-                <a:ea typeface="Calibri" pitchFamily="34" charset="-122"/>
-                <a:cs typeface="Calibri" pitchFamily="34" charset="-120"/>
-              </a:rPr>
-              <a:t>B0, B1 unchanged at 1, 2
-</a:t>
-            </a:r>
-            <a:endParaRPr lang="en-US" sz="1200" dirty="0"/>
-          </a:p>
-          <a:p>
-            <a:pPr indent="0" marL="0">
-              <a:buNone/>
-            </a:pPr>
-            <a:r>
-              <a:rPr lang="en-US" sz="1100" dirty="0">
-                <a:solidFill>
-                  <a:srgbClr val="F78166"/>
-                </a:solidFill>
-                <a:latin typeface="Consolas" pitchFamily="34" charset="0"/>
-                <a:ea typeface="Consolas" pitchFamily="34" charset="-122"/>
-                <a:cs typeface="Consolas" pitchFamily="34" charset="-120"/>
-              </a:rPr>
-              <a:t>B2: 4.00 → 5.02 (+26%)
-</a:t>
-            </a:r>
-            <a:endParaRPr lang="en-US" sz="1200" dirty="0"/>
-          </a:p>
-          <a:p>
-            <a:pPr indent="0" marL="0">
-              <a:buNone/>
-            </a:pPr>
-            <a:r>
-              <a:rPr lang="en-US" sz="1100" dirty="0">
-                <a:solidFill>
-                  <a:srgbClr val="F78166"/>
-                </a:solidFill>
-                <a:latin typeface="Consolas" pitchFamily="34" charset="0"/>
-                <a:ea typeface="Consolas" pitchFamily="34" charset="-122"/>
-                <a:cs typeface="Consolas" pitchFamily="34" charset="-120"/>
-              </a:rPr>
-              <a:t>B3: 8.00 → 10.19 (+27%)
-</a:t>
-            </a:r>
-            <a:endParaRPr lang="en-US" sz="1200" dirty="0"/>
-          </a:p>
-          <a:p>
-            <a:pPr indent="0" marL="0">
-              <a:buNone/>
-            </a:pPr>
-            <a:r>
-              <a:rPr lang="en-US" sz="1000" dirty="0">
-                <a:solidFill>
-                  <a:srgbClr val="8B949E"/>
-                </a:solidFill>
-                <a:latin typeface="Calibri" pitchFamily="34" charset="0"/>
-                <a:ea typeface="Calibri" pitchFamily="34" charset="-122"/>
-                <a:cs typeface="Calibri" pitchFamily="34" charset="-120"/>
-              </a:rPr>
-              <a:t>Compensates for</a:t>
-            </a:r>
-            <a:endParaRPr lang="en-US" sz="1200" dirty="0"/>
-          </a:p>
-          <a:p>
-            <a:pPr indent="0" marL="0">
-              <a:buNone/>
-            </a:pPr>
-            <a:r>
-              <a:rPr lang="en-US" sz="1000" dirty="0">
-                <a:solidFill>
-                  <a:srgbClr val="8B949E"/>
-                </a:solidFill>
-                <a:latin typeface="Calibri" pitchFamily="34" charset="0"/>
-                <a:ea typeface="Calibri" pitchFamily="34" charset="-122"/>
-                <a:cs typeface="Calibri" pitchFamily="34" charset="-120"/>
-              </a:rPr>
-              <a:t>brightness-per-µs decay</a:t>
-            </a:r>
-            <a:endParaRPr lang="en-US" sz="1200" dirty="0"/>
-          </a:p>
-          <a:p>
-            <a:pPr indent="0" marL="0">
-              <a:buNone/>
-            </a:pPr>
-            <a:r>
-              <a:rPr lang="en-US" sz="1000" dirty="0">
-                <a:solidFill>
-                  <a:srgbClr val="8B949E"/>
-                </a:solidFill>
-                <a:latin typeface="Calibri" pitchFamily="34" charset="0"/>
-                <a:ea typeface="Calibri" pitchFamily="34" charset="-122"/>
-                <a:cs typeface="Calibri" pitchFamily="34" charset="-120"/>
-              </a:rPr>
-              <a:t>in longer bit-planes</a:t>
-            </a:r>
-            <a:endParaRPr lang="en-US" sz="1200" dirty="0"/>
-          </a:p>
-        </p:txBody>
-      </p:sp>
-      <p:sp>
-        <p:nvSpPr>
-          <p:cNvPr id="8" name="Text 5"/>
+          <p:cNvPr id="6" name="Text 2"/>
           <p:cNvSpPr/>
           <p:nvPr/>
         </p:nvSpPr>
@@ -12029,7 +7595,7 @@
       </p:sp>
       <p:graphicFrame>
         <p:nvGraphicFramePr>
-          <p:cNvPr id="11" name="Table 1"/>
+          <p:cNvPr id="13" name="Table 1"/>
           <p:cNvGraphicFramePr>
             <a:graphicFrameLocks noGrp="1"/>
           </p:cNvGraphicFramePr>
@@ -15395,7 +10961,7 @@
       </p:graphicFrame>
       <p:sp>
         <p:nvSpPr>
-          <p:cNvPr id="10" name="Text 6"/>
+          <p:cNvPr id="8" name="Text 3"/>
           <p:cNvSpPr/>
           <p:nvPr/>
         </p:nvSpPr>
@@ -15434,7 +11000,7 @@
       </p:sp>
       <p:sp>
         <p:nvSpPr>
-          <p:cNvPr id="11" name="Text 7"/>
+          <p:cNvPr id="9" name="Text 4"/>
           <p:cNvSpPr/>
           <p:nvPr/>
         </p:nvSpPr>
@@ -15479,9 +11045,9 @@
 </p:sld>
 </file>
 
-<file path=ppt/slides/slide6.xml><?xml version="1.0" encoding="utf-8"?>
+<file path=ppt/slides/slide7.xml><?xml version="1.0" encoding="utf-8"?>
 <p:sld xmlns:a="http://schemas.openxmlformats.org/drawingml/2006/main" xmlns:r="http://schemas.openxmlformats.org/officeDocument/2006/relationships" xmlns:p="http://schemas.openxmlformats.org/presentationml/2006/main">
-  <p:cSld name="Slide 6">
+  <p:cSld name="Slide 7">
     <p:bg>
       <p:bgPr>
         <a:solidFill>
@@ -15564,7 +11130,7 @@
       </p:sp>
       <p:graphicFrame>
         <p:nvGraphicFramePr>
-          <p:cNvPr id="7" name="Table 0"/>
+          <p:cNvPr id="8" name="Table 0"/>
           <p:cNvGraphicFramePr>
             <a:graphicFrameLocks noGrp="1"/>
           </p:cNvGraphicFramePr>
@@ -18130,9 +13696,9 @@
 </p:sld>
 </file>
 
-<file path=ppt/slides/slide7.xml><?xml version="1.0" encoding="utf-8"?>
+<file path=ppt/slides/slide8.xml><?xml version="1.0" encoding="utf-8"?>
 <p:sld xmlns:a="http://schemas.openxmlformats.org/drawingml/2006/main" xmlns:r="http://schemas.openxmlformats.org/officeDocument/2006/relationships" xmlns:p="http://schemas.openxmlformats.org/presentationml/2006/main">
-  <p:cSld name="Slide 7">
+  <p:cSld name="Slide 8">
     <p:bg>
       <p:bgPr>
         <a:solidFill>
